--- a/investor-docs/File-B_Strategic-Deck.pptx
+++ b/investor-docs/File-B_Strategic-Deck.pptx
@@ -15,8 +15,10 @@
     <p:sldId id="263" r:id="rId14"/>
     <p:sldId id="264" r:id="rId15"/>
     <p:sldId id="265" r:id="rId16"/>
+    <p:sldId id="266" r:id="rId17"/>
+    <p:sldId id="267" r:id="rId18"/>
   </p:sldIdLst>
-  <p:sldSz cx="12188952" cy="6858000" type="screen4x3"/>
+  <p:sldSz cx="9144000" cy="5143500" type="screen4x3"/>
   <p:notesSz cx="6858000" cy="9144000"/>
   <p:defaultTextStyle>
     <a:defPPr>
@@ -3090,14 +3092,6 @@
 <file path=ppt/slides/slide1.xml><?xml version="1.0" encoding="utf-8"?>
 <p:sld xmlns:a="http://schemas.openxmlformats.org/drawingml/2006/main" xmlns:p="http://schemas.openxmlformats.org/presentationml/2006/main" xmlns:r="http://schemas.openxmlformats.org/officeDocument/2006/relationships">
   <p:cSld>
-    <p:bg>
-      <p:bgPr>
-        <a:solidFill>
-          <a:srgbClr val="0D1B2A"/>
-        </a:solidFill>
-        <a:effectLst/>
-      </p:bgPr>
-    </p:bg>
     <p:spTree>
       <p:nvGrpSpPr>
         <p:cNvPr id="1" name=""/>
@@ -3114,13 +3108,13 @@
         <p:spPr>
           <a:xfrm>
             <a:off x="0" y="0"/>
-            <a:ext cx="12188952" cy="73152"/>
+            <a:ext cx="9144000" cy="5143500"/>
           </a:xfrm>
           <a:prstGeom prst="rect">
             <a:avLst/>
           </a:prstGeom>
           <a:solidFill>
-            <a:srgbClr val="00B4D8"/>
+            <a:srgbClr val="0D1117"/>
           </a:solidFill>
           <a:ln>
             <a:noFill/>
@@ -3150,14 +3144,57 @@
       </p:sp>
       <p:sp>
         <p:nvSpPr>
-          <p:cNvPr id="3" name="TextBox 2"/>
+          <p:cNvPr id="3" name="Rectangle 2"/>
+          <p:cNvSpPr/>
+          <p:nvPr/>
+        </p:nvSpPr>
+        <p:spPr>
+          <a:xfrm>
+            <a:off x="0" y="4217670"/>
+            <a:ext cx="9144000" cy="102870"/>
+          </a:xfrm>
+          <a:prstGeom prst="rect">
+            <a:avLst/>
+          </a:prstGeom>
+          <a:solidFill>
+            <a:srgbClr val="3B6BFF"/>
+          </a:solidFill>
+          <a:ln>
+            <a:noFill/>
+          </a:ln>
+        </p:spPr>
+        <p:style>
+          <a:lnRef idx="1">
+            <a:schemeClr val="accent1"/>
+          </a:lnRef>
+          <a:fillRef idx="3">
+            <a:schemeClr val="accent1"/>
+          </a:fillRef>
+          <a:effectRef idx="2">
+            <a:schemeClr val="accent1"/>
+          </a:effectRef>
+          <a:fontRef idx="minor">
+            <a:schemeClr val="lt1"/>
+          </a:fontRef>
+        </p:style>
+        <p:txBody>
+          <a:bodyPr rtlCol="0" anchor="ctr"/>
+          <a:lstStyle/>
+          <a:p>
+            <a:pPr algn="ctr"/>
+          </a:p>
+        </p:txBody>
+      </p:sp>
+      <p:sp>
+        <p:nvSpPr>
+          <p:cNvPr id="4" name="TextBox 3"/>
           <p:cNvSpPr txBox="1"/>
           <p:nvPr/>
         </p:nvSpPr>
         <p:spPr>
           <a:xfrm>
-            <a:off x="274320" y="109728"/>
-            <a:ext cx="11612880" cy="457200"/>
+            <a:off x="548640" y="617219"/>
+            <a:ext cx="8046720" cy="514350"/>
           </a:xfrm>
           <a:prstGeom prst="rect">
             <a:avLst/>
@@ -3170,28 +3207,27 @@
           </a:bodyPr>
           <a:lstStyle/>
           <a:p>
-            <a:pPr algn="l"/>
-            <a:r>
-              <a:rPr sz="900" b="0">
-                <a:solidFill>
-                  <a:srgbClr val="00B4D8"/>
-                </a:solidFill>
-              </a:rPr>
-              <a:t>SLIDE 1 — THE EROOM'S LAW PROBLEM</a:t>
-            </a:r>
-          </a:p>
-        </p:txBody>
-      </p:sp>
-      <p:sp>
-        <p:nvSpPr>
-          <p:cNvPr id="4" name="TextBox 3"/>
+            <a:r>
+              <a:rPr sz="1100" b="0" i="0">
+                <a:solidFill>
+                  <a:srgbClr val="3B6BFF"/>
+                </a:solidFill>
+              </a:rPr>
+              <a:t>ETFT · AutoScientist</a:t>
+            </a:r>
+          </a:p>
+        </p:txBody>
+      </p:sp>
+      <p:sp>
+        <p:nvSpPr>
+          <p:cNvPr id="5" name="TextBox 4"/>
           <p:cNvSpPr txBox="1"/>
           <p:nvPr/>
         </p:nvSpPr>
         <p:spPr>
           <a:xfrm>
-            <a:off x="274320" y="502920"/>
-            <a:ext cx="11612880" cy="777240"/>
+            <a:off x="548640" y="1131570"/>
+            <a:ext cx="8046720" cy="1440180"/>
           </a:xfrm>
           <a:prstGeom prst="rect">
             <a:avLst/>
@@ -3204,28 +3240,27 @@
           </a:bodyPr>
           <a:lstStyle/>
           <a:p>
-            <a:pPr algn="l"/>
-            <a:r>
-              <a:rPr sz="2600" b="1">
+            <a:r>
+              <a:rPr sz="3000" b="1" i="0">
                 <a:solidFill>
                   <a:srgbClr val="FFFFFF"/>
                 </a:solidFill>
               </a:rPr>
-              <a:t>Science is getting exponentially more expensive — and slower.</a:t>
-            </a:r>
-          </a:p>
-        </p:txBody>
-      </p:sp>
-      <p:sp>
-        <p:nvSpPr>
-          <p:cNvPr id="5" name="TextBox 4"/>
+              <a:t>Strategic Presentation Deck</a:t>
+            </a:r>
+          </a:p>
+        </p:txBody>
+      </p:sp>
+      <p:sp>
+        <p:nvSpPr>
+          <p:cNvPr id="6" name="TextBox 5"/>
           <p:cNvSpPr txBox="1"/>
           <p:nvPr/>
         </p:nvSpPr>
         <p:spPr>
           <a:xfrm>
-            <a:off x="274320" y="1325880"/>
-            <a:ext cx="11612880" cy="4526279"/>
+            <a:off x="548640" y="2828925"/>
+            <a:ext cx="8046720" cy="617219"/>
           </a:xfrm>
           <a:prstGeom prst="rect">
             <a:avLst/>
@@ -3238,161 +3273,27 @@
           </a:bodyPr>
           <a:lstStyle/>
           <a:p>
-            <a:pPr algn="l"/>
-            <a:r>
-              <a:rPr sz="1300">
-                <a:solidFill>
-                  <a:srgbClr val="FFFFFF"/>
-                </a:solidFill>
-              </a:rPr>
-              <a:t>(mirror image of Moore's Law). Cross-reference: AI research paper volume doubles every</a:t>
-            </a:r>
-          </a:p>
-          <a:p>
-            <a:pPr algn="l"/>
-            <a:r>
-              <a:rPr sz="1300">
-                <a:solidFill>
-                  <a:srgbClr val="FFFFFF"/>
-                </a:solidFill>
-              </a:rPr>
-              <a:t>18 months, yet model architectures have converged. More compute, more papers, fewer</a:t>
-            </a:r>
-          </a:p>
-          <a:p>
-            <a:pPr algn="l"/>
-            <a:r>
-              <a:rPr sz="1300">
-                <a:solidFill>
-                  <a:srgbClr val="FFFFFF"/>
-                </a:solidFill>
-              </a:rPr>
-              <a:t>paradigm shifts.</a:t>
-            </a:r>
-          </a:p>
-          <a:p>
-            <a:pPr algn="l">
-              <a:spcAft>
-                <a:spcPts val="400"/>
-              </a:spcAft>
-            </a:pPr>
-            <a:r>
-              <a:rPr sz="1300">
-                <a:solidFill>
-                  <a:srgbClr val="FFFFFF"/>
-                </a:solidFill>
-              </a:rPr>
-              <a:t/>
-            </a:r>
-          </a:p>
-          <a:p>
-            <a:pPr algn="l">
-              <a:spcAft>
-                <a:spcPts val="400"/>
-              </a:spcAft>
-            </a:pPr>
-            <a:r>
-              <a:rPr sz="1300">
-                <a:solidFill>
-                  <a:srgbClr val="FFFFFF"/>
-                </a:solidFill>
-              </a:rPr>
-              <a:t/>
-            </a:r>
-          </a:p>
-          <a:p>
-            <a:pPr algn="l"/>
-            <a:r>
-              <a:rPr sz="1300" i="1">
-                <a:solidFill>
-                  <a:srgbClr val="FFC300"/>
-                </a:solidFill>
-              </a:rPr>
-              <a:t>"The pharma industry spends $2.6 billion per approved drug. The ML community produces"</a:t>
-            </a:r>
-          </a:p>
-          <a:p>
-            <a:pPr algn="l"/>
-            <a:r>
-              <a:rPr sz="1300" i="1">
-                <a:solidFill>
-                  <a:srgbClr val="FFC300"/>
-                </a:solidFill>
-              </a:rPr>
-              <a:t>"400,000 papers per year but ships three genuinely new architectures per decade."</a:t>
-            </a:r>
-          </a:p>
-          <a:p>
-            <a:pPr algn="l"/>
-            <a:r>
-              <a:rPr sz="1300" i="1">
-                <a:solidFill>
-                  <a:srgbClr val="FFC300"/>
-                </a:solidFill>
-              </a:rPr>
-              <a:t>"The bottleneck is not compute — it is the human cognitive loop that decides *what to"</a:t>
-            </a:r>
-          </a:p>
-          <a:p>
-            <a:pPr algn="l"/>
-            <a:r>
-              <a:rPr sz="1300" i="1">
-                <a:solidFill>
-                  <a:srgbClr val="FFC300"/>
-                </a:solidFill>
-              </a:rPr>
-              <a:t>"experiment on next*. Eroom's Law is not an industry anomaly. It is the default trajectory"</a:t>
-            </a:r>
-          </a:p>
-          <a:p>
-            <a:pPr algn="l"/>
-            <a:r>
-              <a:rPr sz="1300" i="1">
-                <a:solidFill>
-                  <a:srgbClr val="FFC300"/>
-                </a:solidFill>
-              </a:rPr>
-              <a:t>"of any science driven by human intuition."</a:t>
-            </a:r>
-          </a:p>
-          <a:p>
-            <a:pPr algn="l">
-              <a:spcAft>
-                <a:spcPts val="400"/>
-              </a:spcAft>
-            </a:pPr>
-            <a:r>
-              <a:rPr sz="1300">
-                <a:solidFill>
-                  <a:srgbClr val="FFFFFF"/>
-                </a:solidFill>
-              </a:rPr>
-              <a:t/>
-            </a:r>
-          </a:p>
-          <a:p>
-            <a:pPr algn="l"/>
-            <a:r>
-              <a:rPr sz="1300">
-                <a:solidFill>
-                  <a:srgbClr val="FFFFFF"/>
-                </a:solidFill>
-              </a:rPr>
-              <a:t>Call to action: *What if the scientific method itself could be automated?*</a:t>
-            </a:r>
-          </a:p>
-        </p:txBody>
-      </p:sp>
-      <p:sp>
-        <p:nvSpPr>
-          <p:cNvPr id="6" name="TextBox 5"/>
+            <a:r>
+              <a:rPr sz="1200" b="0" i="0">
+                <a:solidFill>
+                  <a:srgbClr val="8A94A6"/>
+                </a:solidFill>
+              </a:rPr>
+              <a:t>Evolutionary Trajectory Fine-Tuning — Autonomous R&amp;D Acceleration</a:t>
+            </a:r>
+          </a:p>
+        </p:txBody>
+      </p:sp>
+      <p:sp>
+        <p:nvSpPr>
+          <p:cNvPr id="7" name="TextBox 6"/>
           <p:cNvSpPr txBox="1"/>
           <p:nvPr/>
         </p:nvSpPr>
         <p:spPr>
           <a:xfrm>
-            <a:off x="274320" y="6263640"/>
-            <a:ext cx="11612880" cy="274320"/>
+            <a:off x="548640" y="4371975"/>
+            <a:ext cx="8046720" cy="514350"/>
           </a:xfrm>
           <a:prstGeom prst="rect">
             <a:avLst/>
@@ -3405,14 +3306,13 @@
           </a:bodyPr>
           <a:lstStyle/>
           <a:p>
-            <a:pPr algn="ctr"/>
-            <a:r>
-              <a:rPr sz="700" b="0">
-                <a:solidFill>
-                  <a:srgbClr val="CCD6E0"/>
-                </a:solidFill>
-              </a:rPr>
-              <a:t>ETFT (AutoScientist) · Lukas Benda · lukas.benda@boldpivot.cz · Confidential</a:t>
+            <a:r>
+              <a:rPr sz="900" b="0" i="0">
+                <a:solidFill>
+                  <a:srgbClr val="8A94A6"/>
+                </a:solidFill>
+              </a:rPr>
+              <a:t>Lukas Benda  ·  lukas.benda@boldpivot.cz  ·  April 2026</a:t>
             </a:r>
           </a:p>
         </p:txBody>
@@ -3428,14 +3328,6 @@
 <file path=ppt/slides/slide10.xml><?xml version="1.0" encoding="utf-8"?>
 <p:sld xmlns:a="http://schemas.openxmlformats.org/drawingml/2006/main" xmlns:p="http://schemas.openxmlformats.org/presentationml/2006/main" xmlns:r="http://schemas.openxmlformats.org/officeDocument/2006/relationships">
   <p:cSld>
-    <p:bg>
-      <p:bgPr>
-        <a:solidFill>
-          <a:srgbClr val="0D1B2A"/>
-        </a:solidFill>
-        <a:effectLst/>
-      </p:bgPr>
-    </p:bg>
     <p:spTree>
       <p:nvGrpSpPr>
         <p:cNvPr id="1" name=""/>
@@ -3452,13 +3344,13 @@
         <p:spPr>
           <a:xfrm>
             <a:off x="0" y="0"/>
-            <a:ext cx="12188952" cy="73152"/>
+            <a:ext cx="9144000" cy="5143500"/>
           </a:xfrm>
           <a:prstGeom prst="rect">
             <a:avLst/>
           </a:prstGeom>
           <a:solidFill>
-            <a:srgbClr val="00B4D8"/>
+            <a:srgbClr val="FFFFFF"/>
           </a:solidFill>
           <a:ln>
             <a:noFill/>
@@ -3488,14 +3380,100 @@
       </p:sp>
       <p:sp>
         <p:nvSpPr>
-          <p:cNvPr id="3" name="TextBox 2"/>
+          <p:cNvPr id="3" name="Rectangle 2"/>
+          <p:cNvSpPr/>
+          <p:nvPr/>
+        </p:nvSpPr>
+        <p:spPr>
+          <a:xfrm>
+            <a:off x="0" y="0"/>
+            <a:ext cx="9144000" cy="1131570"/>
+          </a:xfrm>
+          <a:prstGeom prst="rect">
+            <a:avLst/>
+          </a:prstGeom>
+          <a:solidFill>
+            <a:srgbClr val="0D1117"/>
+          </a:solidFill>
+          <a:ln>
+            <a:noFill/>
+          </a:ln>
+        </p:spPr>
+        <p:style>
+          <a:lnRef idx="1">
+            <a:schemeClr val="accent1"/>
+          </a:lnRef>
+          <a:fillRef idx="3">
+            <a:schemeClr val="accent1"/>
+          </a:fillRef>
+          <a:effectRef idx="2">
+            <a:schemeClr val="accent1"/>
+          </a:effectRef>
+          <a:fontRef idx="minor">
+            <a:schemeClr val="lt1"/>
+          </a:fontRef>
+        </p:style>
+        <p:txBody>
+          <a:bodyPr rtlCol="0" anchor="ctr"/>
+          <a:lstStyle/>
+          <a:p>
+            <a:pPr algn="ctr"/>
+          </a:p>
+        </p:txBody>
+      </p:sp>
+      <p:sp>
+        <p:nvSpPr>
+          <p:cNvPr id="4" name="Rectangle 3"/>
+          <p:cNvSpPr/>
+          <p:nvPr/>
+        </p:nvSpPr>
+        <p:spPr>
+          <a:xfrm>
+            <a:off x="0" y="1131570"/>
+            <a:ext cx="9144000" cy="41148"/>
+          </a:xfrm>
+          <a:prstGeom prst="rect">
+            <a:avLst/>
+          </a:prstGeom>
+          <a:solidFill>
+            <a:srgbClr val="3B6BFF"/>
+          </a:solidFill>
+          <a:ln>
+            <a:noFill/>
+          </a:ln>
+        </p:spPr>
+        <p:style>
+          <a:lnRef idx="1">
+            <a:schemeClr val="accent1"/>
+          </a:lnRef>
+          <a:fillRef idx="3">
+            <a:schemeClr val="accent1"/>
+          </a:fillRef>
+          <a:effectRef idx="2">
+            <a:schemeClr val="accent1"/>
+          </a:effectRef>
+          <a:fontRef idx="minor">
+            <a:schemeClr val="lt1"/>
+          </a:fontRef>
+        </p:style>
+        <p:txBody>
+          <a:bodyPr rtlCol="0" anchor="ctr"/>
+          <a:lstStyle/>
+          <a:p>
+            <a:pPr algn="ctr"/>
+          </a:p>
+        </p:txBody>
+      </p:sp>
+      <p:sp>
+        <p:nvSpPr>
+          <p:cNvPr id="5" name="TextBox 4"/>
           <p:cNvSpPr txBox="1"/>
           <p:nvPr/>
         </p:nvSpPr>
         <p:spPr>
           <a:xfrm>
-            <a:off x="274320" y="109728"/>
-            <a:ext cx="11612880" cy="457200"/>
+            <a:off x="274320" y="51435"/>
+            <a:ext cx="4572000" cy="411480"/>
           </a:xfrm>
           <a:prstGeom prst="rect">
             <a:avLst/>
@@ -3508,15 +3486,778 @@
           </a:bodyPr>
           <a:lstStyle/>
           <a:p>
-            <a:pPr algn="l"/>
-            <a:r>
-              <a:rPr sz="900" b="0">
-                <a:solidFill>
-                  <a:srgbClr val="00B4D8"/>
-                </a:solidFill>
-              </a:rPr>
-              <a:t>SLIDE 10 — THE ASK &amp; ROADMAP</a:t>
-            </a:r>
+            <a:r>
+              <a:rPr sz="800" b="0" i="0">
+                <a:solidFill>
+                  <a:srgbClr val="3B6BFF"/>
+                </a:solidFill>
+              </a:rPr>
+              <a:t>ETFT · AutoScientist</a:t>
+            </a:r>
+          </a:p>
+        </p:txBody>
+      </p:sp>
+      <p:sp>
+        <p:nvSpPr>
+          <p:cNvPr id="6" name="TextBox 5"/>
+          <p:cNvSpPr txBox="1"/>
+          <p:nvPr/>
+        </p:nvSpPr>
+        <p:spPr>
+          <a:xfrm>
+            <a:off x="6858000" y="51435"/>
+            <a:ext cx="2011680" cy="411480"/>
+          </a:xfrm>
+          <a:prstGeom prst="rect">
+            <a:avLst/>
+          </a:prstGeom>
+          <a:noFill/>
+        </p:spPr>
+        <p:txBody>
+          <a:bodyPr wrap="square">
+            <a:spAutoFit/>
+          </a:bodyPr>
+          <a:lstStyle/>
+          <a:p>
+            <a:pPr algn="r"/>
+            <a:r>
+              <a:rPr sz="800" b="0" i="0">
+                <a:solidFill>
+                  <a:srgbClr val="8A94A6"/>
+                </a:solidFill>
+              </a:rPr>
+              <a:t>09 / 10</a:t>
+            </a:r>
+          </a:p>
+        </p:txBody>
+      </p:sp>
+      <p:sp>
+        <p:nvSpPr>
+          <p:cNvPr id="7" name="TextBox 6"/>
+          <p:cNvSpPr txBox="1"/>
+          <p:nvPr/>
+        </p:nvSpPr>
+        <p:spPr>
+          <a:xfrm>
+            <a:off x="274320" y="308609"/>
+            <a:ext cx="8595359" cy="771525"/>
+          </a:xfrm>
+          <a:prstGeom prst="rect">
+            <a:avLst/>
+          </a:prstGeom>
+          <a:noFill/>
+        </p:spPr>
+        <p:txBody>
+          <a:bodyPr wrap="square">
+            <a:spAutoFit/>
+          </a:bodyPr>
+          <a:lstStyle/>
+          <a:p>
+            <a:r>
+              <a:rPr sz="1600" b="1" i="0">
+                <a:solidFill>
+                  <a:srgbClr val="FFFFFF"/>
+                </a:solidFill>
+              </a:rPr>
+              <a:t>From Deep Learning to General Innovation Accelerator</a:t>
+            </a:r>
+          </a:p>
+        </p:txBody>
+      </p:sp>
+      <p:sp>
+        <p:nvSpPr>
+          <p:cNvPr id="8" name="TextBox 7"/>
+          <p:cNvSpPr txBox="1"/>
+          <p:nvPr/>
+        </p:nvSpPr>
+        <p:spPr>
+          <a:xfrm>
+            <a:off x="274320" y="1440180"/>
+            <a:ext cx="8595359" cy="3394710"/>
+          </a:xfrm>
+          <a:prstGeom prst="rect">
+            <a:avLst/>
+          </a:prstGeom>
+          <a:noFill/>
+        </p:spPr>
+        <p:txBody>
+          <a:bodyPr wrap="square">
+            <a:spAutoFit/>
+          </a:bodyPr>
+          <a:lstStyle/>
+          <a:p>
+            <a:r>
+              <a:rPr sz="1050">
+                <a:solidFill>
+                  <a:srgbClr val="1A1F2E"/>
+                </a:solidFill>
+              </a:rPr>
+              <a:t>Headline: The same engine that invents neural architectures can evolve anything.</a:t>
+            </a:r>
+          </a:p>
+          <a:p>
+            <a:r>
+              <a:rPr sz="1050">
+                <a:solidFill>
+                  <a:srgbClr val="1A1F2E"/>
+                </a:solidFill>
+              </a:rPr>
+              <a:t>Key visual: Hierarchy pyramid — three tiers:</a:t>
+            </a:r>
+          </a:p>
+          <a:p>
+            <a:r>
+              <a:rPr sz="1050">
+                <a:solidFill>
+                  <a:srgbClr val="1A1F2E"/>
+                </a:solidFill>
+              </a:rPr>
+              <a:t>  •  Tier 1 (base): Code &amp; algorithm optimisation (validated PoC)</a:t>
+            </a:r>
+          </a:p>
+          <a:p>
+            <a:r>
+              <a:rPr sz="1050">
+                <a:solidFill>
+                  <a:srgbClr val="1A1F2E"/>
+                </a:solidFill>
+              </a:rPr>
+              <a:t>  •  Tier 2 (middle): Scientific blueprints &amp; foundational papers (Second-Order Innovation)</a:t>
+            </a:r>
+          </a:p>
+          <a:p>
+            <a:r>
+              <a:rPr sz="1050">
+                <a:solidFill>
+                  <a:srgbClr val="1A1F2E"/>
+                </a:solidFill>
+              </a:rPr>
+              <a:t>  •  Tier 3 (apex): Organisational structures, societal systems (Meta-Evolution)</a:t>
+            </a:r>
+          </a:p>
+          <a:p>
+            <a:r>
+              <a:rPr sz="1050">
+                <a:solidFill>
+                  <a:srgbClr val="1A1F2E"/>
+                </a:solidFill>
+              </a:rPr>
+              <a:t>Body copy:</a:t>
+            </a:r>
+          </a:p>
+          <a:p>
+            <a:r>
+              <a:rPr sz="1050">
+                <a:solidFill>
+                  <a:srgbClr val="1A1F2E"/>
+                </a:solidFill>
+              </a:rPr>
+              <a:t>An algorithm is any ordered sequence of instructions designed to solve a problem.</a:t>
+            </a:r>
+          </a:p>
+          <a:p>
+            <a:r>
+              <a:rPr sz="1050">
+                <a:solidFill>
+                  <a:srgbClr val="1A1F2E"/>
+                </a:solidFill>
+              </a:rPr>
+              <a:t>A pharmaceutical synthesis protocol is an algorithm. A clinical trial design is an algorithm.</a:t>
+            </a:r>
+          </a:p>
+          <a:p>
+            <a:r>
+              <a:rPr sz="1050">
+                <a:solidFill>
+                  <a:srgbClr val="1A1F2E"/>
+                </a:solidFill>
+              </a:rPr>
+              <a:t>A global supply chain is an algorithm. An organisation is a macro-algorithm.</a:t>
+            </a:r>
+          </a:p>
+          <a:p>
+            <a:r>
+              <a:rPr sz="1050">
+                <a:solidFill>
+                  <a:srgbClr val="1A1F2E"/>
+                </a:solidFill>
+              </a:rPr>
+              <a:t>Once ETFT can map evolutionary trajectories in one domain, the framework transfers.</a:t>
+            </a:r>
+          </a:p>
+          <a:p>
+            <a:r>
+              <a:rPr sz="1050">
+                <a:solidFill>
+                  <a:srgbClr val="1A1F2E"/>
+                </a:solidFill>
+              </a:rPr>
+              <a:t>The General Innovation Accelerator does not compete with domain experts —</a:t>
+            </a:r>
+          </a:p>
+          <a:p>
+            <a:r>
+              <a:rPr sz="1050">
+                <a:solidFill>
+                  <a:srgbClr val="1A1F2E"/>
+                </a:solidFill>
+              </a:rPr>
+              <a:t>it gives them the autonomous research scientist they never had.</a:t>
+            </a:r>
+          </a:p>
+          <a:p>
+            <a:r>
+              <a:rPr sz="1050">
+                <a:solidFill>
+                  <a:srgbClr val="1A1F2E"/>
+                </a:solidFill>
+              </a:rPr>
+              <a:t>Expanding the objective function to encode human wellbeing as the reward signal</a:t>
+            </a:r>
+          </a:p>
+          <a:p>
+            <a:r>
+              <a:rPr sz="1050">
+                <a:solidFill>
+                  <a:srgbClr val="1A1F2E"/>
+                </a:solidFill>
+              </a:rPr>
+              <a:t>opens targets no purely capital-efficiency model can reach.</a:t>
+            </a:r>
+          </a:p>
+        </p:txBody>
+      </p:sp>
+    </p:spTree>
+  </p:cSld>
+  <p:clrMapOvr>
+    <a:masterClrMapping/>
+  </p:clrMapOvr>
+</p:sld>
+</file>
+
+<file path=ppt/slides/slide11.xml><?xml version="1.0" encoding="utf-8"?>
+<p:sld xmlns:a="http://schemas.openxmlformats.org/drawingml/2006/main" xmlns:p="http://schemas.openxmlformats.org/presentationml/2006/main" xmlns:r="http://schemas.openxmlformats.org/officeDocument/2006/relationships">
+  <p:cSld>
+    <p:spTree>
+      <p:nvGrpSpPr>
+        <p:cNvPr id="1" name=""/>
+        <p:cNvGrpSpPr/>
+        <p:nvPr/>
+      </p:nvGrpSpPr>
+      <p:grpSpPr/>
+      <p:sp>
+        <p:nvSpPr>
+          <p:cNvPr id="2" name="Rectangle 1"/>
+          <p:cNvSpPr/>
+          <p:nvPr/>
+        </p:nvSpPr>
+        <p:spPr>
+          <a:xfrm>
+            <a:off x="0" y="0"/>
+            <a:ext cx="9144000" cy="5143500"/>
+          </a:xfrm>
+          <a:prstGeom prst="rect">
+            <a:avLst/>
+          </a:prstGeom>
+          <a:solidFill>
+            <a:srgbClr val="FFFFFF"/>
+          </a:solidFill>
+          <a:ln>
+            <a:noFill/>
+          </a:ln>
+        </p:spPr>
+        <p:style>
+          <a:lnRef idx="1">
+            <a:schemeClr val="accent1"/>
+          </a:lnRef>
+          <a:fillRef idx="3">
+            <a:schemeClr val="accent1"/>
+          </a:fillRef>
+          <a:effectRef idx="2">
+            <a:schemeClr val="accent1"/>
+          </a:effectRef>
+          <a:fontRef idx="minor">
+            <a:schemeClr val="lt1"/>
+          </a:fontRef>
+        </p:style>
+        <p:txBody>
+          <a:bodyPr rtlCol="0" anchor="ctr"/>
+          <a:lstStyle/>
+          <a:p>
+            <a:pPr algn="ctr"/>
+          </a:p>
+        </p:txBody>
+      </p:sp>
+      <p:sp>
+        <p:nvSpPr>
+          <p:cNvPr id="3" name="Rectangle 2"/>
+          <p:cNvSpPr/>
+          <p:nvPr/>
+        </p:nvSpPr>
+        <p:spPr>
+          <a:xfrm>
+            <a:off x="0" y="0"/>
+            <a:ext cx="9144000" cy="1131570"/>
+          </a:xfrm>
+          <a:prstGeom prst="rect">
+            <a:avLst/>
+          </a:prstGeom>
+          <a:solidFill>
+            <a:srgbClr val="0D1117"/>
+          </a:solidFill>
+          <a:ln>
+            <a:noFill/>
+          </a:ln>
+        </p:spPr>
+        <p:style>
+          <a:lnRef idx="1">
+            <a:schemeClr val="accent1"/>
+          </a:lnRef>
+          <a:fillRef idx="3">
+            <a:schemeClr val="accent1"/>
+          </a:fillRef>
+          <a:effectRef idx="2">
+            <a:schemeClr val="accent1"/>
+          </a:effectRef>
+          <a:fontRef idx="minor">
+            <a:schemeClr val="lt1"/>
+          </a:fontRef>
+        </p:style>
+        <p:txBody>
+          <a:bodyPr rtlCol="0" anchor="ctr"/>
+          <a:lstStyle/>
+          <a:p>
+            <a:pPr algn="ctr"/>
+          </a:p>
+        </p:txBody>
+      </p:sp>
+      <p:sp>
+        <p:nvSpPr>
+          <p:cNvPr id="4" name="Rectangle 3"/>
+          <p:cNvSpPr/>
+          <p:nvPr/>
+        </p:nvSpPr>
+        <p:spPr>
+          <a:xfrm>
+            <a:off x="0" y="1131570"/>
+            <a:ext cx="9144000" cy="41148"/>
+          </a:xfrm>
+          <a:prstGeom prst="rect">
+            <a:avLst/>
+          </a:prstGeom>
+          <a:solidFill>
+            <a:srgbClr val="3B6BFF"/>
+          </a:solidFill>
+          <a:ln>
+            <a:noFill/>
+          </a:ln>
+        </p:spPr>
+        <p:style>
+          <a:lnRef idx="1">
+            <a:schemeClr val="accent1"/>
+          </a:lnRef>
+          <a:fillRef idx="3">
+            <a:schemeClr val="accent1"/>
+          </a:fillRef>
+          <a:effectRef idx="2">
+            <a:schemeClr val="accent1"/>
+          </a:effectRef>
+          <a:fontRef idx="minor">
+            <a:schemeClr val="lt1"/>
+          </a:fontRef>
+        </p:style>
+        <p:txBody>
+          <a:bodyPr rtlCol="0" anchor="ctr"/>
+          <a:lstStyle/>
+          <a:p>
+            <a:pPr algn="ctr"/>
+          </a:p>
+        </p:txBody>
+      </p:sp>
+      <p:sp>
+        <p:nvSpPr>
+          <p:cNvPr id="5" name="TextBox 4"/>
+          <p:cNvSpPr txBox="1"/>
+          <p:nvPr/>
+        </p:nvSpPr>
+        <p:spPr>
+          <a:xfrm>
+            <a:off x="274320" y="51435"/>
+            <a:ext cx="4572000" cy="411480"/>
+          </a:xfrm>
+          <a:prstGeom prst="rect">
+            <a:avLst/>
+          </a:prstGeom>
+          <a:noFill/>
+        </p:spPr>
+        <p:txBody>
+          <a:bodyPr wrap="square">
+            <a:spAutoFit/>
+          </a:bodyPr>
+          <a:lstStyle/>
+          <a:p>
+            <a:r>
+              <a:rPr sz="800" b="0" i="0">
+                <a:solidFill>
+                  <a:srgbClr val="3B6BFF"/>
+                </a:solidFill>
+              </a:rPr>
+              <a:t>ETFT · AutoScientist</a:t>
+            </a:r>
+          </a:p>
+        </p:txBody>
+      </p:sp>
+      <p:sp>
+        <p:nvSpPr>
+          <p:cNvPr id="6" name="TextBox 5"/>
+          <p:cNvSpPr txBox="1"/>
+          <p:nvPr/>
+        </p:nvSpPr>
+        <p:spPr>
+          <a:xfrm>
+            <a:off x="6858000" y="51435"/>
+            <a:ext cx="2011680" cy="411480"/>
+          </a:xfrm>
+          <a:prstGeom prst="rect">
+            <a:avLst/>
+          </a:prstGeom>
+          <a:noFill/>
+        </p:spPr>
+        <p:txBody>
+          <a:bodyPr wrap="square">
+            <a:spAutoFit/>
+          </a:bodyPr>
+          <a:lstStyle/>
+          <a:p>
+            <a:pPr algn="r"/>
+            <a:r>
+              <a:rPr sz="800" b="0" i="0">
+                <a:solidFill>
+                  <a:srgbClr val="8A94A6"/>
+                </a:solidFill>
+              </a:rPr>
+              <a:t>10 / 10</a:t>
+            </a:r>
+          </a:p>
+        </p:txBody>
+      </p:sp>
+      <p:sp>
+        <p:nvSpPr>
+          <p:cNvPr id="7" name="TextBox 6"/>
+          <p:cNvSpPr txBox="1"/>
+          <p:nvPr/>
+        </p:nvSpPr>
+        <p:spPr>
+          <a:xfrm>
+            <a:off x="274320" y="308609"/>
+            <a:ext cx="8595359" cy="771525"/>
+          </a:xfrm>
+          <a:prstGeom prst="rect">
+            <a:avLst/>
+          </a:prstGeom>
+          <a:noFill/>
+        </p:spPr>
+        <p:txBody>
+          <a:bodyPr wrap="square">
+            <a:spAutoFit/>
+          </a:bodyPr>
+          <a:lstStyle/>
+          <a:p>
+            <a:r>
+              <a:rPr sz="1600" b="1" i="0">
+                <a:solidFill>
+                  <a:srgbClr val="FFFFFF"/>
+                </a:solidFill>
+              </a:rPr>
+              <a:t>The Ask &amp; Roadmap</a:t>
+            </a:r>
+          </a:p>
+        </p:txBody>
+      </p:sp>
+      <p:sp>
+        <p:nvSpPr>
+          <p:cNvPr id="8" name="TextBox 7"/>
+          <p:cNvSpPr txBox="1"/>
+          <p:nvPr/>
+        </p:nvSpPr>
+        <p:spPr>
+          <a:xfrm>
+            <a:off x="274320" y="1440180"/>
+            <a:ext cx="8595359" cy="3394710"/>
+          </a:xfrm>
+          <a:prstGeom prst="rect">
+            <a:avLst/>
+          </a:prstGeom>
+          <a:noFill/>
+        </p:spPr>
+        <p:txBody>
+          <a:bodyPr wrap="square">
+            <a:spAutoFit/>
+          </a:bodyPr>
+          <a:lstStyle/>
+          <a:p>
+            <a:r>
+              <a:rPr sz="1050">
+                <a:solidFill>
+                  <a:srgbClr val="1A1F2E"/>
+                </a:solidFill>
+              </a:rPr>
+              <a:t>Headline: What we need. What you get.</a:t>
+            </a:r>
+          </a:p>
+          <a:p>
+            <a:r>
+              <a:rPr sz="1050">
+                <a:solidFill>
+                  <a:srgbClr val="1A1F2E"/>
+                </a:solidFill>
+              </a:rPr>
+              <a:t>Milestone roadmap:</a:t>
+            </a:r>
+          </a:p>
+          <a:p>
+            <a:r>
+              <a:rPr sz="900">
+                <a:solidFill>
+                  <a:srgbClr val="2D3748"/>
+                </a:solidFill>
+              </a:rPr>
+              <a:t>Phase  ·  Timeline  ·  Deliverable</a:t>
+            </a:r>
+          </a:p>
+          <a:p>
+            <a:r>
+              <a:rPr sz="900">
+                <a:solidFill>
+                  <a:srgbClr val="2D3748"/>
+                </a:solidFill>
+              </a:rPr>
+              <a:t>PoC validated  ·  [DONE] April 2026  ·  TinyML SOTA+1 discovery, reproducible</a:t>
+            </a:r>
+          </a:p>
+          <a:p>
+            <a:r>
+              <a:rPr sz="900">
+                <a:solidFill>
+                  <a:srgbClr val="2D3748"/>
+                </a:solidFill>
+              </a:rPr>
+              <a:t>Seed round  ·  Q2 2026  ·  Compute infra, 3-person core team</a:t>
+            </a:r>
+          </a:p>
+          <a:p>
+            <a:r>
+              <a:rPr sz="900">
+                <a:solidFill>
+                  <a:srgbClr val="2D3748"/>
+                </a:solidFill>
+              </a:rPr>
+              <a:t>Full DL benchmark  ·  Q3 2026  ·  ETFT applied to ImageNet / LLM architectures</a:t>
+            </a:r>
+          </a:p>
+          <a:p>
+            <a:r>
+              <a:rPr sz="900">
+                <a:solidFill>
+                  <a:srgbClr val="2D3748"/>
+                </a:solidFill>
+              </a:rPr>
+              <a:t>Domain expansion  ·  Q4 2026  ·  Pharma / materials science pilot partner</a:t>
+            </a:r>
+          </a:p>
+          <a:p>
+            <a:r>
+              <a:rPr sz="900">
+                <a:solidFill>
+                  <a:srgbClr val="2D3748"/>
+                </a:solidFill>
+              </a:rPr>
+              <a:t>Series A readiness  ·  Q1 2027  ·  Revenue pipeline from IP licensing &amp; API access</a:t>
+            </a:r>
+          </a:p>
+          <a:p>
+            <a:r>
+              <a:rPr sz="1050">
+                <a:solidFill>
+                  <a:srgbClr val="1A1F2E"/>
+                </a:solidFill>
+              </a:rPr>
+              <a:t>The ask: Seed investment to fund 12 months of compute and engineering.</a:t>
+            </a:r>
+          </a:p>
+          <a:p>
+            <a:r>
+              <a:rPr sz="1050">
+                <a:solidFill>
+                  <a:srgbClr val="1A1F2E"/>
+                </a:solidFill>
+              </a:rPr>
+              <a:t>What investors get:</a:t>
+            </a:r>
+          </a:p>
+          <a:p>
+            <a:r>
+              <a:rPr sz="1050">
+                <a:solidFill>
+                  <a:srgbClr val="1A1F2E"/>
+                </a:solidFill>
+              </a:rPr>
+              <a:t>  •  Equity in the IP layer of autonomous scientific discovery</a:t>
+            </a:r>
+          </a:p>
+          <a:p>
+            <a:r>
+              <a:rPr sz="1050">
+                <a:solidFill>
+                  <a:srgbClr val="1A1F2E"/>
+                </a:solidFill>
+              </a:rPr>
+              <a:t>  •  First access to licensing deals with pharma, semiconductor, and defence R&amp;D organisations</a:t>
+            </a:r>
+          </a:p>
+          <a:p>
+            <a:r>
+              <a:rPr sz="1050">
+                <a:solidFill>
+                  <a:srgbClr val="1A1F2E"/>
+                </a:solidFill>
+              </a:rPr>
+              <a:t>  •  A front-row seat to the next Eroom's Law reversal</a:t>
+            </a:r>
+          </a:p>
+          <a:p>
+            <a:r>
+              <a:rPr sz="1050">
+                <a:solidFill>
+                  <a:srgbClr val="1A1F2E"/>
+                </a:solidFill>
+              </a:rPr>
+              <a:t>Links: [Demo video — ETFT__AI_Research_Scientist.mp4] · [Full Technical Whitepaper — available under NDA]</a:t>
+            </a:r>
+          </a:p>
+          <a:p>
+            <a:r>
+              <a:rPr sz="1050">
+                <a:solidFill>
+                  <a:srgbClr val="1A1F2E"/>
+                </a:solidFill>
+              </a:rPr>
+              <a:t>Contact: Lukas Benda · lukas.benda@boldpivot.cz</a:t>
+            </a:r>
+          </a:p>
+          <a:p>
+            <a:r>
+              <a:rPr sz="1050">
+                <a:solidFill>
+                  <a:srgbClr val="1A1F2E"/>
+                </a:solidFill>
+              </a:rPr>
+              <a:t>File B — Strategic Deck | DocSend: download disabled · Dynamic Watermarking: on</a:t>
+            </a:r>
+          </a:p>
+        </p:txBody>
+      </p:sp>
+    </p:spTree>
+  </p:cSld>
+  <p:clrMapOvr>
+    <a:masterClrMapping/>
+  </p:clrMapOvr>
+</p:sld>
+</file>
+
+<file path=ppt/slides/slide12.xml><?xml version="1.0" encoding="utf-8"?>
+<p:sld xmlns:a="http://schemas.openxmlformats.org/drawingml/2006/main" xmlns:p="http://schemas.openxmlformats.org/presentationml/2006/main" xmlns:r="http://schemas.openxmlformats.org/officeDocument/2006/relationships">
+  <p:cSld>
+    <p:spTree>
+      <p:nvGrpSpPr>
+        <p:cNvPr id="1" name=""/>
+        <p:cNvGrpSpPr/>
+        <p:nvPr/>
+      </p:nvGrpSpPr>
+      <p:grpSpPr/>
+      <p:sp>
+        <p:nvSpPr>
+          <p:cNvPr id="2" name="Rectangle 1"/>
+          <p:cNvSpPr/>
+          <p:nvPr/>
+        </p:nvSpPr>
+        <p:spPr>
+          <a:xfrm>
+            <a:off x="0" y="0"/>
+            <a:ext cx="9144000" cy="5143500"/>
+          </a:xfrm>
+          <a:prstGeom prst="rect">
+            <a:avLst/>
+          </a:prstGeom>
+          <a:solidFill>
+            <a:srgbClr val="0D1117"/>
+          </a:solidFill>
+          <a:ln>
+            <a:noFill/>
+          </a:ln>
+        </p:spPr>
+        <p:style>
+          <a:lnRef idx="1">
+            <a:schemeClr val="accent1"/>
+          </a:lnRef>
+          <a:fillRef idx="3">
+            <a:schemeClr val="accent1"/>
+          </a:fillRef>
+          <a:effectRef idx="2">
+            <a:schemeClr val="accent1"/>
+          </a:effectRef>
+          <a:fontRef idx="minor">
+            <a:schemeClr val="lt1"/>
+          </a:fontRef>
+        </p:style>
+        <p:txBody>
+          <a:bodyPr rtlCol="0" anchor="ctr"/>
+          <a:lstStyle/>
+          <a:p>
+            <a:pPr algn="ctr"/>
+          </a:p>
+        </p:txBody>
+      </p:sp>
+      <p:sp>
+        <p:nvSpPr>
+          <p:cNvPr id="3" name="Rectangle 2"/>
+          <p:cNvSpPr/>
+          <p:nvPr/>
+        </p:nvSpPr>
+        <p:spPr>
+          <a:xfrm>
+            <a:off x="0" y="4217670"/>
+            <a:ext cx="9144000" cy="102870"/>
+          </a:xfrm>
+          <a:prstGeom prst="rect">
+            <a:avLst/>
+          </a:prstGeom>
+          <a:solidFill>
+            <a:srgbClr val="3B6BFF"/>
+          </a:solidFill>
+          <a:ln>
+            <a:noFill/>
+          </a:ln>
+        </p:spPr>
+        <p:style>
+          <a:lnRef idx="1">
+            <a:schemeClr val="accent1"/>
+          </a:lnRef>
+          <a:fillRef idx="3">
+            <a:schemeClr val="accent1"/>
+          </a:fillRef>
+          <a:effectRef idx="2">
+            <a:schemeClr val="accent1"/>
+          </a:effectRef>
+          <a:fontRef idx="minor">
+            <a:schemeClr val="lt1"/>
+          </a:fontRef>
+        </p:style>
+        <p:txBody>
+          <a:bodyPr rtlCol="0" anchor="ctr"/>
+          <a:lstStyle/>
+          <a:p>
+            <a:pPr algn="ctr"/>
           </a:p>
         </p:txBody>
       </p:sp>
@@ -3528,8 +4269,8 @@
         </p:nvSpPr>
         <p:spPr>
           <a:xfrm>
-            <a:off x="274320" y="502920"/>
-            <a:ext cx="11612880" cy="777240"/>
+            <a:off x="548640" y="1285875"/>
+            <a:ext cx="8046720" cy="1028700"/>
           </a:xfrm>
           <a:prstGeom prst="rect">
             <a:avLst/>
@@ -3542,14 +4283,13 @@
           </a:bodyPr>
           <a:lstStyle/>
           <a:p>
-            <a:pPr algn="l"/>
-            <a:r>
-              <a:rPr sz="2600" b="1">
+            <a:r>
+              <a:rPr sz="3600" b="1" i="0">
                 <a:solidFill>
                   <a:srgbClr val="FFFFFF"/>
                 </a:solidFill>
               </a:rPr>
-              <a:t>What we need. What you get.</a:t>
+              <a:t>Thank you.</a:t>
             </a:r>
           </a:p>
         </p:txBody>
@@ -3562,8 +4302,8 @@
         </p:nvSpPr>
         <p:spPr>
           <a:xfrm>
-            <a:off x="274320" y="1325880"/>
-            <a:ext cx="11612880" cy="4526279"/>
+            <a:off x="548640" y="2674620"/>
+            <a:ext cx="8046720" cy="617219"/>
           </a:xfrm>
           <a:prstGeom prst="rect">
             <a:avLst/>
@@ -3576,291 +4316,13 @@
           </a:bodyPr>
           <a:lstStyle/>
           <a:p>
-            <a:pPr algn="l"/>
-            <a:r>
-              <a:rPr sz="1300">
-                <a:solidFill>
-                  <a:srgbClr val="FFFFFF"/>
-                </a:solidFill>
-              </a:rPr>
-              <a:t>Milestone roadmap:</a:t>
-            </a:r>
-          </a:p>
-          <a:p>
-            <a:pPr algn="l">
-              <a:spcAft>
-                <a:spcPts val="400"/>
-              </a:spcAft>
-            </a:pPr>
-            <a:r>
-              <a:rPr sz="1300">
-                <a:solidFill>
-                  <a:srgbClr val="FFFFFF"/>
-                </a:solidFill>
-              </a:rPr>
-              <a:t/>
-            </a:r>
-          </a:p>
-          <a:p>
-            <a:pPr algn="l"/>
-            <a:r>
-              <a:rPr sz="1100">
-                <a:solidFill>
-                  <a:srgbClr val="CCD6E0"/>
-                </a:solidFill>
-              </a:rPr>
-              <a:t>Phase  |  Timeline  |  Deliverable</a:t>
-            </a:r>
-          </a:p>
-          <a:p>
-            <a:pPr algn="l"/>
-          </a:p>
-          <a:p>
-            <a:pPr algn="l"/>
-            <a:r>
-              <a:rPr sz="1100">
-                <a:solidFill>
-                  <a:srgbClr val="CCD6E0"/>
-                </a:solidFill>
-              </a:rPr>
-              <a:t>PoC validated  |  [DONE] April 2026  |  TinyML SOTA+1 discovery, reproducible</a:t>
-            </a:r>
-          </a:p>
-          <a:p>
-            <a:pPr algn="l"/>
-            <a:r>
-              <a:rPr sz="1100">
-                <a:solidFill>
-                  <a:srgbClr val="CCD6E0"/>
-                </a:solidFill>
-              </a:rPr>
-              <a:t>Seed round  |  Q2 2026  |  Compute infra, 3-person core team</a:t>
-            </a:r>
-          </a:p>
-          <a:p>
-            <a:pPr algn="l"/>
-            <a:r>
-              <a:rPr sz="1100">
-                <a:solidFill>
-                  <a:srgbClr val="CCD6E0"/>
-                </a:solidFill>
-              </a:rPr>
-              <a:t>Full DL benchmark  |  Q3 2026  |  ETFT applied to ImageNet / LLM architectures</a:t>
-            </a:r>
-          </a:p>
-          <a:p>
-            <a:pPr algn="l"/>
-            <a:r>
-              <a:rPr sz="1100">
-                <a:solidFill>
-                  <a:srgbClr val="CCD6E0"/>
-                </a:solidFill>
-              </a:rPr>
-              <a:t>Domain expansion  |  Q4 2026  |  Pharma / materials science pilot partner</a:t>
-            </a:r>
-          </a:p>
-          <a:p>
-            <a:pPr algn="l"/>
-            <a:r>
-              <a:rPr sz="1100">
-                <a:solidFill>
-                  <a:srgbClr val="CCD6E0"/>
-                </a:solidFill>
-              </a:rPr>
-              <a:t>Series A readiness  |  Q1 2027  |  Revenue pipeline from IP licensing &amp; API access</a:t>
-            </a:r>
-          </a:p>
-          <a:p>
-            <a:pPr algn="l">
-              <a:spcAft>
-                <a:spcPts val="400"/>
-              </a:spcAft>
-            </a:pPr>
-            <a:r>
-              <a:rPr sz="1300">
-                <a:solidFill>
-                  <a:srgbClr val="FFFFFF"/>
-                </a:solidFill>
-              </a:rPr>
-              <a:t/>
-            </a:r>
-          </a:p>
-          <a:p>
-            <a:pPr algn="l"/>
-            <a:r>
-              <a:rPr sz="1300">
-                <a:solidFill>
-                  <a:srgbClr val="FFFFFF"/>
-                </a:solidFill>
-              </a:rPr>
-              <a:t>The ask: Seed investment to fund 12 months of compute and engineering.</a:t>
-            </a:r>
-          </a:p>
-          <a:p>
-            <a:pPr algn="l">
-              <a:spcAft>
-                <a:spcPts val="400"/>
-              </a:spcAft>
-            </a:pPr>
-            <a:r>
-              <a:rPr sz="1300">
-                <a:solidFill>
-                  <a:srgbClr val="FFFFFF"/>
-                </a:solidFill>
-              </a:rPr>
-              <a:t/>
-            </a:r>
-          </a:p>
-          <a:p>
-            <a:pPr algn="l"/>
-            <a:r>
-              <a:rPr sz="1300">
-                <a:solidFill>
-                  <a:srgbClr val="FFFFFF"/>
-                </a:solidFill>
-              </a:rPr>
-              <a:t>What investors get:</a:t>
-            </a:r>
-          </a:p>
-          <a:p>
-            <a:pPr algn="l" lvl="1"/>
-            <a:r>
-              <a:rPr sz="1200">
-                <a:solidFill>
-                  <a:srgbClr val="CCD6E0"/>
-                </a:solidFill>
-              </a:rPr>
-              <a:t>• Equity in the IP layer of autonomous scientific discovery</a:t>
-            </a:r>
-          </a:p>
-          <a:p>
-            <a:pPr algn="l" lvl="1"/>
-            <a:r>
-              <a:rPr sz="1200">
-                <a:solidFill>
-                  <a:srgbClr val="CCD6E0"/>
-                </a:solidFill>
-              </a:rPr>
-              <a:t>• First access to licensing deals with pharma, semiconductor, and defence R&amp;D organisations</a:t>
-            </a:r>
-          </a:p>
-          <a:p>
-            <a:pPr algn="l" lvl="1"/>
-            <a:r>
-              <a:rPr sz="1200">
-                <a:solidFill>
-                  <a:srgbClr val="CCD6E0"/>
-                </a:solidFill>
-              </a:rPr>
-              <a:t>• A front-row seat to the next Eroom's Law reversal</a:t>
-            </a:r>
-          </a:p>
-          <a:p>
-            <a:pPr algn="l">
-              <a:spcAft>
-                <a:spcPts val="400"/>
-              </a:spcAft>
-            </a:pPr>
-            <a:r>
-              <a:rPr sz="1300">
-                <a:solidFill>
-                  <a:srgbClr val="FFFFFF"/>
-                </a:solidFill>
-              </a:rPr>
-              <a:t/>
-            </a:r>
-          </a:p>
-          <a:p>
-            <a:pPr algn="l">
-              <a:spcAft>
-                <a:spcPts val="400"/>
-              </a:spcAft>
-            </a:pPr>
-            <a:r>
-              <a:rPr sz="1300">
-                <a:solidFill>
-                  <a:srgbClr val="FFFFFF"/>
-                </a:solidFill>
-              </a:rPr>
-              <a:t/>
-            </a:r>
-          </a:p>
-          <a:p>
-            <a:pPr algn="l"/>
-            <a:r>
-              <a:rPr sz="1300">
-                <a:solidFill>
-                  <a:srgbClr val="FFFFFF"/>
-                </a:solidFill>
-              </a:rPr>
-              <a:t>*Links: [Demo video — ETFT__AI_Research_Scientist.mp4] · [Full Technical Whitepaper — available under NDA]*</a:t>
-            </a:r>
-          </a:p>
-          <a:p>
-            <a:pPr algn="l">
-              <a:spcAft>
-                <a:spcPts val="400"/>
-              </a:spcAft>
-            </a:pPr>
-            <a:r>
-              <a:rPr sz="1300">
-                <a:solidFill>
-                  <a:srgbClr val="FFFFFF"/>
-                </a:solidFill>
-              </a:rPr>
-              <a:t/>
-            </a:r>
-          </a:p>
-          <a:p>
-            <a:pPr algn="l"/>
-            <a:r>
-              <a:rPr sz="1300">
-                <a:solidFill>
-                  <a:srgbClr val="FFFFFF"/>
-                </a:solidFill>
-              </a:rPr>
-              <a:t>*Contact: Lukas Benda · lukas.benda@boldpivot.cz*</a:t>
-            </a:r>
-          </a:p>
-          <a:p>
-            <a:pPr algn="l">
-              <a:spcAft>
-                <a:spcPts val="400"/>
-              </a:spcAft>
-            </a:pPr>
-            <a:r>
-              <a:rPr sz="1300">
-                <a:solidFill>
-                  <a:srgbClr val="FFFFFF"/>
-                </a:solidFill>
-              </a:rPr>
-              <a:t/>
-            </a:r>
-          </a:p>
-          <a:p>
-            <a:pPr algn="l">
-              <a:spcAft>
-                <a:spcPts val="400"/>
-              </a:spcAft>
-            </a:pPr>
-            <a:r>
-              <a:rPr sz="1300">
-                <a:solidFill>
-                  <a:srgbClr val="FFFFFF"/>
-                </a:solidFill>
-              </a:rPr>
-              <a:t/>
-            </a:r>
-          </a:p>
-          <a:p>
-            <a:pPr algn="l"/>
-            <a:r>
-              <a:rPr sz="1300">
-                <a:solidFill>
-                  <a:srgbClr val="FFFFFF"/>
-                </a:solidFill>
-              </a:rPr>
-              <a:t>*[Soubor B — Strategic Deck | DocSend: stahování zakázáno · Dynamic Watermarking: zapnuto]*</a:t>
+            <a:r>
+              <a:rPr sz="1100" b="0" i="0">
+                <a:solidFill>
+                  <a:srgbClr val="8A94A6"/>
+                </a:solidFill>
+              </a:rPr>
+              <a:t>Full technical whitepaper available under NDA upon request.</a:t>
             </a:r>
           </a:p>
         </p:txBody>
@@ -3873,8 +4335,8 @@
         </p:nvSpPr>
         <p:spPr>
           <a:xfrm>
-            <a:off x="274320" y="6263640"/>
-            <a:ext cx="11612880" cy="274320"/>
+            <a:off x="548640" y="3497580"/>
+            <a:ext cx="8046720" cy="514350"/>
           </a:xfrm>
           <a:prstGeom prst="rect">
             <a:avLst/>
@@ -3887,14 +4349,13 @@
           </a:bodyPr>
           <a:lstStyle/>
           <a:p>
-            <a:pPr algn="ctr"/>
-            <a:r>
-              <a:rPr sz="700" b="0">
-                <a:solidFill>
-                  <a:srgbClr val="CCD6E0"/>
-                </a:solidFill>
-              </a:rPr>
-              <a:t>ETFT (AutoScientist) · Lukas Benda · lukas.benda@boldpivot.cz · Confidential</a:t>
+            <a:r>
+              <a:rPr sz="1000" b="0" i="0">
+                <a:solidFill>
+                  <a:srgbClr val="3B6BFF"/>
+                </a:solidFill>
+              </a:rPr>
+              <a:t>lukas.benda@boldpivot.cz  ·  April 2026</a:t>
             </a:r>
           </a:p>
         </p:txBody>
@@ -3910,14 +4371,6 @@
 <file path=ppt/slides/slide2.xml><?xml version="1.0" encoding="utf-8"?>
 <p:sld xmlns:a="http://schemas.openxmlformats.org/drawingml/2006/main" xmlns:p="http://schemas.openxmlformats.org/presentationml/2006/main" xmlns:r="http://schemas.openxmlformats.org/officeDocument/2006/relationships">
   <p:cSld>
-    <p:bg>
-      <p:bgPr>
-        <a:solidFill>
-          <a:srgbClr val="0D1B2A"/>
-        </a:solidFill>
-        <a:effectLst/>
-      </p:bgPr>
-    </p:bg>
     <p:spTree>
       <p:nvGrpSpPr>
         <p:cNvPr id="1" name=""/>
@@ -3934,13 +4387,13 @@
         <p:spPr>
           <a:xfrm>
             <a:off x="0" y="0"/>
-            <a:ext cx="12188952" cy="73152"/>
+            <a:ext cx="9144000" cy="5143500"/>
           </a:xfrm>
           <a:prstGeom prst="rect">
             <a:avLst/>
           </a:prstGeom>
           <a:solidFill>
-            <a:srgbClr val="00B4D8"/>
+            <a:srgbClr val="FFFFFF"/>
           </a:solidFill>
           <a:ln>
             <a:noFill/>
@@ -3970,14 +4423,100 @@
       </p:sp>
       <p:sp>
         <p:nvSpPr>
-          <p:cNvPr id="3" name="TextBox 2"/>
+          <p:cNvPr id="3" name="Rectangle 2"/>
+          <p:cNvSpPr/>
+          <p:nvPr/>
+        </p:nvSpPr>
+        <p:spPr>
+          <a:xfrm>
+            <a:off x="0" y="0"/>
+            <a:ext cx="9144000" cy="1131570"/>
+          </a:xfrm>
+          <a:prstGeom prst="rect">
+            <a:avLst/>
+          </a:prstGeom>
+          <a:solidFill>
+            <a:srgbClr val="0D1117"/>
+          </a:solidFill>
+          <a:ln>
+            <a:noFill/>
+          </a:ln>
+        </p:spPr>
+        <p:style>
+          <a:lnRef idx="1">
+            <a:schemeClr val="accent1"/>
+          </a:lnRef>
+          <a:fillRef idx="3">
+            <a:schemeClr val="accent1"/>
+          </a:fillRef>
+          <a:effectRef idx="2">
+            <a:schemeClr val="accent1"/>
+          </a:effectRef>
+          <a:fontRef idx="minor">
+            <a:schemeClr val="lt1"/>
+          </a:fontRef>
+        </p:style>
+        <p:txBody>
+          <a:bodyPr rtlCol="0" anchor="ctr"/>
+          <a:lstStyle/>
+          <a:p>
+            <a:pPr algn="ctr"/>
+          </a:p>
+        </p:txBody>
+      </p:sp>
+      <p:sp>
+        <p:nvSpPr>
+          <p:cNvPr id="4" name="Rectangle 3"/>
+          <p:cNvSpPr/>
+          <p:nvPr/>
+        </p:nvSpPr>
+        <p:spPr>
+          <a:xfrm>
+            <a:off x="0" y="1131570"/>
+            <a:ext cx="9144000" cy="41148"/>
+          </a:xfrm>
+          <a:prstGeom prst="rect">
+            <a:avLst/>
+          </a:prstGeom>
+          <a:solidFill>
+            <a:srgbClr val="3B6BFF"/>
+          </a:solidFill>
+          <a:ln>
+            <a:noFill/>
+          </a:ln>
+        </p:spPr>
+        <p:style>
+          <a:lnRef idx="1">
+            <a:schemeClr val="accent1"/>
+          </a:lnRef>
+          <a:fillRef idx="3">
+            <a:schemeClr val="accent1"/>
+          </a:fillRef>
+          <a:effectRef idx="2">
+            <a:schemeClr val="accent1"/>
+          </a:effectRef>
+          <a:fontRef idx="minor">
+            <a:schemeClr val="lt1"/>
+          </a:fontRef>
+        </p:style>
+        <p:txBody>
+          <a:bodyPr rtlCol="0" anchor="ctr"/>
+          <a:lstStyle/>
+          <a:p>
+            <a:pPr algn="ctr"/>
+          </a:p>
+        </p:txBody>
+      </p:sp>
+      <p:sp>
+        <p:nvSpPr>
+          <p:cNvPr id="5" name="TextBox 4"/>
           <p:cNvSpPr txBox="1"/>
           <p:nvPr/>
         </p:nvSpPr>
         <p:spPr>
           <a:xfrm>
-            <a:off x="274320" y="109728"/>
-            <a:ext cx="11612880" cy="457200"/>
+            <a:off x="274320" y="51435"/>
+            <a:ext cx="4572000" cy="411480"/>
           </a:xfrm>
           <a:prstGeom prst="rect">
             <a:avLst/>
@@ -3990,28 +4529,27 @@
           </a:bodyPr>
           <a:lstStyle/>
           <a:p>
-            <a:pPr algn="l"/>
-            <a:r>
-              <a:rPr sz="900" b="0">
-                <a:solidFill>
-                  <a:srgbClr val="00B4D8"/>
-                </a:solidFill>
-              </a:rPr>
-              <a:t>SLIDE 2 — THE $100B BLINDSPOT IN EVERY LLM</a:t>
-            </a:r>
-          </a:p>
-        </p:txBody>
-      </p:sp>
-      <p:sp>
-        <p:nvSpPr>
-          <p:cNvPr id="4" name="TextBox 3"/>
+            <a:r>
+              <a:rPr sz="800" b="0" i="0">
+                <a:solidFill>
+                  <a:srgbClr val="3B6BFF"/>
+                </a:solidFill>
+              </a:rPr>
+              <a:t>ETFT · AutoScientist</a:t>
+            </a:r>
+          </a:p>
+        </p:txBody>
+      </p:sp>
+      <p:sp>
+        <p:nvSpPr>
+          <p:cNvPr id="6" name="TextBox 5"/>
           <p:cNvSpPr txBox="1"/>
           <p:nvPr/>
         </p:nvSpPr>
         <p:spPr>
           <a:xfrm>
-            <a:off x="274320" y="502920"/>
-            <a:ext cx="11612880" cy="777240"/>
+            <a:off x="6858000" y="51435"/>
+            <a:ext cx="2011680" cy="411480"/>
           </a:xfrm>
           <a:prstGeom prst="rect">
             <a:avLst/>
@@ -4024,28 +4562,28 @@
           </a:bodyPr>
           <a:lstStyle/>
           <a:p>
-            <a:pPr algn="l"/>
-            <a:r>
-              <a:rPr sz="2600" b="1">
-                <a:solidFill>
-                  <a:srgbClr val="FFFFFF"/>
-                </a:solidFill>
-              </a:rPr>
-              <a:t>Your AI doesn't know what it doesn't know.</a:t>
-            </a:r>
-          </a:p>
-        </p:txBody>
-      </p:sp>
-      <p:sp>
-        <p:nvSpPr>
-          <p:cNvPr id="5" name="TextBox 4"/>
+            <a:pPr algn="r"/>
+            <a:r>
+              <a:rPr sz="800" b="0" i="0">
+                <a:solidFill>
+                  <a:srgbClr val="8A94A6"/>
+                </a:solidFill>
+              </a:rPr>
+              <a:t>01 / 10</a:t>
+            </a:r>
+          </a:p>
+        </p:txBody>
+      </p:sp>
+      <p:sp>
+        <p:nvSpPr>
+          <p:cNvPr id="7" name="TextBox 6"/>
           <p:cNvSpPr txBox="1"/>
           <p:nvPr/>
         </p:nvSpPr>
         <p:spPr>
           <a:xfrm>
-            <a:off x="274320" y="1325880"/>
-            <a:ext cx="11612880" cy="4526279"/>
+            <a:off x="274320" y="308609"/>
+            <a:ext cx="8595359" cy="771525"/>
           </a:xfrm>
           <a:prstGeom prst="rect">
             <a:avLst/>
@@ -4058,154 +4596,27 @@
           </a:bodyPr>
           <a:lstStyle/>
           <a:p>
-            <a:pPr algn="l"/>
-            <a:r>
-              <a:rPr sz="1300">
+            <a:r>
+              <a:rPr sz="1600" b="1" i="0">
                 <a:solidFill>
                   <a:srgbClr val="FFFFFF"/>
                 </a:solidFill>
               </a:rPr>
-              <a:t>arXiv preprints published after training cutoff (invisible to model).</a:t>
-            </a:r>
-          </a:p>
-          <a:p>
-            <a:pPr algn="l">
-              <a:spcAft>
-                <a:spcPts val="400"/>
-              </a:spcAft>
-            </a:pPr>
-            <a:r>
-              <a:rPr sz="1300">
-                <a:solidFill>
-                  <a:srgbClr val="FFFFFF"/>
-                </a:solidFill>
-              </a:rPr>
-              <a:t/>
-            </a:r>
-          </a:p>
-          <a:p>
-            <a:pPr algn="l">
-              <a:spcAft>
-                <a:spcPts val="400"/>
-              </a:spcAft>
-            </a:pPr>
-            <a:r>
-              <a:rPr sz="1300">
-                <a:solidFill>
-                  <a:srgbClr val="FFFFFF"/>
-                </a:solidFill>
-              </a:rPr>
-              <a:t/>
-            </a:r>
-          </a:p>
-          <a:p>
-            <a:pPr algn="l"/>
-            <a:r>
-              <a:rPr sz="1300">
-                <a:solidFill>
-                  <a:srgbClr val="FFFFFF"/>
-                </a:solidFill>
-              </a:rPr>
-              <a:t>Every frontier model — GPT, Claude, Gemini — was trained on data with a hard cutoff.</a:t>
-            </a:r>
-          </a:p>
-          <a:p>
-            <a:pPr algn="l"/>
-            <a:r>
-              <a:rPr sz="1300">
-                <a:solidFill>
-                  <a:srgbClr val="FFFFFF"/>
-                </a:solidFill>
-              </a:rPr>
-              <a:t>The instant training ends, the model's knowledge begins to decay relative to the frontier.</a:t>
-            </a:r>
-          </a:p>
-          <a:p>
-            <a:pPr algn="l">
-              <a:spcAft>
-                <a:spcPts val="400"/>
-              </a:spcAft>
-            </a:pPr>
-            <a:r>
-              <a:rPr sz="1300">
-                <a:solidFill>
-                  <a:srgbClr val="FFFFFF"/>
-                </a:solidFill>
-              </a:rPr>
-              <a:t/>
-            </a:r>
-          </a:p>
-          <a:p>
-            <a:pPr algn="l"/>
-            <a:r>
-              <a:rPr sz="1300">
-                <a:solidFill>
-                  <a:srgbClr val="FFFFFF"/>
-                </a:solidFill>
-              </a:rPr>
-              <a:t>This is the Knowledge Blindspot: the gap between what a model believes is SOTA and</a:t>
-            </a:r>
-          </a:p>
-          <a:p>
-            <a:pPr algn="l"/>
-            <a:r>
-              <a:rPr sz="1300">
-                <a:solidFill>
-                  <a:srgbClr val="FFFFFF"/>
-                </a:solidFill>
-              </a:rPr>
-              <a:t>what actually is SOTA at inference time.</a:t>
-            </a:r>
-          </a:p>
-          <a:p>
-            <a:pPr algn="l">
-              <a:spcAft>
-                <a:spcPts val="400"/>
-              </a:spcAft>
-            </a:pPr>
-            <a:r>
-              <a:rPr sz="1300">
-                <a:solidFill>
-                  <a:srgbClr val="FFFFFF"/>
-                </a:solidFill>
-              </a:rPr>
-              <a:t/>
-            </a:r>
-          </a:p>
-          <a:p>
-            <a:pPr algn="l"/>
-            <a:r>
-              <a:rPr sz="1300">
-                <a:solidFill>
-                  <a:srgbClr val="FFFFFF"/>
-                </a:solidFill>
-              </a:rPr>
-              <a:t>Current workarounds (RAG, fine-tuning) are reactive patches, not architectural solutions.</a:t>
-            </a:r>
-          </a:p>
-          <a:p>
-            <a:pPr algn="l"/>
-            <a:r>
-              <a:rPr sz="1300">
-                <a:solidFill>
-                  <a:srgbClr val="FFFFFF"/>
-                </a:solidFill>
-              </a:rPr>
-              <a:t>ETFT eliminates the blindspot structurally.</a:t>
-            </a:r>
-          </a:p>
-        </p:txBody>
-      </p:sp>
-      <p:sp>
-        <p:nvSpPr>
-          <p:cNvPr id="6" name="TextBox 5"/>
+              <a:t>The Eroom's Law Problem</a:t>
+            </a:r>
+          </a:p>
+        </p:txBody>
+      </p:sp>
+      <p:sp>
+        <p:nvSpPr>
+          <p:cNvPr id="8" name="TextBox 7"/>
           <p:cNvSpPr txBox="1"/>
           <p:nvPr/>
         </p:nvSpPr>
         <p:spPr>
           <a:xfrm>
-            <a:off x="274320" y="6263640"/>
-            <a:ext cx="11612880" cy="274320"/>
+            <a:off x="274320" y="1440180"/>
+            <a:ext cx="8595359" cy="3394710"/>
           </a:xfrm>
           <a:prstGeom prst="rect">
             <a:avLst/>
@@ -4218,14 +4629,113 @@
           </a:bodyPr>
           <a:lstStyle/>
           <a:p>
-            <a:pPr algn="ctr"/>
-            <a:r>
-              <a:rPr sz="700" b="0">
-                <a:solidFill>
-                  <a:srgbClr val="CCD6E0"/>
-                </a:solidFill>
-              </a:rPr>
-              <a:t>ETFT (AutoScientist) · Lukas Benda · lukas.benda@boldpivot.cz · Confidential</a:t>
+            <a:r>
+              <a:rPr sz="1050">
+                <a:solidFill>
+                  <a:srgbClr val="1A1F2E"/>
+                </a:solidFill>
+              </a:rPr>
+              <a:t>Headline: Science is getting exponentially more expensive — and slower.</a:t>
+            </a:r>
+          </a:p>
+          <a:p>
+            <a:r>
+              <a:rPr sz="1050">
+                <a:solidFill>
+                  <a:srgbClr val="1A1F2E"/>
+                </a:solidFill>
+              </a:rPr>
+              <a:t>Key visual: Eroom's Law chart — R&amp;D cost per new drug doubles every nine years</a:t>
+            </a:r>
+          </a:p>
+          <a:p>
+            <a:r>
+              <a:rPr sz="1050">
+                <a:solidFill>
+                  <a:srgbClr val="1A1F2E"/>
+                </a:solidFill>
+              </a:rPr>
+              <a:t>(mirror image of Moore's Law). Cross-reference: AI research paper volume doubles every</a:t>
+            </a:r>
+          </a:p>
+          <a:p>
+            <a:r>
+              <a:rPr sz="1050">
+                <a:solidFill>
+                  <a:srgbClr val="1A1F2E"/>
+                </a:solidFill>
+              </a:rPr>
+              <a:t>18 months, yet model architectures have converged. More compute, more papers, fewer</a:t>
+            </a:r>
+          </a:p>
+          <a:p>
+            <a:r>
+              <a:rPr sz="1050">
+                <a:solidFill>
+                  <a:srgbClr val="1A1F2E"/>
+                </a:solidFill>
+              </a:rPr>
+              <a:t>paradigm shifts.</a:t>
+            </a:r>
+          </a:p>
+          <a:p>
+            <a:r>
+              <a:rPr sz="1050">
+                <a:solidFill>
+                  <a:srgbClr val="1A1F2E"/>
+                </a:solidFill>
+              </a:rPr>
+              <a:t>The pharma industry spends $2.6 billion per approved drug. The ML community produces</a:t>
+            </a:r>
+          </a:p>
+          <a:p>
+            <a:r>
+              <a:rPr sz="1050">
+                <a:solidFill>
+                  <a:srgbClr val="1A1F2E"/>
+                </a:solidFill>
+              </a:rPr>
+              <a:t>400,000 papers per year but ships three genuinely new architectures per decade.</a:t>
+            </a:r>
+          </a:p>
+          <a:p>
+            <a:r>
+              <a:rPr sz="1050">
+                <a:solidFill>
+                  <a:srgbClr val="1A1F2E"/>
+                </a:solidFill>
+              </a:rPr>
+              <a:t>The bottleneck is not compute — it is the human cognitive loop that decides *what to</a:t>
+            </a:r>
+          </a:p>
+          <a:p>
+            <a:r>
+              <a:rPr sz="1050">
+                <a:solidFill>
+                  <a:srgbClr val="1A1F2E"/>
+                </a:solidFill>
+              </a:rPr>
+              <a:t>experiment on next*. Eroom's Law is not an industry anomaly. It is the default trajectory</a:t>
+            </a:r>
+          </a:p>
+          <a:p>
+            <a:r>
+              <a:rPr sz="1050">
+                <a:solidFill>
+                  <a:srgbClr val="1A1F2E"/>
+                </a:solidFill>
+              </a:rPr>
+              <a:t>of any science driven by human intuition.</a:t>
+            </a:r>
+          </a:p>
+          <a:p>
+            <a:r>
+              <a:rPr sz="1050">
+                <a:solidFill>
+                  <a:srgbClr val="1A1F2E"/>
+                </a:solidFill>
+              </a:rPr>
+              <a:t>Call to action: What if the scientific method itself could be automated?</a:t>
             </a:r>
           </a:p>
         </p:txBody>
@@ -4241,14 +4751,6 @@
 <file path=ppt/slides/slide3.xml><?xml version="1.0" encoding="utf-8"?>
 <p:sld xmlns:a="http://schemas.openxmlformats.org/drawingml/2006/main" xmlns:p="http://schemas.openxmlformats.org/presentationml/2006/main" xmlns:r="http://schemas.openxmlformats.org/officeDocument/2006/relationships">
   <p:cSld>
-    <p:bg>
-      <p:bgPr>
-        <a:solidFill>
-          <a:srgbClr val="0D1B2A"/>
-        </a:solidFill>
-        <a:effectLst/>
-      </p:bgPr>
-    </p:bg>
     <p:spTree>
       <p:nvGrpSpPr>
         <p:cNvPr id="1" name=""/>
@@ -4265,13 +4767,13 @@
         <p:spPr>
           <a:xfrm>
             <a:off x="0" y="0"/>
-            <a:ext cx="12188952" cy="73152"/>
+            <a:ext cx="9144000" cy="5143500"/>
           </a:xfrm>
           <a:prstGeom prst="rect">
             <a:avLst/>
           </a:prstGeom>
           <a:solidFill>
-            <a:srgbClr val="00B4D8"/>
+            <a:srgbClr val="FFFFFF"/>
           </a:solidFill>
           <a:ln>
             <a:noFill/>
@@ -4301,14 +4803,100 @@
       </p:sp>
       <p:sp>
         <p:nvSpPr>
-          <p:cNvPr id="3" name="TextBox 2"/>
+          <p:cNvPr id="3" name="Rectangle 2"/>
+          <p:cNvSpPr/>
+          <p:nvPr/>
+        </p:nvSpPr>
+        <p:spPr>
+          <a:xfrm>
+            <a:off x="0" y="0"/>
+            <a:ext cx="9144000" cy="1131570"/>
+          </a:xfrm>
+          <a:prstGeom prst="rect">
+            <a:avLst/>
+          </a:prstGeom>
+          <a:solidFill>
+            <a:srgbClr val="0D1117"/>
+          </a:solidFill>
+          <a:ln>
+            <a:noFill/>
+          </a:ln>
+        </p:spPr>
+        <p:style>
+          <a:lnRef idx="1">
+            <a:schemeClr val="accent1"/>
+          </a:lnRef>
+          <a:fillRef idx="3">
+            <a:schemeClr val="accent1"/>
+          </a:fillRef>
+          <a:effectRef idx="2">
+            <a:schemeClr val="accent1"/>
+          </a:effectRef>
+          <a:fontRef idx="minor">
+            <a:schemeClr val="lt1"/>
+          </a:fontRef>
+        </p:style>
+        <p:txBody>
+          <a:bodyPr rtlCol="0" anchor="ctr"/>
+          <a:lstStyle/>
+          <a:p>
+            <a:pPr algn="ctr"/>
+          </a:p>
+        </p:txBody>
+      </p:sp>
+      <p:sp>
+        <p:nvSpPr>
+          <p:cNvPr id="4" name="Rectangle 3"/>
+          <p:cNvSpPr/>
+          <p:nvPr/>
+        </p:nvSpPr>
+        <p:spPr>
+          <a:xfrm>
+            <a:off x="0" y="1131570"/>
+            <a:ext cx="9144000" cy="41148"/>
+          </a:xfrm>
+          <a:prstGeom prst="rect">
+            <a:avLst/>
+          </a:prstGeom>
+          <a:solidFill>
+            <a:srgbClr val="3B6BFF"/>
+          </a:solidFill>
+          <a:ln>
+            <a:noFill/>
+          </a:ln>
+        </p:spPr>
+        <p:style>
+          <a:lnRef idx="1">
+            <a:schemeClr val="accent1"/>
+          </a:lnRef>
+          <a:fillRef idx="3">
+            <a:schemeClr val="accent1"/>
+          </a:fillRef>
+          <a:effectRef idx="2">
+            <a:schemeClr val="accent1"/>
+          </a:effectRef>
+          <a:fontRef idx="minor">
+            <a:schemeClr val="lt1"/>
+          </a:fontRef>
+        </p:style>
+        <p:txBody>
+          <a:bodyPr rtlCol="0" anchor="ctr"/>
+          <a:lstStyle/>
+          <a:p>
+            <a:pPr algn="ctr"/>
+          </a:p>
+        </p:txBody>
+      </p:sp>
+      <p:sp>
+        <p:nvSpPr>
+          <p:cNvPr id="5" name="TextBox 4"/>
           <p:cNvSpPr txBox="1"/>
           <p:nvPr/>
         </p:nvSpPr>
         <p:spPr>
           <a:xfrm>
-            <a:off x="274320" y="109728"/>
-            <a:ext cx="11612880" cy="457200"/>
+            <a:off x="274320" y="51435"/>
+            <a:ext cx="4572000" cy="411480"/>
           </a:xfrm>
           <a:prstGeom prst="rect">
             <a:avLst/>
@@ -4321,28 +4909,27 @@
           </a:bodyPr>
           <a:lstStyle/>
           <a:p>
-            <a:pPr algn="l"/>
-            <a:r>
-              <a:rPr sz="900" b="0">
-                <a:solidFill>
-                  <a:srgbClr val="00B4D8"/>
-                </a:solidFill>
-              </a:rPr>
-              <a:t>SLIDE 3 — INTRODUCING THE DISCRETE GRADIENT</a:t>
-            </a:r>
-          </a:p>
-        </p:txBody>
-      </p:sp>
-      <p:sp>
-        <p:nvSpPr>
-          <p:cNvPr id="4" name="TextBox 3"/>
+            <a:r>
+              <a:rPr sz="800" b="0" i="0">
+                <a:solidFill>
+                  <a:srgbClr val="3B6BFF"/>
+                </a:solidFill>
+              </a:rPr>
+              <a:t>ETFT · AutoScientist</a:t>
+            </a:r>
+          </a:p>
+        </p:txBody>
+      </p:sp>
+      <p:sp>
+        <p:nvSpPr>
+          <p:cNvPr id="6" name="TextBox 5"/>
           <p:cNvSpPr txBox="1"/>
           <p:nvPr/>
         </p:nvSpPr>
         <p:spPr>
           <a:xfrm>
-            <a:off x="274320" y="502920"/>
-            <a:ext cx="11612880" cy="777240"/>
+            <a:off x="6858000" y="51435"/>
+            <a:ext cx="2011680" cy="411480"/>
           </a:xfrm>
           <a:prstGeom prst="rect">
             <a:avLst/>
@@ -4355,28 +4942,28 @@
           </a:bodyPr>
           <a:lstStyle/>
           <a:p>
-            <a:pPr algn="l"/>
-            <a:r>
-              <a:rPr sz="2600" b="1">
-                <a:solidFill>
-                  <a:srgbClr val="FFFFFF"/>
-                </a:solidFill>
-              </a:rPr>
-              <a:t>Algorithms don't appear. They evolve.</a:t>
-            </a:r>
-          </a:p>
-        </p:txBody>
-      </p:sp>
-      <p:sp>
-        <p:nvSpPr>
-          <p:cNvPr id="5" name="TextBox 4"/>
+            <a:pPr algn="r"/>
+            <a:r>
+              <a:rPr sz="800" b="0" i="0">
+                <a:solidFill>
+                  <a:srgbClr val="8A94A6"/>
+                </a:solidFill>
+              </a:rPr>
+              <a:t>02 / 10</a:t>
+            </a:r>
+          </a:p>
+        </p:txBody>
+      </p:sp>
+      <p:sp>
+        <p:nvSpPr>
+          <p:cNvPr id="7" name="TextBox 6"/>
           <p:cNvSpPr txBox="1"/>
           <p:nvPr/>
         </p:nvSpPr>
         <p:spPr>
           <a:xfrm>
-            <a:off x="274320" y="1325880"/>
-            <a:ext cx="11612880" cy="4526279"/>
+            <a:off x="274320" y="308609"/>
+            <a:ext cx="8595359" cy="771525"/>
           </a:xfrm>
           <a:prstGeom prst="rect">
             <a:avLst/>
@@ -4389,228 +4976,27 @@
           </a:bodyPr>
           <a:lstStyle/>
           <a:p>
-            <a:pPr algn="l"/>
-            <a:r>
-              <a:rPr sz="1300">
+            <a:r>
+              <a:rPr sz="1600" b="1" i="0">
                 <a:solidFill>
                   <a:srgbClr val="FFFFFF"/>
                 </a:solidFill>
               </a:rPr>
-              <a:t>Nodes: a₀ (MLP) → a₁ (1D CNN) → a₂ (Depthwise CNN) → a₃ (MobileNetV2) → a₄ (SOTA+1 ?)</a:t>
-            </a:r>
-          </a:p>
-          <a:p>
-            <a:pPr algn="l">
-              <a:spcAft>
-                <a:spcPts val="400"/>
-              </a:spcAft>
-            </a:pPr>
-            <a:r>
-              <a:rPr sz="1300">
-                <a:solidFill>
-                  <a:srgbClr val="FFFFFF"/>
-                </a:solidFill>
-              </a:rPr>
-              <a:t/>
-            </a:r>
-          </a:p>
-          <a:p>
-            <a:pPr algn="l"/>
-            <a:r>
-              <a:rPr sz="1300">
-                <a:solidFill>
-                  <a:srgbClr val="FFFFFF"/>
-                </a:solidFill>
-              </a:rPr>
-              <a:t>Each transition labelled with the architectural delta (what changed) and the performance</a:t>
-            </a:r>
-          </a:p>
-          <a:p>
-            <a:pPr algn="l"/>
-            <a:r>
-              <a:rPr sz="1300">
-                <a:solidFill>
-                  <a:srgbClr val="FFFFFF"/>
-                </a:solidFill>
-              </a:rPr>
-              <a:t>jump (what it bought).</a:t>
-            </a:r>
-          </a:p>
-          <a:p>
-            <a:pPr algn="l">
-              <a:spcAft>
-                <a:spcPts val="400"/>
-              </a:spcAft>
-            </a:pPr>
-            <a:r>
-              <a:rPr sz="1300">
-                <a:solidFill>
-                  <a:srgbClr val="FFFFFF"/>
-                </a:solidFill>
-              </a:rPr>
-              <a:t/>
-            </a:r>
-          </a:p>
-          <a:p>
-            <a:pPr algn="l">
-              <a:spcAft>
-                <a:spcPts val="400"/>
-              </a:spcAft>
-            </a:pPr>
-            <a:r>
-              <a:rPr sz="1300">
-                <a:solidFill>
-                  <a:srgbClr val="FFFFFF"/>
-                </a:solidFill>
-              </a:rPr>
-              <a:t/>
-            </a:r>
-          </a:p>
-          <a:p>
-            <a:pPr algn="l"/>
-            <a:r>
-              <a:rPr sz="1300">
-                <a:solidFill>
-                  <a:srgbClr val="FFFFFF"/>
-                </a:solidFill>
-              </a:rPr>
-              <a:t>ETFT formalises this intuition mathematically.</a:t>
-            </a:r>
-          </a:p>
-          <a:p>
-            <a:pPr algn="l">
-              <a:spcAft>
-                <a:spcPts val="400"/>
-              </a:spcAft>
-            </a:pPr>
-            <a:r>
-              <a:rPr sz="1300">
-                <a:solidFill>
-                  <a:srgbClr val="FFFFFF"/>
-                </a:solidFill>
-              </a:rPr>
-              <a:t/>
-            </a:r>
-          </a:p>
-          <a:p>
-            <a:pPr algn="l"/>
-            <a:r>
-              <a:rPr sz="1300">
-                <a:solidFill>
-                  <a:srgbClr val="FFFFFF"/>
-                </a:solidFill>
-              </a:rPr>
-              <a:t>Define a fitness function F(a) inversely proportional to validation loss under hard</a:t>
-            </a:r>
-          </a:p>
-          <a:p>
-            <a:pPr algn="l"/>
-            <a:r>
-              <a:rPr sz="1300">
-                <a:solidFill>
-                  <a:srgbClr val="FFFFFF"/>
-                </a:solidFill>
-              </a:rPr>
-              <a:t>hardware constraints. An Evolutionary Trajectory T = (a₀, a₁, …, aₙ) is an ordered</a:t>
-            </a:r>
-          </a:p>
-          <a:p>
-            <a:pPr algn="l"/>
-            <a:r>
-              <a:rPr sz="1300">
-                <a:solidFill>
-                  <a:srgbClr val="FFFFFF"/>
-                </a:solidFill>
-              </a:rPr>
-              <a:t>sequence where F(aᵢ₋₁) &lt; F(aᵢ).</a:t>
-            </a:r>
-          </a:p>
-          <a:p>
-            <a:pPr algn="l">
-              <a:spcAft>
-                <a:spcPts val="400"/>
-              </a:spcAft>
-            </a:pPr>
-            <a:r>
-              <a:rPr sz="1300">
-                <a:solidFill>
-                  <a:srgbClr val="FFFFFF"/>
-                </a:solidFill>
-              </a:rPr>
-              <a:t/>
-            </a:r>
-          </a:p>
-          <a:p>
-            <a:pPr algn="l"/>
-            <a:r>
-              <a:rPr sz="1300">
-                <a:solidFill>
-                  <a:srgbClr val="FFFFFF"/>
-                </a:solidFill>
-              </a:rPr>
-              <a:t>Each transition aᵢ₋₁ → aᵢ is a macro-evolutionary jump — a discrete gradient step</a:t>
-            </a:r>
-          </a:p>
-          <a:p>
-            <a:pPr algn="l"/>
-            <a:r>
-              <a:rPr sz="1300">
-                <a:solidFill>
-                  <a:srgbClr val="FFFFFF"/>
-                </a:solidFill>
-              </a:rPr>
-              <a:t>in architectural space. ETFT trains a model on these regressions, teaching it *the</a:t>
-            </a:r>
-          </a:p>
-          <a:p>
-            <a:pPr algn="l"/>
-            <a:r>
-              <a:rPr sz="1300">
-                <a:solidFill>
-                  <a:srgbClr val="FFFFFF"/>
-                </a:solidFill>
-              </a:rPr>
-              <a:t>mechanics of invention*, not just the outcomes.</a:t>
-            </a:r>
-          </a:p>
-          <a:p>
-            <a:pPr algn="l">
-              <a:spcAft>
-                <a:spcPts val="400"/>
-              </a:spcAft>
-            </a:pPr>
-            <a:r>
-              <a:rPr sz="1300">
-                <a:solidFill>
-                  <a:srgbClr val="FFFFFF"/>
-                </a:solidFill>
-              </a:rPr>
-              <a:t/>
-            </a:r>
-          </a:p>
-          <a:p>
-            <a:pPr algn="l"/>
-            <a:r>
-              <a:rPr sz="1300" i="1">
-                <a:solidFill>
-                  <a:srgbClr val="FFC300"/>
-                </a:solidFill>
-              </a:rPr>
-              <a:t>"The model learns not what SOTA is. It learns *why* SOTA becomes SOTA."</a:t>
-            </a:r>
-          </a:p>
-        </p:txBody>
-      </p:sp>
-      <p:sp>
-        <p:nvSpPr>
-          <p:cNvPr id="6" name="TextBox 5"/>
+              <a:t>The $100B Blindspot in Every LLM</a:t>
+            </a:r>
+          </a:p>
+        </p:txBody>
+      </p:sp>
+      <p:sp>
+        <p:nvSpPr>
+          <p:cNvPr id="8" name="TextBox 7"/>
           <p:cNvSpPr txBox="1"/>
           <p:nvPr/>
         </p:nvSpPr>
         <p:spPr>
           <a:xfrm>
-            <a:off x="274320" y="6263640"/>
-            <a:ext cx="11612880" cy="274320"/>
+            <a:off x="274320" y="1440180"/>
+            <a:ext cx="8595359" cy="3394710"/>
           </a:xfrm>
           <a:prstGeom prst="rect">
             <a:avLst/>
@@ -4623,14 +5009,103 @@
           </a:bodyPr>
           <a:lstStyle/>
           <a:p>
-            <a:pPr algn="ctr"/>
-            <a:r>
-              <a:rPr sz="700" b="0">
-                <a:solidFill>
-                  <a:srgbClr val="CCD6E0"/>
-                </a:solidFill>
-              </a:rPr>
-              <a:t>ETFT (AutoScientist) · Lukas Benda · lukas.benda@boldpivot.cz · Confidential</a:t>
+            <a:r>
+              <a:rPr sz="1050">
+                <a:solidFill>
+                  <a:srgbClr val="1A1F2E"/>
+                </a:solidFill>
+              </a:rPr>
+              <a:t>Headline: Your AI doesn't know what it doesn't know.</a:t>
+            </a:r>
+          </a:p>
+          <a:p>
+            <a:r>
+              <a:rPr sz="1050">
+                <a:solidFill>
+                  <a:srgbClr val="1A1F2E"/>
+                </a:solidFill>
+              </a:rPr>
+              <a:t>Key visual: Split diagram — left: LLM frozen weight space (static, dated); right:</a:t>
+            </a:r>
+          </a:p>
+          <a:p>
+            <a:r>
+              <a:rPr sz="1050">
+                <a:solidFill>
+                  <a:srgbClr val="1A1F2E"/>
+                </a:solidFill>
+              </a:rPr>
+              <a:t>arXiv preprints published after training cutoff (invisible to model).</a:t>
+            </a:r>
+          </a:p>
+          <a:p>
+            <a:r>
+              <a:rPr sz="1050">
+                <a:solidFill>
+                  <a:srgbClr val="1A1F2E"/>
+                </a:solidFill>
+              </a:rPr>
+              <a:t>Body copy:</a:t>
+            </a:r>
+          </a:p>
+          <a:p>
+            <a:r>
+              <a:rPr sz="1050">
+                <a:solidFill>
+                  <a:srgbClr val="1A1F2E"/>
+                </a:solidFill>
+              </a:rPr>
+              <a:t>Every frontier model — GPT, Claude, Gemini — was trained on data with a hard cutoff.</a:t>
+            </a:r>
+          </a:p>
+          <a:p>
+            <a:r>
+              <a:rPr sz="1050">
+                <a:solidFill>
+                  <a:srgbClr val="1A1F2E"/>
+                </a:solidFill>
+              </a:rPr>
+              <a:t>The instant training ends, the model's knowledge begins to decay relative to the frontier.</a:t>
+            </a:r>
+          </a:p>
+          <a:p>
+            <a:r>
+              <a:rPr sz="1050">
+                <a:solidFill>
+                  <a:srgbClr val="1A1F2E"/>
+                </a:solidFill>
+              </a:rPr>
+              <a:t>This is the Knowledge Blindspot: the gap between what a model believes is SOTA and</a:t>
+            </a:r>
+          </a:p>
+          <a:p>
+            <a:r>
+              <a:rPr sz="1050">
+                <a:solidFill>
+                  <a:srgbClr val="1A1F2E"/>
+                </a:solidFill>
+              </a:rPr>
+              <a:t>what actually is SOTA at inference time.</a:t>
+            </a:r>
+          </a:p>
+          <a:p>
+            <a:r>
+              <a:rPr sz="1050">
+                <a:solidFill>
+                  <a:srgbClr val="1A1F2E"/>
+                </a:solidFill>
+              </a:rPr>
+              <a:t>Current workarounds (RAG, fine-tuning) are reactive patches, not architectural solutions.</a:t>
+            </a:r>
+          </a:p>
+          <a:p>
+            <a:r>
+              <a:rPr sz="1050">
+                <a:solidFill>
+                  <a:srgbClr val="1A1F2E"/>
+                </a:solidFill>
+              </a:rPr>
+              <a:t>ETFT eliminates the blindspot structurally.</a:t>
             </a:r>
           </a:p>
         </p:txBody>
@@ -4646,14 +5121,6 @@
 <file path=ppt/slides/slide4.xml><?xml version="1.0" encoding="utf-8"?>
 <p:sld xmlns:a="http://schemas.openxmlformats.org/drawingml/2006/main" xmlns:p="http://schemas.openxmlformats.org/presentationml/2006/main" xmlns:r="http://schemas.openxmlformats.org/officeDocument/2006/relationships">
   <p:cSld>
-    <p:bg>
-      <p:bgPr>
-        <a:solidFill>
-          <a:srgbClr val="0D1B2A"/>
-        </a:solidFill>
-        <a:effectLst/>
-      </p:bgPr>
-    </p:bg>
     <p:spTree>
       <p:nvGrpSpPr>
         <p:cNvPr id="1" name=""/>
@@ -4670,13 +5137,13 @@
         <p:spPr>
           <a:xfrm>
             <a:off x="0" y="0"/>
-            <a:ext cx="12188952" cy="73152"/>
+            <a:ext cx="9144000" cy="5143500"/>
           </a:xfrm>
           <a:prstGeom prst="rect">
             <a:avLst/>
           </a:prstGeom>
           <a:solidFill>
-            <a:srgbClr val="00B4D8"/>
+            <a:srgbClr val="FFFFFF"/>
           </a:solidFill>
           <a:ln>
             <a:noFill/>
@@ -4706,14 +5173,100 @@
       </p:sp>
       <p:sp>
         <p:nvSpPr>
-          <p:cNvPr id="3" name="TextBox 2"/>
+          <p:cNvPr id="3" name="Rectangle 2"/>
+          <p:cNvSpPr/>
+          <p:nvPr/>
+        </p:nvSpPr>
+        <p:spPr>
+          <a:xfrm>
+            <a:off x="0" y="0"/>
+            <a:ext cx="9144000" cy="1131570"/>
+          </a:xfrm>
+          <a:prstGeom prst="rect">
+            <a:avLst/>
+          </a:prstGeom>
+          <a:solidFill>
+            <a:srgbClr val="0D1117"/>
+          </a:solidFill>
+          <a:ln>
+            <a:noFill/>
+          </a:ln>
+        </p:spPr>
+        <p:style>
+          <a:lnRef idx="1">
+            <a:schemeClr val="accent1"/>
+          </a:lnRef>
+          <a:fillRef idx="3">
+            <a:schemeClr val="accent1"/>
+          </a:fillRef>
+          <a:effectRef idx="2">
+            <a:schemeClr val="accent1"/>
+          </a:effectRef>
+          <a:fontRef idx="minor">
+            <a:schemeClr val="lt1"/>
+          </a:fontRef>
+        </p:style>
+        <p:txBody>
+          <a:bodyPr rtlCol="0" anchor="ctr"/>
+          <a:lstStyle/>
+          <a:p>
+            <a:pPr algn="ctr"/>
+          </a:p>
+        </p:txBody>
+      </p:sp>
+      <p:sp>
+        <p:nvSpPr>
+          <p:cNvPr id="4" name="Rectangle 3"/>
+          <p:cNvSpPr/>
+          <p:nvPr/>
+        </p:nvSpPr>
+        <p:spPr>
+          <a:xfrm>
+            <a:off x="0" y="1131570"/>
+            <a:ext cx="9144000" cy="41148"/>
+          </a:xfrm>
+          <a:prstGeom prst="rect">
+            <a:avLst/>
+          </a:prstGeom>
+          <a:solidFill>
+            <a:srgbClr val="3B6BFF"/>
+          </a:solidFill>
+          <a:ln>
+            <a:noFill/>
+          </a:ln>
+        </p:spPr>
+        <p:style>
+          <a:lnRef idx="1">
+            <a:schemeClr val="accent1"/>
+          </a:lnRef>
+          <a:fillRef idx="3">
+            <a:schemeClr val="accent1"/>
+          </a:fillRef>
+          <a:effectRef idx="2">
+            <a:schemeClr val="accent1"/>
+          </a:effectRef>
+          <a:fontRef idx="minor">
+            <a:schemeClr val="lt1"/>
+          </a:fontRef>
+        </p:style>
+        <p:txBody>
+          <a:bodyPr rtlCol="0" anchor="ctr"/>
+          <a:lstStyle/>
+          <a:p>
+            <a:pPr algn="ctr"/>
+          </a:p>
+        </p:txBody>
+      </p:sp>
+      <p:sp>
+        <p:nvSpPr>
+          <p:cNvPr id="5" name="TextBox 4"/>
           <p:cNvSpPr txBox="1"/>
           <p:nvPr/>
         </p:nvSpPr>
         <p:spPr>
           <a:xfrm>
-            <a:off x="274320" y="109728"/>
-            <a:ext cx="11612880" cy="457200"/>
+            <a:off x="274320" y="51435"/>
+            <a:ext cx="4572000" cy="411480"/>
           </a:xfrm>
           <a:prstGeom prst="rect">
             <a:avLst/>
@@ -4726,28 +5279,27 @@
           </a:bodyPr>
           <a:lstStyle/>
           <a:p>
-            <a:pPr algn="l"/>
-            <a:r>
-              <a:rPr sz="900" b="0">
-                <a:solidFill>
-                  <a:srgbClr val="00B4D8"/>
-                </a:solidFill>
-              </a:rPr>
-              <a:t>SLIDE 4 — THE REGRESSION PIPELINE (FIGURE 1)</a:t>
-            </a:r>
-          </a:p>
-        </p:txBody>
-      </p:sp>
-      <p:sp>
-        <p:nvSpPr>
-          <p:cNvPr id="4" name="TextBox 3"/>
+            <a:r>
+              <a:rPr sz="800" b="0" i="0">
+                <a:solidFill>
+                  <a:srgbClr val="3B6BFF"/>
+                </a:solidFill>
+              </a:rPr>
+              <a:t>ETFT · AutoScientist</a:t>
+            </a:r>
+          </a:p>
+        </p:txBody>
+      </p:sp>
+      <p:sp>
+        <p:nvSpPr>
+          <p:cNvPr id="6" name="TextBox 5"/>
           <p:cNvSpPr txBox="1"/>
           <p:nvPr/>
         </p:nvSpPr>
         <p:spPr>
           <a:xfrm>
-            <a:off x="274320" y="502920"/>
-            <a:ext cx="11612880" cy="777240"/>
+            <a:off x="6858000" y="51435"/>
+            <a:ext cx="2011680" cy="411480"/>
           </a:xfrm>
           <a:prstGeom prst="rect">
             <a:avLst/>
@@ -4760,28 +5312,28 @@
           </a:bodyPr>
           <a:lstStyle/>
           <a:p>
-            <a:pPr algn="l"/>
-            <a:r>
-              <a:rPr sz="2600" b="1">
-                <a:solidFill>
-                  <a:srgbClr val="FFFFFF"/>
-                </a:solidFill>
-              </a:rPr>
-              <a:t>Scalable training data — generated autonomously, validated rigorously.</a:t>
-            </a:r>
-          </a:p>
-        </p:txBody>
-      </p:sp>
-      <p:sp>
-        <p:nvSpPr>
-          <p:cNvPr id="5" name="TextBox 4"/>
+            <a:pPr algn="r"/>
+            <a:r>
+              <a:rPr sz="800" b="0" i="0">
+                <a:solidFill>
+                  <a:srgbClr val="8A94A6"/>
+                </a:solidFill>
+              </a:rPr>
+              <a:t>03 / 10</a:t>
+            </a:r>
+          </a:p>
+        </p:txBody>
+      </p:sp>
+      <p:sp>
+        <p:nvSpPr>
+          <p:cNvPr id="7" name="TextBox 6"/>
           <p:cNvSpPr txBox="1"/>
           <p:nvPr/>
         </p:nvSpPr>
         <p:spPr>
           <a:xfrm>
-            <a:off x="274320" y="1325880"/>
-            <a:ext cx="11612880" cy="4526279"/>
+            <a:off x="274320" y="308609"/>
+            <a:ext cx="8595359" cy="771525"/>
           </a:xfrm>
           <a:prstGeom prst="rect">
             <a:avLst/>
@@ -4794,314 +5346,27 @@
           </a:bodyPr>
           <a:lstStyle/>
           <a:p>
-            <a:pPr algn="l"/>
-          </a:p>
-          <a:p>
-            <a:pPr algn="l"/>
-            <a:r>
-              <a:rPr sz="1300">
+            <a:r>
+              <a:rPr sz="1600" b="1" i="0">
                 <a:solidFill>
                   <a:srgbClr val="FFFFFF"/>
                 </a:solidFill>
               </a:rPr>
-              <a:t>aₙ (Current SOTA)</a:t>
-            </a:r>
-          </a:p>
-          <a:p>
-            <a:pPr algn="l"/>
-            <a:r>
-              <a:rPr sz="1300">
-                <a:solidFill>
-                  <a:srgbClr val="FFFFFF"/>
-                </a:solidFill>
-              </a:rPr>
-              <a:t>│</a:t>
-            </a:r>
-          </a:p>
-          <a:p>
-            <a:pPr algn="l"/>
-            <a:r>
-              <a:rPr sz="1300">
-                <a:solidFill>
-                  <a:srgbClr val="FFFFFF"/>
-                </a:solidFill>
-              </a:rPr>
-              <a:t>AI Regression Agent (De-optimization)</a:t>
-            </a:r>
-          </a:p>
-          <a:p>
-            <a:pPr algn="l"/>
-            <a:r>
-              <a:rPr sz="1300">
-                <a:solidFill>
-                  <a:srgbClr val="FFFFFF"/>
-                </a:solidFill>
-              </a:rPr>
-              <a:t>│</a:t>
-            </a:r>
-          </a:p>
-          <a:p>
-            <a:pPr algn="l"/>
-            <a:r>
-              <a:rPr sz="1300">
-                <a:solidFill>
-                  <a:srgbClr val="FFFFFF"/>
-                </a:solidFill>
-              </a:rPr>
-              <a:t>CI/CD Validation ──── Fail (Syntax/OOM) → discarded</a:t>
-            </a:r>
-          </a:p>
-          <a:p>
-            <a:pPr algn="l"/>
-            <a:r>
-              <a:rPr sz="1300">
-                <a:solidFill>
-                  <a:srgbClr val="FFFFFF"/>
-                </a:solidFill>
-              </a:rPr>
-              <a:t>│</a:t>
-            </a:r>
-          </a:p>
-          <a:p>
-            <a:pPr algn="l"/>
-            <a:r>
-              <a:rPr sz="1300">
-                <a:solidFill>
-                  <a:srgbClr val="FFFFFF"/>
-                </a:solidFill>
-              </a:rPr>
-              <a:t>└── Pass (Functional) → aₙ₋₁ (Functional Predecessor)</a:t>
-            </a:r>
-          </a:p>
-          <a:p>
-            <a:pPr algn="l"/>
-            <a:r>
-              <a:rPr sz="1300">
-                <a:solidFill>
-                  <a:srgbClr val="FFFFFF"/>
-                </a:solidFill>
-              </a:rPr>
-              <a:t>│</a:t>
-            </a:r>
-          </a:p>
-          <a:p>
-            <a:pPr algn="l"/>
-            <a:r>
-              <a:rPr sz="1300">
-                <a:solidFill>
-                  <a:srgbClr val="FFFFFF"/>
-                </a:solidFill>
-              </a:rPr>
-              <a:t>Extracted Meta-Datasets:</a:t>
-            </a:r>
-          </a:p>
-          <a:p>
-            <a:pPr algn="l"/>
-            <a:r>
-              <a:rPr sz="1300">
-                <a:solidFill>
-                  <a:srgbClr val="FFFFFF"/>
-                </a:solidFill>
-              </a:rPr>
-              <a:t>├── D_Gen    (Generative Pairs)</a:t>
-            </a:r>
-          </a:p>
-          <a:p>
-            <a:pPr algn="l"/>
-            <a:r>
-              <a:rPr sz="1300">
-                <a:solidFill>
-                  <a:srgbClr val="FFFFFF"/>
-                </a:solidFill>
-              </a:rPr>
-              <a:t>├── D_Rationale (Structural Meta-data)</a:t>
-            </a:r>
-          </a:p>
-          <a:p>
-            <a:pPr algn="l"/>
-            <a:r>
-              <a:rPr sz="1300">
-                <a:solidFill>
-                  <a:srgbClr val="FFFFFF"/>
-                </a:solidFill>
-              </a:rPr>
-              <a:t>└── D_Perf   (Performance Metrics)</a:t>
-            </a:r>
-          </a:p>
-          <a:p>
-            <a:pPr algn="l"/>
-          </a:p>
-          <a:p>
-            <a:pPr algn="l">
-              <a:spcAft>
-                <a:spcPts val="400"/>
-              </a:spcAft>
-            </a:pPr>
-            <a:r>
-              <a:rPr sz="1300">
-                <a:solidFill>
-                  <a:srgbClr val="FFFFFF"/>
-                </a:solidFill>
-              </a:rPr>
-              <a:t/>
-            </a:r>
-          </a:p>
-          <a:p>
-            <a:pPr algn="l">
-              <a:spcAft>
-                <a:spcPts val="400"/>
-              </a:spcAft>
-            </a:pPr>
-            <a:r>
-              <a:rPr sz="1300">
-                <a:solidFill>
-                  <a:srgbClr val="FFFFFF"/>
-                </a:solidFill>
-              </a:rPr>
-              <a:t/>
-            </a:r>
-          </a:p>
-          <a:p>
-            <a:pPr algn="l"/>
-            <a:r>
-              <a:rPr sz="1300">
-                <a:solidFill>
-                  <a:srgbClr val="FFFFFF"/>
-                </a:solidFill>
-              </a:rPr>
-              <a:t>The training corpus is generated by an AI Regression Agent that systematically</a:t>
-            </a:r>
-          </a:p>
-          <a:p>
-            <a:pPr algn="l"/>
-            <a:r>
-              <a:rPr sz="1300">
-                <a:solidFill>
-                  <a:srgbClr val="FFFFFF"/>
-                </a:solidFill>
-              </a:rPr>
-              <a:t>de-optimises SOTA algorithms into their functional predecessors — and records every</a:t>
-            </a:r>
-          </a:p>
-          <a:p>
-            <a:pPr algn="l"/>
-            <a:r>
-              <a:rPr sz="1300">
-                <a:solidFill>
-                  <a:srgbClr val="FFFFFF"/>
-                </a:solidFill>
-              </a:rPr>
-              <a:t>architectural decision along the way.</a:t>
-            </a:r>
-          </a:p>
-          <a:p>
-            <a:pPr algn="l">
-              <a:spcAft>
-                <a:spcPts val="400"/>
-              </a:spcAft>
-            </a:pPr>
-            <a:r>
-              <a:rPr sz="1300">
-                <a:solidFill>
-                  <a:srgbClr val="FFFFFF"/>
-                </a:solidFill>
-              </a:rPr>
-              <a:t/>
-            </a:r>
-          </a:p>
-          <a:p>
-            <a:pPr algn="l"/>
-            <a:r>
-              <a:rPr sz="1300">
-                <a:solidFill>
-                  <a:srgbClr val="FFFFFF"/>
-                </a:solidFill>
-              </a:rPr>
-              <a:t>CI/CD validation ensures every generated predecessor is compilable and runnable.</a:t>
-            </a:r>
-          </a:p>
-          <a:p>
-            <a:pPr algn="l"/>
-            <a:r>
-              <a:rPr sz="1300">
-                <a:solidFill>
-                  <a:srgbClr val="FFFFFF"/>
-                </a:solidFill>
-              </a:rPr>
-              <a:t>The result: a self-growing, high-fidelity dataset of the evolutionary history of algorithms —</a:t>
-            </a:r>
-          </a:p>
-          <a:p>
-            <a:pPr algn="l"/>
-            <a:r>
-              <a:rPr sz="1300">
-                <a:solidFill>
-                  <a:srgbClr val="FFFFFF"/>
-                </a:solidFill>
-              </a:rPr>
-              <a:t>produced at scale, without human labelling.</a:t>
-            </a:r>
-          </a:p>
-          <a:p>
-            <a:pPr algn="l">
-              <a:spcAft>
-                <a:spcPts val="400"/>
-              </a:spcAft>
-            </a:pPr>
-            <a:r>
-              <a:rPr sz="1300">
-                <a:solidFill>
-                  <a:srgbClr val="FFFFFF"/>
-                </a:solidFill>
-              </a:rPr>
-              <a:t/>
-            </a:r>
-          </a:p>
-          <a:p>
-            <a:pPr algn="l"/>
-            <a:r>
-              <a:rPr sz="1300">
-                <a:solidFill>
-                  <a:srgbClr val="FFFFFF"/>
-                </a:solidFill>
-              </a:rPr>
-              <a:t>D_Perf trains the Probabilistic Heuristic Filter — an in-silico triage that screens</a:t>
-            </a:r>
-          </a:p>
-          <a:p>
-            <a:pPr algn="l"/>
-            <a:r>
-              <a:rPr sz="1300">
-                <a:solidFill>
-                  <a:srgbClr val="FFFFFF"/>
-                </a:solidFill>
-              </a:rPr>
-              <a:t>out OOM-risk candidates before expensive GPU runs. Crucially, *failed* candidates</a:t>
-            </a:r>
-          </a:p>
-          <a:p>
-            <a:pPr algn="l"/>
-            <a:r>
-              <a:rPr sz="1300">
-                <a:solidFill>
-                  <a:srgbClr val="FFFFFF"/>
-                </a:solidFill>
-              </a:rPr>
-              <a:t>continuously enrich the negative training set, making the filter progressively sharper.</a:t>
-            </a:r>
-          </a:p>
-        </p:txBody>
-      </p:sp>
-      <p:sp>
-        <p:nvSpPr>
-          <p:cNvPr id="6" name="TextBox 5"/>
+              <a:t>Introducing the Discrete Gradient</a:t>
+            </a:r>
+          </a:p>
+        </p:txBody>
+      </p:sp>
+      <p:sp>
+        <p:nvSpPr>
+          <p:cNvPr id="8" name="TextBox 7"/>
           <p:cNvSpPr txBox="1"/>
           <p:nvPr/>
         </p:nvSpPr>
         <p:spPr>
           <a:xfrm>
-            <a:off x="274320" y="6263640"/>
-            <a:ext cx="11612880" cy="274320"/>
+            <a:off x="274320" y="1440180"/>
+            <a:ext cx="8595359" cy="3394710"/>
           </a:xfrm>
           <a:prstGeom prst="rect">
             <a:avLst/>
@@ -5114,14 +5379,143 @@
           </a:bodyPr>
           <a:lstStyle/>
           <a:p>
-            <a:pPr algn="ctr"/>
-            <a:r>
-              <a:rPr sz="700" b="0">
-                <a:solidFill>
-                  <a:srgbClr val="CCD6E0"/>
-                </a:solidFill>
-              </a:rPr>
-              <a:t>ETFT (AutoScientist) · Lukas Benda · lukas.benda@boldpivot.cz · Confidential</a:t>
+            <a:r>
+              <a:rPr sz="1050">
+                <a:solidFill>
+                  <a:srgbClr val="1A1F2E"/>
+                </a:solidFill>
+              </a:rPr>
+              <a:t>Headline: Algorithms don't appear. They evolve.</a:t>
+            </a:r>
+          </a:p>
+          <a:p>
+            <a:r>
+              <a:rPr sz="1050">
+                <a:solidFill>
+                  <a:srgbClr val="1A1F2E"/>
+                </a:solidFill>
+              </a:rPr>
+              <a:t>Key visual: Evolutionary tree — horizontal axis: time; vertical axis: fitness F(a).</a:t>
+            </a:r>
+          </a:p>
+          <a:p>
+            <a:r>
+              <a:rPr sz="1050">
+                <a:solidFill>
+                  <a:srgbClr val="1A1F2E"/>
+                </a:solidFill>
+              </a:rPr>
+              <a:t>Nodes: a₀ (MLP) → a₁ (1D CNN) → a₂ (Depthwise CNN) → a₃ (MobileNetV2) → a₄ (SOTA+1 ?)</a:t>
+            </a:r>
+          </a:p>
+          <a:p>
+            <a:r>
+              <a:rPr sz="1050">
+                <a:solidFill>
+                  <a:srgbClr val="1A1F2E"/>
+                </a:solidFill>
+              </a:rPr>
+              <a:t>Each transition labelled with the architectural delta (what changed) and the performance</a:t>
+            </a:r>
+          </a:p>
+          <a:p>
+            <a:r>
+              <a:rPr sz="1050">
+                <a:solidFill>
+                  <a:srgbClr val="1A1F2E"/>
+                </a:solidFill>
+              </a:rPr>
+              <a:t>jump (what it bought).</a:t>
+            </a:r>
+          </a:p>
+          <a:p>
+            <a:r>
+              <a:rPr sz="1050">
+                <a:solidFill>
+                  <a:srgbClr val="1A1F2E"/>
+                </a:solidFill>
+              </a:rPr>
+              <a:t>Body copy:</a:t>
+            </a:r>
+          </a:p>
+          <a:p>
+            <a:r>
+              <a:rPr sz="1050">
+                <a:solidFill>
+                  <a:srgbClr val="1A1F2E"/>
+                </a:solidFill>
+              </a:rPr>
+              <a:t>ETFT formalises this intuition mathematically.</a:t>
+            </a:r>
+          </a:p>
+          <a:p>
+            <a:r>
+              <a:rPr sz="1050">
+                <a:solidFill>
+                  <a:srgbClr val="1A1F2E"/>
+                </a:solidFill>
+              </a:rPr>
+              <a:t>Define a fitness function F(a) inversely proportional to validation loss under hard</a:t>
+            </a:r>
+          </a:p>
+          <a:p>
+            <a:r>
+              <a:rPr sz="1050">
+                <a:solidFill>
+                  <a:srgbClr val="1A1F2E"/>
+                </a:solidFill>
+              </a:rPr>
+              <a:t>hardware constraints. An Evolutionary Trajectory T = (a₀, a₁, …, aₙ) is an ordered</a:t>
+            </a:r>
+          </a:p>
+          <a:p>
+            <a:r>
+              <a:rPr sz="1050">
+                <a:solidFill>
+                  <a:srgbClr val="1A1F2E"/>
+                </a:solidFill>
+              </a:rPr>
+              <a:t>sequence where F(aᵢ₋₁) &lt; F(aᵢ).</a:t>
+            </a:r>
+          </a:p>
+          <a:p>
+            <a:r>
+              <a:rPr sz="1050">
+                <a:solidFill>
+                  <a:srgbClr val="1A1F2E"/>
+                </a:solidFill>
+              </a:rPr>
+              <a:t>Each transition aᵢ₋₁ → aᵢ is a macro-evolutionary jump — a discrete gradient step</a:t>
+            </a:r>
+          </a:p>
+          <a:p>
+            <a:r>
+              <a:rPr sz="1050">
+                <a:solidFill>
+                  <a:srgbClr val="1A1F2E"/>
+                </a:solidFill>
+              </a:rPr>
+              <a:t>in architectural space. ETFT trains a model on these regressions, teaching it *the</a:t>
+            </a:r>
+          </a:p>
+          <a:p>
+            <a:r>
+              <a:rPr sz="1050">
+                <a:solidFill>
+                  <a:srgbClr val="1A1F2E"/>
+                </a:solidFill>
+              </a:rPr>
+              <a:t>mechanics of invention*, not just the outcomes.</a:t>
+            </a:r>
+          </a:p>
+          <a:p>
+            <a:r>
+              <a:rPr sz="1050">
+                <a:solidFill>
+                  <a:srgbClr val="1A1F2E"/>
+                </a:solidFill>
+              </a:rPr>
+              <a:t>The model learns not what SOTA is. It learns why SOTA becomes SOTA.</a:t>
             </a:r>
           </a:p>
         </p:txBody>
@@ -5137,14 +5531,6 @@
 <file path=ppt/slides/slide5.xml><?xml version="1.0" encoding="utf-8"?>
 <p:sld xmlns:a="http://schemas.openxmlformats.org/drawingml/2006/main" xmlns:p="http://schemas.openxmlformats.org/presentationml/2006/main" xmlns:r="http://schemas.openxmlformats.org/officeDocument/2006/relationships">
   <p:cSld>
-    <p:bg>
-      <p:bgPr>
-        <a:solidFill>
-          <a:srgbClr val="0D1B2A"/>
-        </a:solidFill>
-        <a:effectLst/>
-      </p:bgPr>
-    </p:bg>
     <p:spTree>
       <p:nvGrpSpPr>
         <p:cNvPr id="1" name=""/>
@@ -5161,13 +5547,13 @@
         <p:spPr>
           <a:xfrm>
             <a:off x="0" y="0"/>
-            <a:ext cx="12188952" cy="73152"/>
+            <a:ext cx="9144000" cy="5143500"/>
           </a:xfrm>
           <a:prstGeom prst="rect">
             <a:avLst/>
           </a:prstGeom>
           <a:solidFill>
-            <a:srgbClr val="00B4D8"/>
+            <a:srgbClr val="FFFFFF"/>
           </a:solidFill>
           <a:ln>
             <a:noFill/>
@@ -5197,14 +5583,100 @@
       </p:sp>
       <p:sp>
         <p:nvSpPr>
-          <p:cNvPr id="3" name="TextBox 2"/>
+          <p:cNvPr id="3" name="Rectangle 2"/>
+          <p:cNvSpPr/>
+          <p:nvPr/>
+        </p:nvSpPr>
+        <p:spPr>
+          <a:xfrm>
+            <a:off x="0" y="0"/>
+            <a:ext cx="9144000" cy="1131570"/>
+          </a:xfrm>
+          <a:prstGeom prst="rect">
+            <a:avLst/>
+          </a:prstGeom>
+          <a:solidFill>
+            <a:srgbClr val="0D1117"/>
+          </a:solidFill>
+          <a:ln>
+            <a:noFill/>
+          </a:ln>
+        </p:spPr>
+        <p:style>
+          <a:lnRef idx="1">
+            <a:schemeClr val="accent1"/>
+          </a:lnRef>
+          <a:fillRef idx="3">
+            <a:schemeClr val="accent1"/>
+          </a:fillRef>
+          <a:effectRef idx="2">
+            <a:schemeClr val="accent1"/>
+          </a:effectRef>
+          <a:fontRef idx="minor">
+            <a:schemeClr val="lt1"/>
+          </a:fontRef>
+        </p:style>
+        <p:txBody>
+          <a:bodyPr rtlCol="0" anchor="ctr"/>
+          <a:lstStyle/>
+          <a:p>
+            <a:pPr algn="ctr"/>
+          </a:p>
+        </p:txBody>
+      </p:sp>
+      <p:sp>
+        <p:nvSpPr>
+          <p:cNvPr id="4" name="Rectangle 3"/>
+          <p:cNvSpPr/>
+          <p:nvPr/>
+        </p:nvSpPr>
+        <p:spPr>
+          <a:xfrm>
+            <a:off x="0" y="1131570"/>
+            <a:ext cx="9144000" cy="41148"/>
+          </a:xfrm>
+          <a:prstGeom prst="rect">
+            <a:avLst/>
+          </a:prstGeom>
+          <a:solidFill>
+            <a:srgbClr val="3B6BFF"/>
+          </a:solidFill>
+          <a:ln>
+            <a:noFill/>
+          </a:ln>
+        </p:spPr>
+        <p:style>
+          <a:lnRef idx="1">
+            <a:schemeClr val="accent1"/>
+          </a:lnRef>
+          <a:fillRef idx="3">
+            <a:schemeClr val="accent1"/>
+          </a:fillRef>
+          <a:effectRef idx="2">
+            <a:schemeClr val="accent1"/>
+          </a:effectRef>
+          <a:fontRef idx="minor">
+            <a:schemeClr val="lt1"/>
+          </a:fontRef>
+        </p:style>
+        <p:txBody>
+          <a:bodyPr rtlCol="0" anchor="ctr"/>
+          <a:lstStyle/>
+          <a:p>
+            <a:pPr algn="ctr"/>
+          </a:p>
+        </p:txBody>
+      </p:sp>
+      <p:sp>
+        <p:nvSpPr>
+          <p:cNvPr id="5" name="TextBox 4"/>
           <p:cNvSpPr txBox="1"/>
           <p:nvPr/>
         </p:nvSpPr>
         <p:spPr>
           <a:xfrm>
-            <a:off x="274320" y="109728"/>
-            <a:ext cx="11612880" cy="457200"/>
+            <a:off x="274320" y="51435"/>
+            <a:ext cx="4572000" cy="411480"/>
           </a:xfrm>
           <a:prstGeom prst="rect">
             <a:avLst/>
@@ -5217,28 +5689,27 @@
           </a:bodyPr>
           <a:lstStyle/>
           <a:p>
-            <a:pPr algn="l"/>
-            <a:r>
-              <a:rPr sz="900" b="0">
-                <a:solidFill>
-                  <a:srgbClr val="00B4D8"/>
-                </a:solidFill>
-              </a:rPr>
-              <a:t>SLIDE 5 — PARETO DELTA ANALYSIS: FINDING THE 20%</a:t>
-            </a:r>
-          </a:p>
-        </p:txBody>
-      </p:sp>
-      <p:sp>
-        <p:nvSpPr>
-          <p:cNvPr id="4" name="TextBox 3"/>
+            <a:r>
+              <a:rPr sz="800" b="0" i="0">
+                <a:solidFill>
+                  <a:srgbClr val="3B6BFF"/>
+                </a:solidFill>
+              </a:rPr>
+              <a:t>ETFT · AutoScientist</a:t>
+            </a:r>
+          </a:p>
+        </p:txBody>
+      </p:sp>
+      <p:sp>
+        <p:nvSpPr>
+          <p:cNvPr id="6" name="TextBox 5"/>
           <p:cNvSpPr txBox="1"/>
           <p:nvPr/>
         </p:nvSpPr>
         <p:spPr>
           <a:xfrm>
-            <a:off x="274320" y="502920"/>
-            <a:ext cx="11612880" cy="777240"/>
+            <a:off x="6858000" y="51435"/>
+            <a:ext cx="2011680" cy="411480"/>
           </a:xfrm>
           <a:prstGeom prst="rect">
             <a:avLst/>
@@ -5251,28 +5722,28 @@
           </a:bodyPr>
           <a:lstStyle/>
           <a:p>
-            <a:pPr algn="l"/>
-            <a:r>
-              <a:rPr sz="2600" b="1">
-                <a:solidFill>
-                  <a:srgbClr val="FFFFFF"/>
-                </a:solidFill>
-              </a:rPr>
-              <a:t>Not all code is created equal. ETFT finds the 20% that drives 80% of progress.</a:t>
-            </a:r>
-          </a:p>
-        </p:txBody>
-      </p:sp>
-      <p:sp>
-        <p:nvSpPr>
-          <p:cNvPr id="5" name="TextBox 4"/>
+            <a:pPr algn="r"/>
+            <a:r>
+              <a:rPr sz="800" b="0" i="0">
+                <a:solidFill>
+                  <a:srgbClr val="8A94A6"/>
+                </a:solidFill>
+              </a:rPr>
+              <a:t>04 / 10</a:t>
+            </a:r>
+          </a:p>
+        </p:txBody>
+      </p:sp>
+      <p:sp>
+        <p:nvSpPr>
+          <p:cNvPr id="7" name="TextBox 6"/>
           <p:cNvSpPr txBox="1"/>
           <p:nvPr/>
         </p:nvSpPr>
         <p:spPr>
           <a:xfrm>
-            <a:off x="274320" y="1325880"/>
-            <a:ext cx="11612880" cy="4526279"/>
+            <a:off x="274320" y="308609"/>
+            <a:ext cx="8595359" cy="771525"/>
           </a:xfrm>
           <a:prstGeom prst="rect">
             <a:avLst/>
@@ -5285,202 +5756,27 @@
           </a:bodyPr>
           <a:lstStyle/>
           <a:p>
-            <a:pPr algn="l"/>
-            <a:r>
-              <a:rPr sz="1300">
+            <a:r>
+              <a:rPr sz="1600" b="1" i="0">
                 <a:solidFill>
                   <a:srgbClr val="FFFFFF"/>
                 </a:solidFill>
               </a:rPr>
-              <a:t>normalization layer, activation function, quantization scheme…); vertical: contribution to</a:t>
-            </a:r>
-          </a:p>
-          <a:p>
-            <a:pPr algn="l"/>
-            <a:r>
-              <a:rPr sz="1300">
-                <a:solidFill>
-                  <a:srgbClr val="FFFFFF"/>
-                </a:solidFill>
-              </a:rPr>
-              <a:t>performance delta (aₙ₋₁ → aₙ). 80/20 cut-off line drawn.</a:t>
-            </a:r>
-          </a:p>
-          <a:p>
-            <a:pPr algn="l">
-              <a:spcAft>
-                <a:spcPts val="400"/>
-              </a:spcAft>
-            </a:pPr>
-            <a:r>
-              <a:rPr sz="1300">
-                <a:solidFill>
-                  <a:srgbClr val="FFFFFF"/>
-                </a:solidFill>
-              </a:rPr>
-              <a:t/>
-            </a:r>
-          </a:p>
-          <a:p>
-            <a:pPr algn="l">
-              <a:spcAft>
-                <a:spcPts val="400"/>
-              </a:spcAft>
-            </a:pPr>
-            <a:r>
-              <a:rPr sz="1300">
-                <a:solidFill>
-                  <a:srgbClr val="FFFFFF"/>
-                </a:solidFill>
-              </a:rPr>
-              <a:t/>
-            </a:r>
-          </a:p>
-          <a:p>
-            <a:pPr algn="l"/>
-            <a:r>
-              <a:rPr sz="1300">
-                <a:solidFill>
-                  <a:srgbClr val="FFFFFF"/>
-                </a:solidFill>
-              </a:rPr>
-              <a:t>Rather than real-time computational profiling (expensive, error-prone), ETFT performs</a:t>
-            </a:r>
-          </a:p>
-          <a:p>
-            <a:pPr algn="l"/>
-            <a:r>
-              <a:rPr sz="1300">
-                <a:solidFill>
-                  <a:srgbClr val="FFFFFF"/>
-                </a:solidFill>
-              </a:rPr>
-              <a:t>a deterministic retrospective analysis of historical deltas.</a:t>
-            </a:r>
-          </a:p>
-          <a:p>
-            <a:pPr algn="l">
-              <a:spcAft>
-                <a:spcPts val="400"/>
-              </a:spcAft>
-            </a:pPr>
-            <a:r>
-              <a:rPr sz="1300">
-                <a:solidFill>
-                  <a:srgbClr val="FFFFFF"/>
-                </a:solidFill>
-              </a:rPr>
-              <a:t/>
-            </a:r>
-          </a:p>
-          <a:p>
-            <a:pPr algn="l"/>
-            <a:r>
-              <a:rPr sz="1300">
-                <a:solidFill>
-                  <a:srgbClr val="FFFFFF"/>
-                </a:solidFill>
-              </a:rPr>
-              <a:t>By comparing aₙ₋₁ vs aₙ across the entire evolutionary history, the system quantifies:</a:t>
-            </a:r>
-          </a:p>
-          <a:p>
-            <a:pPr algn="l" lvl="1"/>
-            <a:r>
-              <a:rPr sz="1200">
-                <a:solidFill>
-                  <a:srgbClr val="CCD6E0"/>
-                </a:solidFill>
-              </a:rPr>
-              <a:t>• Which sub-components were modified in winning transitions?</a:t>
-            </a:r>
-          </a:p>
-          <a:p>
-            <a:pPr algn="l" lvl="1"/>
-            <a:r>
-              <a:rPr sz="1200">
-                <a:solidFill>
-                  <a:srgbClr val="CCD6E0"/>
-                </a:solidFill>
-              </a:rPr>
-              <a:t>• What magnitude of change drove the largest performance jumps?</a:t>
-            </a:r>
-          </a:p>
-          <a:p>
-            <a:pPr algn="l">
-              <a:spcAft>
-                <a:spcPts val="400"/>
-              </a:spcAft>
-            </a:pPr>
-            <a:r>
-              <a:rPr sz="1300">
-                <a:solidFill>
-                  <a:srgbClr val="FFFFFF"/>
-                </a:solidFill>
-              </a:rPr>
-              <a:t/>
-            </a:r>
-          </a:p>
-          <a:p>
-            <a:pPr algn="l"/>
-            <a:r>
-              <a:rPr sz="1300">
-                <a:solidFill>
-                  <a:srgbClr val="FFFFFF"/>
-                </a:solidFill>
-              </a:rPr>
-              <a:t>The model learns to recognise the structural signatures of high-yield innovation —</a:t>
-            </a:r>
-          </a:p>
-          <a:p>
-            <a:pPr algn="l"/>
-            <a:r>
-              <a:rPr sz="1300">
-                <a:solidFill>
-                  <a:srgbClr val="FFFFFF"/>
-                </a:solidFill>
-              </a:rPr>
-              <a:t>then projects that learned 80/20 lens onto the forward trajectory aₙ → aₙ₊₁.</a:t>
-            </a:r>
-          </a:p>
-          <a:p>
-            <a:pPr algn="l">
-              <a:spcAft>
-                <a:spcPts val="400"/>
-              </a:spcAft>
-            </a:pPr>
-            <a:r>
-              <a:rPr sz="1300">
-                <a:solidFill>
-                  <a:srgbClr val="FFFFFF"/>
-                </a:solidFill>
-              </a:rPr>
-              <a:t/>
-            </a:r>
-          </a:p>
-          <a:p>
-            <a:pPr algn="l"/>
-            <a:r>
-              <a:rPr sz="1300">
-                <a:solidFill>
-                  <a:srgbClr val="FFFFFF"/>
-                </a:solidFill>
-              </a:rPr>
-              <a:t>This is not heuristic. It is a deterministic, data-driven bottleneck oracle.</a:t>
-            </a:r>
-          </a:p>
-        </p:txBody>
-      </p:sp>
-      <p:sp>
-        <p:nvSpPr>
-          <p:cNvPr id="6" name="TextBox 5"/>
+              <a:t>The Regression Pipeline (Figure 1)</a:t>
+            </a:r>
+          </a:p>
+        </p:txBody>
+      </p:sp>
+      <p:sp>
+        <p:nvSpPr>
+          <p:cNvPr id="8" name="TextBox 7"/>
           <p:cNvSpPr txBox="1"/>
           <p:nvPr/>
         </p:nvSpPr>
         <p:spPr>
           <a:xfrm>
-            <a:off x="274320" y="6263640"/>
-            <a:ext cx="11612880" cy="274320"/>
+            <a:off x="274320" y="1440180"/>
+            <a:ext cx="8595359" cy="3394710"/>
           </a:xfrm>
           <a:prstGeom prst="rect">
             <a:avLst/>
@@ -5493,14 +5789,272 @@
           </a:bodyPr>
           <a:lstStyle/>
           <a:p>
-            <a:pPr algn="ctr"/>
-            <a:r>
-              <a:rPr sz="700" b="0">
-                <a:solidFill>
-                  <a:srgbClr val="CCD6E0"/>
-                </a:solidFill>
-              </a:rPr>
-              <a:t>ETFT (AutoScientist) · Lukas Benda · lukas.benda@boldpivot.cz · Confidential</a:t>
+            <a:r>
+              <a:rPr sz="1050">
+                <a:solidFill>
+                  <a:srgbClr val="1A1F2E"/>
+                </a:solidFill>
+              </a:rPr>
+              <a:t>Headline: Scalable training data — generated autonomously, validated rigorously.</a:t>
+            </a:r>
+          </a:p>
+          <a:p>
+            <a:r>
+              <a:rPr sz="1050">
+                <a:solidFill>
+                  <a:srgbClr val="1A1F2E"/>
+                </a:solidFill>
+              </a:rPr>
+              <a:t>Key visual: Reproduction of Figure 1 from ETFT whitepaper.</a:t>
+            </a:r>
+          </a:p>
+          <a:p>
+            <a:r>
+              <a:rPr sz="1050">
+                <a:solidFill>
+                  <a:srgbClr val="1A1F2E"/>
+                </a:solidFill>
+              </a:rPr>
+              <a:t>`</a:t>
+            </a:r>
+          </a:p>
+          <a:p>
+            <a:r>
+              <a:rPr sz="1050">
+                <a:solidFill>
+                  <a:srgbClr val="1A1F2E"/>
+                </a:solidFill>
+              </a:rPr>
+              <a:t>aₙ (Current SOTA)</a:t>
+            </a:r>
+          </a:p>
+          <a:p>
+            <a:r>
+              <a:rPr sz="800">
+                <a:solidFill>
+                  <a:srgbClr val="C9D1D9"/>
+                </a:solidFill>
+                <a:latin typeface="Courier New"/>
+              </a:rPr>
+              <a:t>│</a:t>
+            </a:r>
+          </a:p>
+          <a:p>
+            <a:r>
+              <a:rPr sz="1050">
+                <a:solidFill>
+                  <a:srgbClr val="1A1F2E"/>
+                </a:solidFill>
+              </a:rPr>
+              <a:t>AI Regression Agent (De-optimization)</a:t>
+            </a:r>
+          </a:p>
+          <a:p>
+            <a:r>
+              <a:rPr sz="800">
+                <a:solidFill>
+                  <a:srgbClr val="C9D1D9"/>
+                </a:solidFill>
+                <a:latin typeface="Courier New"/>
+              </a:rPr>
+              <a:t>│</a:t>
+            </a:r>
+          </a:p>
+          <a:p>
+            <a:r>
+              <a:rPr sz="1050">
+                <a:solidFill>
+                  <a:srgbClr val="1A1F2E"/>
+                </a:solidFill>
+              </a:rPr>
+              <a:t>CI/CD Validation ──── Fail (Syntax/OOM) → discarded</a:t>
+            </a:r>
+          </a:p>
+          <a:p>
+            <a:r>
+              <a:rPr sz="800">
+                <a:solidFill>
+                  <a:srgbClr val="C9D1D9"/>
+                </a:solidFill>
+                <a:latin typeface="Courier New"/>
+              </a:rPr>
+              <a:t>│</a:t>
+            </a:r>
+          </a:p>
+          <a:p>
+            <a:r>
+              <a:rPr sz="800">
+                <a:solidFill>
+                  <a:srgbClr val="C9D1D9"/>
+                </a:solidFill>
+                <a:latin typeface="Courier New"/>
+              </a:rPr>
+              <a:t>└── Pass (Functional) → aₙ₋₁ (Functional Predecessor)</a:t>
+            </a:r>
+          </a:p>
+          <a:p>
+            <a:r>
+              <a:rPr sz="800">
+                <a:solidFill>
+                  <a:srgbClr val="C9D1D9"/>
+                </a:solidFill>
+                <a:latin typeface="Courier New"/>
+              </a:rPr>
+              <a:t>│</a:t>
+            </a:r>
+          </a:p>
+          <a:p>
+            <a:r>
+              <a:rPr sz="800">
+                <a:solidFill>
+                  <a:srgbClr val="C9D1D9"/>
+                </a:solidFill>
+                <a:latin typeface="Courier New"/>
+              </a:rPr>
+              <a:t>Extracted Meta-Datasets:</a:t>
+            </a:r>
+          </a:p>
+          <a:p>
+            <a:r>
+              <a:rPr sz="800">
+                <a:solidFill>
+                  <a:srgbClr val="C9D1D9"/>
+                </a:solidFill>
+                <a:latin typeface="Courier New"/>
+              </a:rPr>
+              <a:t>├── D_Gen    (Generative Pairs)</a:t>
+            </a:r>
+          </a:p>
+          <a:p>
+            <a:r>
+              <a:rPr sz="800">
+                <a:solidFill>
+                  <a:srgbClr val="C9D1D9"/>
+                </a:solidFill>
+                <a:latin typeface="Courier New"/>
+              </a:rPr>
+              <a:t>├── D_Rationale (Structural Meta-data)</a:t>
+            </a:r>
+          </a:p>
+          <a:p>
+            <a:r>
+              <a:rPr sz="800">
+                <a:solidFill>
+                  <a:srgbClr val="C9D1D9"/>
+                </a:solidFill>
+                <a:latin typeface="Courier New"/>
+              </a:rPr>
+              <a:t>└── D_Perf   (Performance Metrics)</a:t>
+            </a:r>
+          </a:p>
+          <a:p>
+            <a:r>
+              <a:rPr sz="1050">
+                <a:solidFill>
+                  <a:srgbClr val="1A1F2E"/>
+                </a:solidFill>
+              </a:rPr>
+              <a:t>`</a:t>
+            </a:r>
+          </a:p>
+          <a:p>
+            <a:r>
+              <a:rPr sz="1050">
+                <a:solidFill>
+                  <a:srgbClr val="1A1F2E"/>
+                </a:solidFill>
+              </a:rPr>
+              <a:t>Body copy:</a:t>
+            </a:r>
+          </a:p>
+          <a:p>
+            <a:r>
+              <a:rPr sz="1050">
+                <a:solidFill>
+                  <a:srgbClr val="1A1F2E"/>
+                </a:solidFill>
+              </a:rPr>
+              <a:t>The training corpus is generated by an AI Regression Agent that systematically</a:t>
+            </a:r>
+          </a:p>
+          <a:p>
+            <a:r>
+              <a:rPr sz="1050">
+                <a:solidFill>
+                  <a:srgbClr val="1A1F2E"/>
+                </a:solidFill>
+              </a:rPr>
+              <a:t>de-optimises SOTA algorithms into their functional predecessors — and records every</a:t>
+            </a:r>
+          </a:p>
+          <a:p>
+            <a:r>
+              <a:rPr sz="1050">
+                <a:solidFill>
+                  <a:srgbClr val="1A1F2E"/>
+                </a:solidFill>
+              </a:rPr>
+              <a:t>architectural decision along the way.</a:t>
+            </a:r>
+          </a:p>
+          <a:p>
+            <a:r>
+              <a:rPr sz="1050">
+                <a:solidFill>
+                  <a:srgbClr val="1A1F2E"/>
+                </a:solidFill>
+              </a:rPr>
+              <a:t>CI/CD validation ensures every generated predecessor is compilable and runnable.</a:t>
+            </a:r>
+          </a:p>
+          <a:p>
+            <a:r>
+              <a:rPr sz="1050">
+                <a:solidFill>
+                  <a:srgbClr val="1A1F2E"/>
+                </a:solidFill>
+              </a:rPr>
+              <a:t>The result: a self-growing, high-fidelity dataset of the evolutionary history of algorithms —</a:t>
+            </a:r>
+          </a:p>
+          <a:p>
+            <a:r>
+              <a:rPr sz="1050">
+                <a:solidFill>
+                  <a:srgbClr val="1A1F2E"/>
+                </a:solidFill>
+              </a:rPr>
+              <a:t>produced at scale, without human labelling.</a:t>
+            </a:r>
+          </a:p>
+          <a:p>
+            <a:r>
+              <a:rPr sz="1050">
+                <a:solidFill>
+                  <a:srgbClr val="1A1F2E"/>
+                </a:solidFill>
+              </a:rPr>
+              <a:t>D_Perf trains the Probabilistic Heuristic Filter — an in-silico triage that screens</a:t>
+            </a:r>
+          </a:p>
+          <a:p>
+            <a:r>
+              <a:rPr sz="1050">
+                <a:solidFill>
+                  <a:srgbClr val="1A1F2E"/>
+                </a:solidFill>
+              </a:rPr>
+              <a:t>out OOM-risk candidates before expensive GPU runs. Crucially, failed candidates</a:t>
+            </a:r>
+          </a:p>
+          <a:p>
+            <a:r>
+              <a:rPr sz="1050">
+                <a:solidFill>
+                  <a:srgbClr val="1A1F2E"/>
+                </a:solidFill>
+              </a:rPr>
+              <a:t>continuously enrich the negative training set, making the filter progressively sharper.</a:t>
             </a:r>
           </a:p>
         </p:txBody>
@@ -5516,14 +6070,6 @@
 <file path=ppt/slides/slide6.xml><?xml version="1.0" encoding="utf-8"?>
 <p:sld xmlns:a="http://schemas.openxmlformats.org/drawingml/2006/main" xmlns:p="http://schemas.openxmlformats.org/presentationml/2006/main" xmlns:r="http://schemas.openxmlformats.org/officeDocument/2006/relationships">
   <p:cSld>
-    <p:bg>
-      <p:bgPr>
-        <a:solidFill>
-          <a:srgbClr val="0D1B2A"/>
-        </a:solidFill>
-        <a:effectLst/>
-      </p:bgPr>
-    </p:bg>
     <p:spTree>
       <p:nvGrpSpPr>
         <p:cNvPr id="1" name=""/>
@@ -5540,13 +6086,13 @@
         <p:spPr>
           <a:xfrm>
             <a:off x="0" y="0"/>
-            <a:ext cx="12188952" cy="73152"/>
+            <a:ext cx="9144000" cy="5143500"/>
           </a:xfrm>
           <a:prstGeom prst="rect">
             <a:avLst/>
           </a:prstGeom>
           <a:solidFill>
-            <a:srgbClr val="00B4D8"/>
+            <a:srgbClr val="FFFFFF"/>
           </a:solidFill>
           <a:ln>
             <a:noFill/>
@@ -5576,14 +6122,100 @@
       </p:sp>
       <p:sp>
         <p:nvSpPr>
-          <p:cNvPr id="3" name="TextBox 2"/>
+          <p:cNvPr id="3" name="Rectangle 2"/>
+          <p:cNvSpPr/>
+          <p:nvPr/>
+        </p:nvSpPr>
+        <p:spPr>
+          <a:xfrm>
+            <a:off x="0" y="0"/>
+            <a:ext cx="9144000" cy="1131570"/>
+          </a:xfrm>
+          <a:prstGeom prst="rect">
+            <a:avLst/>
+          </a:prstGeom>
+          <a:solidFill>
+            <a:srgbClr val="0D1117"/>
+          </a:solidFill>
+          <a:ln>
+            <a:noFill/>
+          </a:ln>
+        </p:spPr>
+        <p:style>
+          <a:lnRef idx="1">
+            <a:schemeClr val="accent1"/>
+          </a:lnRef>
+          <a:fillRef idx="3">
+            <a:schemeClr val="accent1"/>
+          </a:fillRef>
+          <a:effectRef idx="2">
+            <a:schemeClr val="accent1"/>
+          </a:effectRef>
+          <a:fontRef idx="minor">
+            <a:schemeClr val="lt1"/>
+          </a:fontRef>
+        </p:style>
+        <p:txBody>
+          <a:bodyPr rtlCol="0" anchor="ctr"/>
+          <a:lstStyle/>
+          <a:p>
+            <a:pPr algn="ctr"/>
+          </a:p>
+        </p:txBody>
+      </p:sp>
+      <p:sp>
+        <p:nvSpPr>
+          <p:cNvPr id="4" name="Rectangle 3"/>
+          <p:cNvSpPr/>
+          <p:nvPr/>
+        </p:nvSpPr>
+        <p:spPr>
+          <a:xfrm>
+            <a:off x="0" y="1131570"/>
+            <a:ext cx="9144000" cy="41148"/>
+          </a:xfrm>
+          <a:prstGeom prst="rect">
+            <a:avLst/>
+          </a:prstGeom>
+          <a:solidFill>
+            <a:srgbClr val="3B6BFF"/>
+          </a:solidFill>
+          <a:ln>
+            <a:noFill/>
+          </a:ln>
+        </p:spPr>
+        <p:style>
+          <a:lnRef idx="1">
+            <a:schemeClr val="accent1"/>
+          </a:lnRef>
+          <a:fillRef idx="3">
+            <a:schemeClr val="accent1"/>
+          </a:fillRef>
+          <a:effectRef idx="2">
+            <a:schemeClr val="accent1"/>
+          </a:effectRef>
+          <a:fontRef idx="minor">
+            <a:schemeClr val="lt1"/>
+          </a:fontRef>
+        </p:style>
+        <p:txBody>
+          <a:bodyPr rtlCol="0" anchor="ctr"/>
+          <a:lstStyle/>
+          <a:p>
+            <a:pPr algn="ctr"/>
+          </a:p>
+        </p:txBody>
+      </p:sp>
+      <p:sp>
+        <p:nvSpPr>
+          <p:cNvPr id="5" name="TextBox 4"/>
           <p:cNvSpPr txBox="1"/>
           <p:nvPr/>
         </p:nvSpPr>
         <p:spPr>
           <a:xfrm>
-            <a:off x="274320" y="109728"/>
-            <a:ext cx="11612880" cy="457200"/>
+            <a:off x="274320" y="51435"/>
+            <a:ext cx="4572000" cy="411480"/>
           </a:xfrm>
           <a:prstGeom prst="rect">
             <a:avLst/>
@@ -5596,28 +6228,27 @@
           </a:bodyPr>
           <a:lstStyle/>
           <a:p>
-            <a:pPr algn="l"/>
-            <a:r>
-              <a:rPr sz="900" b="0">
-                <a:solidFill>
-                  <a:srgbClr val="00B4D8"/>
-                </a:solidFill>
-              </a:rPr>
-              <a:t>SLIDE 6 — THE OPEN-LOOP ARCHITECTURE (FIGURE 2)</a:t>
-            </a:r>
-          </a:p>
-        </p:txBody>
-      </p:sp>
-      <p:sp>
-        <p:nvSpPr>
-          <p:cNvPr id="4" name="TextBox 3"/>
+            <a:r>
+              <a:rPr sz="800" b="0" i="0">
+                <a:solidFill>
+                  <a:srgbClr val="3B6BFF"/>
+                </a:solidFill>
+              </a:rPr>
+              <a:t>ETFT · AutoScientist</a:t>
+            </a:r>
+          </a:p>
+        </p:txBody>
+      </p:sp>
+      <p:sp>
+        <p:nvSpPr>
+          <p:cNvPr id="6" name="TextBox 5"/>
           <p:cNvSpPr txBox="1"/>
           <p:nvPr/>
         </p:nvSpPr>
         <p:spPr>
           <a:xfrm>
-            <a:off x="274320" y="502920"/>
-            <a:ext cx="11612880" cy="777240"/>
+            <a:off x="6858000" y="51435"/>
+            <a:ext cx="2011680" cy="411480"/>
           </a:xfrm>
           <a:prstGeom prst="rect">
             <a:avLst/>
@@ -5630,28 +6261,28 @@
           </a:bodyPr>
           <a:lstStyle/>
           <a:p>
-            <a:pPr algn="l"/>
-            <a:r>
-              <a:rPr sz="2600" b="1">
-                <a:solidFill>
-                  <a:srgbClr val="FFFFFF"/>
-                </a:solidFill>
-              </a:rPr>
-              <a:t>A continuously self-improving R&amp;D pipeline — running 24/7.</a:t>
-            </a:r>
-          </a:p>
-        </p:txBody>
-      </p:sp>
-      <p:sp>
-        <p:nvSpPr>
-          <p:cNvPr id="5" name="TextBox 4"/>
+            <a:pPr algn="r"/>
+            <a:r>
+              <a:rPr sz="800" b="0" i="0">
+                <a:solidFill>
+                  <a:srgbClr val="8A94A6"/>
+                </a:solidFill>
+              </a:rPr>
+              <a:t>05 / 10</a:t>
+            </a:r>
+          </a:p>
+        </p:txBody>
+      </p:sp>
+      <p:sp>
+        <p:nvSpPr>
+          <p:cNvPr id="7" name="TextBox 6"/>
           <p:cNvSpPr txBox="1"/>
           <p:nvPr/>
         </p:nvSpPr>
         <p:spPr>
           <a:xfrm>
-            <a:off x="274320" y="1325880"/>
-            <a:ext cx="11612880" cy="4526279"/>
+            <a:off x="274320" y="308609"/>
+            <a:ext cx="8595359" cy="771525"/>
           </a:xfrm>
           <a:prstGeom prst="rect">
             <a:avLst/>
@@ -5664,421 +6295,27 @@
           </a:bodyPr>
           <a:lstStyle/>
           <a:p>
-            <a:pPr algn="l"/>
-            <a:r>
-              <a:rPr sz="1300">
+            <a:r>
+              <a:rPr sz="1600" b="1" i="0">
                 <a:solidFill>
                   <a:srgbClr val="FFFFFF"/>
                 </a:solidFill>
               </a:rPr>
-              <a:t>Empirical Ecosystem diagram with highlighted feedback loops.</a:t>
-            </a:r>
-          </a:p>
-          <a:p>
-            <a:pPr algn="l">
-              <a:spcAft>
-                <a:spcPts val="400"/>
-              </a:spcAft>
-            </a:pPr>
-            <a:r>
-              <a:rPr sz="1300">
-                <a:solidFill>
-                  <a:srgbClr val="FFFFFF"/>
-                </a:solidFill>
-              </a:rPr>
-              <a:t/>
-            </a:r>
-          </a:p>
-          <a:p>
-            <a:pPr algn="l"/>
-          </a:p>
-          <a:p>
-            <a:pPr algn="l"/>
-            <a:r>
-              <a:rPr sz="1300">
-                <a:solidFill>
-                  <a:srgbClr val="FFFFFF"/>
-                </a:solidFill>
-              </a:rPr>
-              <a:t>Current SOTA (aₙ)</a:t>
-            </a:r>
-          </a:p>
-          <a:p>
-            <a:pPr algn="l"/>
-            <a:r>
-              <a:rPr sz="1300">
-                <a:solidFill>
-                  <a:srgbClr val="FFFFFF"/>
-                </a:solidFill>
-              </a:rPr>
-              <a:t>│</a:t>
-            </a:r>
-          </a:p>
-          <a:p>
-            <a:pPr algn="l"/>
-            <a:r>
-              <a:rPr sz="1300">
-                <a:solidFill>
-                  <a:srgbClr val="FFFFFF"/>
-                </a:solidFill>
-              </a:rPr>
-              <a:t>Retrospective 80/20 Delta Analysis</a:t>
-            </a:r>
-          </a:p>
-          <a:p>
-            <a:pPr algn="l"/>
-            <a:r>
-              <a:rPr sz="1300">
-                <a:solidFill>
-                  <a:srgbClr val="FFFFFF"/>
-                </a:solidFill>
-              </a:rPr>
-              <a:t>│</a:t>
-            </a:r>
-          </a:p>
-          <a:p>
-            <a:pPr algn="l"/>
-            <a:r>
-              <a:rPr sz="1300">
-                <a:solidFill>
-                  <a:srgbClr val="FFFFFF"/>
-                </a:solidFill>
-              </a:rPr>
-              <a:t>Formulate Research Questions</a:t>
-            </a:r>
-          </a:p>
-          <a:p>
-            <a:pPr algn="l"/>
-            <a:r>
-              <a:rPr sz="1300">
-                <a:solidFill>
-                  <a:srgbClr val="FFFFFF"/>
-                </a:solidFill>
-              </a:rPr>
-              <a:t>├──────────────────────────────┐</a:t>
-            </a:r>
-          </a:p>
-          <a:p>
-            <a:pPr algn="l"/>
-            <a:r>
-              <a:rPr sz="1300">
-                <a:solidFill>
-                  <a:srgbClr val="FFFFFF"/>
-                </a:solidFill>
-              </a:rPr>
-              <a:t>Literature Agents               Empirical Agents</a:t>
-            </a:r>
-          </a:p>
-          <a:p>
-            <a:pPr algn="l"/>
-            <a:r>
-              <a:rPr sz="1300">
-                <a:solidFill>
-                  <a:srgbClr val="FFFFFF"/>
-                </a:solidFill>
-              </a:rPr>
-              <a:t>(Agentic RAG)                   (Micro-Experiments)</a:t>
-            </a:r>
-          </a:p>
-          <a:p>
-            <a:pPr algn="l"/>
-            <a:r>
-              <a:rPr sz="1300">
-                <a:solidFill>
-                  <a:srgbClr val="FFFFFF"/>
-                </a:solidFill>
-              </a:rPr>
-              <a:t>Papers/Data ───────────────► Empirical Metrics</a:t>
-            </a:r>
-          </a:p>
-          <a:p>
-            <a:pPr algn="l"/>
-            <a:r>
-              <a:rPr sz="1300">
-                <a:solidFill>
-                  <a:srgbClr val="FFFFFF"/>
-                </a:solidFill>
-              </a:rPr>
-              <a:t>└──────────────────────────────┘</a:t>
-            </a:r>
-          </a:p>
-          <a:p>
-            <a:pPr algn="l"/>
-            <a:r>
-              <a:rPr sz="1300">
-                <a:solidFill>
-                  <a:srgbClr val="FFFFFF"/>
-                </a:solidFill>
-              </a:rPr>
-              <a:t>│</a:t>
-            </a:r>
-          </a:p>
-          <a:p>
-            <a:pPr algn="l"/>
-            <a:r>
-              <a:rPr sz="1300">
-                <a:solidFill>
-                  <a:srgbClr val="FFFFFF"/>
-                </a:solidFill>
-              </a:rPr>
-              <a:t>Augmented SOTA+1 Synthesis</a:t>
-            </a:r>
-          </a:p>
-          <a:p>
-            <a:pPr algn="l"/>
-            <a:r>
-              <a:rPr sz="1300">
-                <a:solidFill>
-                  <a:srgbClr val="FFFFFF"/>
-                </a:solidFill>
-              </a:rPr>
-              <a:t>│</a:t>
-            </a:r>
-          </a:p>
-          <a:p>
-            <a:pPr algn="l"/>
-            <a:r>
-              <a:rPr sz="1300">
-                <a:solidFill>
-                  <a:srgbClr val="FFFFFF"/>
-                </a:solidFill>
-              </a:rPr>
-              <a:t>Probabilistic Filter (D_Perf Triage)</a:t>
-            </a:r>
-          </a:p>
-          <a:p>
-            <a:pPr algn="l"/>
-            <a:r>
-              <a:rPr sz="1300">
-                <a:solidFill>
-                  <a:srgbClr val="FFFFFF"/>
-                </a:solidFill>
-              </a:rPr>
-              <a:t>├── Pass (Viable) → Physical GPU Deployment ✓</a:t>
-            </a:r>
-          </a:p>
-          <a:p>
-            <a:pPr algn="l"/>
-            <a:r>
-              <a:rPr sz="1300">
-                <a:solidFill>
-                  <a:srgbClr val="FFFFFF"/>
-                </a:solidFill>
-              </a:rPr>
-              <a:t>└── Fail (High-Value Error)</a:t>
-            </a:r>
-          </a:p>
-          <a:p>
-            <a:pPr algn="l"/>
-            <a:r>
-              <a:rPr sz="1300">
-                <a:solidFill>
-                  <a:srgbClr val="FFFFFF"/>
-                </a:solidFill>
-              </a:rPr>
-              <a:t>│</a:t>
-            </a:r>
-          </a:p>
-          <a:p>
-            <a:pPr algn="l"/>
-            <a:r>
-              <a:rPr sz="1300">
-                <a:solidFill>
-                  <a:srgbClr val="FFFFFF"/>
-                </a:solidFill>
-              </a:rPr>
-              <a:t>Organic Negative Data</a:t>
-            </a:r>
-          </a:p>
-          <a:p>
-            <a:pPr algn="l"/>
-            <a:r>
-              <a:rPr sz="1300">
-                <a:solidFill>
-                  <a:srgbClr val="FFFFFF"/>
-                </a:solidFill>
-              </a:rPr>
-              <a:t>└── In-Context RL Feedback → back to Empirical Agents</a:t>
-            </a:r>
-          </a:p>
-          <a:p>
-            <a:pPr algn="l"/>
-          </a:p>
-          <a:p>
-            <a:pPr algn="l">
-              <a:spcAft>
-                <a:spcPts val="400"/>
-              </a:spcAft>
-            </a:pPr>
-            <a:r>
-              <a:rPr sz="1300">
-                <a:solidFill>
-                  <a:srgbClr val="FFFFFF"/>
-                </a:solidFill>
-              </a:rPr>
-              <a:t/>
-            </a:r>
-          </a:p>
-          <a:p>
-            <a:pPr algn="l">
-              <a:spcAft>
-                <a:spcPts val="400"/>
-              </a:spcAft>
-            </a:pPr>
-            <a:r>
-              <a:rPr sz="1300">
-                <a:solidFill>
-                  <a:srgbClr val="FFFFFF"/>
-                </a:solidFill>
-              </a:rPr>
-              <a:t/>
-            </a:r>
-          </a:p>
-          <a:p>
-            <a:pPr algn="l"/>
-            <a:r>
-              <a:rPr sz="1300">
-                <a:solidFill>
-                  <a:srgbClr val="FFFFFF"/>
-                </a:solidFill>
-              </a:rPr>
-              <a:t>Once the 80/20 bottleneck is identified, two autonomous agent classes deploy in parallel:</a:t>
-            </a:r>
-          </a:p>
-          <a:p>
-            <a:pPr algn="l">
-              <a:spcAft>
-                <a:spcPts val="400"/>
-              </a:spcAft>
-            </a:pPr>
-            <a:r>
-              <a:rPr sz="1300">
-                <a:solidFill>
-                  <a:srgbClr val="FFFFFF"/>
-                </a:solidFill>
-              </a:rPr>
-              <a:t/>
-            </a:r>
-          </a:p>
-          <a:p>
-            <a:pPr algn="l"/>
-            <a:r>
-              <a:rPr sz="1300">
-                <a:solidFill>
-                  <a:srgbClr val="FFFFFF"/>
-                </a:solidFill>
-              </a:rPr>
-              <a:t>1. Literature Agents (Agentic RAG): Scour arXiv and technical databases in real time —</a:t>
-            </a:r>
-          </a:p>
-          <a:p>
-            <a:pPr algn="l"/>
-            <a:r>
-              <a:rPr sz="1300">
-                <a:solidFill>
-                  <a:srgbClr val="FFFFFF"/>
-                </a:solidFill>
-              </a:rPr>
-              <a:t>retrieving knowledge published *after* the model's training cutoff. Parametric blindspot</a:t>
-            </a:r>
-          </a:p>
-          <a:p>
-            <a:pPr algn="l"/>
-            <a:r>
-              <a:rPr sz="1300">
-                <a:solidFill>
-                  <a:srgbClr val="FFFFFF"/>
-                </a:solidFill>
-              </a:rPr>
-              <a:t>eliminated.</a:t>
-            </a:r>
-          </a:p>
-          <a:p>
-            <a:pPr algn="l">
-              <a:spcAft>
-                <a:spcPts val="400"/>
-              </a:spcAft>
-            </a:pPr>
-            <a:r>
-              <a:rPr sz="1300">
-                <a:solidFill>
-                  <a:srgbClr val="FFFFFF"/>
-                </a:solidFill>
-              </a:rPr>
-              <a:t/>
-            </a:r>
-          </a:p>
-          <a:p>
-            <a:pPr algn="l"/>
-            <a:r>
-              <a:rPr sz="1300">
-                <a:solidFill>
-                  <a:srgbClr val="FFFFFF"/>
-                </a:solidFill>
-              </a:rPr>
-              <a:t>2. Empirical Agents: Execute micro-experiments. Physical metrics flow back as RL reward</a:t>
-            </a:r>
-          </a:p>
-          <a:p>
-            <a:pPr algn="l"/>
-            <a:r>
-              <a:rPr sz="1300">
-                <a:solidFill>
-                  <a:srgbClr val="FFFFFF"/>
-                </a:solidFill>
-              </a:rPr>
-              <a:t>signals. Failed experiments are *not discarded* — they become the highest-quality</a:t>
-            </a:r>
-          </a:p>
-          <a:p>
-            <a:pPr algn="l"/>
-            <a:r>
-              <a:rPr sz="1300">
-                <a:solidFill>
-                  <a:srgbClr val="FFFFFF"/>
-                </a:solidFill>
-              </a:rPr>
-              <a:t>negative training examples the system can produce.</a:t>
-            </a:r>
-          </a:p>
-          <a:p>
-            <a:pPr algn="l">
-              <a:spcAft>
-                <a:spcPts val="400"/>
-              </a:spcAft>
-            </a:pPr>
-            <a:r>
-              <a:rPr sz="1300">
-                <a:solidFill>
-                  <a:srgbClr val="FFFFFF"/>
-                </a:solidFill>
-              </a:rPr>
-              <a:t/>
-            </a:r>
-          </a:p>
-          <a:p>
-            <a:pPr algn="l"/>
-            <a:r>
-              <a:rPr sz="1300">
-                <a:solidFill>
-                  <a:srgbClr val="FFFFFF"/>
-                </a:solidFill>
-              </a:rPr>
-              <a:t>The loop is self-hardening. Every failure makes the next hypothesis smarter.</a:t>
-            </a:r>
-          </a:p>
-        </p:txBody>
-      </p:sp>
-      <p:sp>
-        <p:nvSpPr>
-          <p:cNvPr id="6" name="TextBox 5"/>
+              <a:t>Pareto Delta Analysis: Finding the 20%</a:t>
+            </a:r>
+          </a:p>
+        </p:txBody>
+      </p:sp>
+      <p:sp>
+        <p:nvSpPr>
+          <p:cNvPr id="8" name="TextBox 7"/>
           <p:cNvSpPr txBox="1"/>
           <p:nvPr/>
         </p:nvSpPr>
         <p:spPr>
           <a:xfrm>
-            <a:off x="274320" y="6263640"/>
-            <a:ext cx="11612880" cy="274320"/>
+            <a:off x="274320" y="1440180"/>
+            <a:ext cx="8595359" cy="3394710"/>
           </a:xfrm>
           <a:prstGeom prst="rect">
             <a:avLst/>
@@ -6091,14 +6328,133 @@
           </a:bodyPr>
           <a:lstStyle/>
           <a:p>
-            <a:pPr algn="ctr"/>
-            <a:r>
-              <a:rPr sz="700" b="0">
-                <a:solidFill>
-                  <a:srgbClr val="CCD6E0"/>
-                </a:solidFill>
-              </a:rPr>
-              <a:t>ETFT (AutoScientist) · Lukas Benda · lukas.benda@boldpivot.cz · Confidential</a:t>
+            <a:r>
+              <a:rPr sz="1050">
+                <a:solidFill>
+                  <a:srgbClr val="1A1F2E"/>
+                </a:solidFill>
+              </a:rPr>
+              <a:t>Headline: Not all code is created equal. ETFT finds the 20% that drives 80% of progress.</a:t>
+            </a:r>
+          </a:p>
+          <a:p>
+            <a:r>
+              <a:rPr sz="1050">
+                <a:solidFill>
+                  <a:srgbClr val="1A1F2E"/>
+                </a:solidFill>
+              </a:rPr>
+              <a:t>Key visual: Pareto bar chart — horizontal: architectural components (attention head,</a:t>
+            </a:r>
+          </a:p>
+          <a:p>
+            <a:r>
+              <a:rPr sz="1050">
+                <a:solidFill>
+                  <a:srgbClr val="1A1F2E"/>
+                </a:solidFill>
+              </a:rPr>
+              <a:t>normalization layer, activation function, quantization scheme…); vertical: contribution to</a:t>
+            </a:r>
+          </a:p>
+          <a:p>
+            <a:r>
+              <a:rPr sz="1050">
+                <a:solidFill>
+                  <a:srgbClr val="1A1F2E"/>
+                </a:solidFill>
+              </a:rPr>
+              <a:t>performance delta (aₙ₋₁ → aₙ). 80/20 cut-off line drawn.</a:t>
+            </a:r>
+          </a:p>
+          <a:p>
+            <a:r>
+              <a:rPr sz="1050">
+                <a:solidFill>
+                  <a:srgbClr val="1A1F2E"/>
+                </a:solidFill>
+              </a:rPr>
+              <a:t>Body copy:</a:t>
+            </a:r>
+          </a:p>
+          <a:p>
+            <a:r>
+              <a:rPr sz="1050">
+                <a:solidFill>
+                  <a:srgbClr val="1A1F2E"/>
+                </a:solidFill>
+              </a:rPr>
+              <a:t>Rather than real-time computational profiling (expensive, error-prone), ETFT performs</a:t>
+            </a:r>
+          </a:p>
+          <a:p>
+            <a:r>
+              <a:rPr sz="1050">
+                <a:solidFill>
+                  <a:srgbClr val="1A1F2E"/>
+                </a:solidFill>
+              </a:rPr>
+              <a:t>a deterministic retrospective analysis of historical deltas.</a:t>
+            </a:r>
+          </a:p>
+          <a:p>
+            <a:r>
+              <a:rPr sz="1050">
+                <a:solidFill>
+                  <a:srgbClr val="1A1F2E"/>
+                </a:solidFill>
+              </a:rPr>
+              <a:t>By comparing aₙ₋₁ vs aₙ across the entire evolutionary history, the system quantifies:</a:t>
+            </a:r>
+          </a:p>
+          <a:p>
+            <a:r>
+              <a:rPr sz="1050">
+                <a:solidFill>
+                  <a:srgbClr val="1A1F2E"/>
+                </a:solidFill>
+              </a:rPr>
+              <a:t>  •  Which sub-components were modified in winning transitions?</a:t>
+            </a:r>
+          </a:p>
+          <a:p>
+            <a:r>
+              <a:rPr sz="1050">
+                <a:solidFill>
+                  <a:srgbClr val="1A1F2E"/>
+                </a:solidFill>
+              </a:rPr>
+              <a:t>  •  What magnitude of change drove the largest performance jumps?</a:t>
+            </a:r>
+          </a:p>
+          <a:p>
+            <a:r>
+              <a:rPr sz="1050">
+                <a:solidFill>
+                  <a:srgbClr val="1A1F2E"/>
+                </a:solidFill>
+              </a:rPr>
+              <a:t>The model learns to recognise the structural signatures of high-yield innovation —</a:t>
+            </a:r>
+          </a:p>
+          <a:p>
+            <a:r>
+              <a:rPr sz="1050">
+                <a:solidFill>
+                  <a:srgbClr val="1A1F2E"/>
+                </a:solidFill>
+              </a:rPr>
+              <a:t>then projects that learned 80/20 lens onto the forward trajectory aₙ → aₙ₊₁.</a:t>
+            </a:r>
+          </a:p>
+          <a:p>
+            <a:r>
+              <a:rPr sz="1050">
+                <a:solidFill>
+                  <a:srgbClr val="1A1F2E"/>
+                </a:solidFill>
+              </a:rPr>
+              <a:t>This is not heuristic. It is a deterministic, data-driven bottleneck oracle.</a:t>
             </a:r>
           </a:p>
         </p:txBody>
@@ -6114,14 +6470,6 @@
 <file path=ppt/slides/slide7.xml><?xml version="1.0" encoding="utf-8"?>
 <p:sld xmlns:a="http://schemas.openxmlformats.org/drawingml/2006/main" xmlns:p="http://schemas.openxmlformats.org/presentationml/2006/main" xmlns:r="http://schemas.openxmlformats.org/officeDocument/2006/relationships">
   <p:cSld>
-    <p:bg>
-      <p:bgPr>
-        <a:solidFill>
-          <a:srgbClr val="0D1B2A"/>
-        </a:solidFill>
-        <a:effectLst/>
-      </p:bgPr>
-    </p:bg>
     <p:spTree>
       <p:nvGrpSpPr>
         <p:cNvPr id="1" name=""/>
@@ -6138,13 +6486,13 @@
         <p:spPr>
           <a:xfrm>
             <a:off x="0" y="0"/>
-            <a:ext cx="12188952" cy="73152"/>
+            <a:ext cx="9144000" cy="5143500"/>
           </a:xfrm>
           <a:prstGeom prst="rect">
             <a:avLst/>
           </a:prstGeom>
           <a:solidFill>
-            <a:srgbClr val="00B4D8"/>
+            <a:srgbClr val="FFFFFF"/>
           </a:solidFill>
           <a:ln>
             <a:noFill/>
@@ -6174,14 +6522,100 @@
       </p:sp>
       <p:sp>
         <p:nvSpPr>
-          <p:cNvPr id="3" name="TextBox 2"/>
+          <p:cNvPr id="3" name="Rectangle 2"/>
+          <p:cNvSpPr/>
+          <p:nvPr/>
+        </p:nvSpPr>
+        <p:spPr>
+          <a:xfrm>
+            <a:off x="0" y="0"/>
+            <a:ext cx="9144000" cy="1131570"/>
+          </a:xfrm>
+          <a:prstGeom prst="rect">
+            <a:avLst/>
+          </a:prstGeom>
+          <a:solidFill>
+            <a:srgbClr val="0D1117"/>
+          </a:solidFill>
+          <a:ln>
+            <a:noFill/>
+          </a:ln>
+        </p:spPr>
+        <p:style>
+          <a:lnRef idx="1">
+            <a:schemeClr val="accent1"/>
+          </a:lnRef>
+          <a:fillRef idx="3">
+            <a:schemeClr val="accent1"/>
+          </a:fillRef>
+          <a:effectRef idx="2">
+            <a:schemeClr val="accent1"/>
+          </a:effectRef>
+          <a:fontRef idx="minor">
+            <a:schemeClr val="lt1"/>
+          </a:fontRef>
+        </p:style>
+        <p:txBody>
+          <a:bodyPr rtlCol="0" anchor="ctr"/>
+          <a:lstStyle/>
+          <a:p>
+            <a:pPr algn="ctr"/>
+          </a:p>
+        </p:txBody>
+      </p:sp>
+      <p:sp>
+        <p:nvSpPr>
+          <p:cNvPr id="4" name="Rectangle 3"/>
+          <p:cNvSpPr/>
+          <p:nvPr/>
+        </p:nvSpPr>
+        <p:spPr>
+          <a:xfrm>
+            <a:off x="0" y="1131570"/>
+            <a:ext cx="9144000" cy="41148"/>
+          </a:xfrm>
+          <a:prstGeom prst="rect">
+            <a:avLst/>
+          </a:prstGeom>
+          <a:solidFill>
+            <a:srgbClr val="3B6BFF"/>
+          </a:solidFill>
+          <a:ln>
+            <a:noFill/>
+          </a:ln>
+        </p:spPr>
+        <p:style>
+          <a:lnRef idx="1">
+            <a:schemeClr val="accent1"/>
+          </a:lnRef>
+          <a:fillRef idx="3">
+            <a:schemeClr val="accent1"/>
+          </a:fillRef>
+          <a:effectRef idx="2">
+            <a:schemeClr val="accent1"/>
+          </a:effectRef>
+          <a:fontRef idx="minor">
+            <a:schemeClr val="lt1"/>
+          </a:fontRef>
+        </p:style>
+        <p:txBody>
+          <a:bodyPr rtlCol="0" anchor="ctr"/>
+          <a:lstStyle/>
+          <a:p>
+            <a:pPr algn="ctr"/>
+          </a:p>
+        </p:txBody>
+      </p:sp>
+      <p:sp>
+        <p:nvSpPr>
+          <p:cNvPr id="5" name="TextBox 4"/>
           <p:cNvSpPr txBox="1"/>
           <p:nvPr/>
         </p:nvSpPr>
         <p:spPr>
           <a:xfrm>
-            <a:off x="274320" y="109728"/>
-            <a:ext cx="11612880" cy="457200"/>
+            <a:off x="274320" y="51435"/>
+            <a:ext cx="4572000" cy="411480"/>
           </a:xfrm>
           <a:prstGeom prst="rect">
             <a:avLst/>
@@ -6194,28 +6628,27 @@
           </a:bodyPr>
           <a:lstStyle/>
           <a:p>
-            <a:pPr algn="l"/>
-            <a:r>
-              <a:rPr sz="900" b="0">
-                <a:solidFill>
-                  <a:srgbClr val="00B4D8"/>
-                </a:solidFill>
-              </a:rPr>
-              <a:t>SLIDE 7 — COMPETITIVE LANDSCAPE</a:t>
-            </a:r>
-          </a:p>
-        </p:txBody>
-      </p:sp>
-      <p:sp>
-        <p:nvSpPr>
-          <p:cNvPr id="4" name="TextBox 3"/>
+            <a:r>
+              <a:rPr sz="800" b="0" i="0">
+                <a:solidFill>
+                  <a:srgbClr val="3B6BFF"/>
+                </a:solidFill>
+              </a:rPr>
+              <a:t>ETFT · AutoScientist</a:t>
+            </a:r>
+          </a:p>
+        </p:txBody>
+      </p:sp>
+      <p:sp>
+        <p:nvSpPr>
+          <p:cNvPr id="6" name="TextBox 5"/>
           <p:cNvSpPr txBox="1"/>
           <p:nvPr/>
         </p:nvSpPr>
         <p:spPr>
           <a:xfrm>
-            <a:off x="274320" y="502920"/>
-            <a:ext cx="11612880" cy="777240"/>
+            <a:off x="6858000" y="51435"/>
+            <a:ext cx="2011680" cy="411480"/>
           </a:xfrm>
           <a:prstGeom prst="rect">
             <a:avLst/>
@@ -6228,28 +6661,28 @@
           </a:bodyPr>
           <a:lstStyle/>
           <a:p>
-            <a:pPr algn="l"/>
-            <a:r>
-              <a:rPr sz="2600" b="1">
-                <a:solidFill>
-                  <a:srgbClr val="FFFFFF"/>
-                </a:solidFill>
-              </a:rPr>
-              <a:t>ETFT vs. the field — a structural difference, not a feature difference.</a:t>
-            </a:r>
-          </a:p>
-        </p:txBody>
-      </p:sp>
-      <p:sp>
-        <p:nvSpPr>
-          <p:cNvPr id="5" name="TextBox 4"/>
+            <a:pPr algn="r"/>
+            <a:r>
+              <a:rPr sz="800" b="0" i="0">
+                <a:solidFill>
+                  <a:srgbClr val="8A94A6"/>
+                </a:solidFill>
+              </a:rPr>
+              <a:t>06 / 10</a:t>
+            </a:r>
+          </a:p>
+        </p:txBody>
+      </p:sp>
+      <p:sp>
+        <p:nvSpPr>
+          <p:cNvPr id="7" name="TextBox 6"/>
           <p:cNvSpPr txBox="1"/>
           <p:nvPr/>
         </p:nvSpPr>
         <p:spPr>
           <a:xfrm>
-            <a:off x="274320" y="1325880"/>
-            <a:ext cx="11612880" cy="4526279"/>
+            <a:off x="274320" y="308609"/>
+            <a:ext cx="8595359" cy="771525"/>
           </a:xfrm>
           <a:prstGeom prst="rect">
             <a:avLst/>
@@ -6262,182 +6695,27 @@
           </a:bodyPr>
           <a:lstStyle/>
           <a:p>
-            <a:pPr algn="l"/>
-            <a:r>
-              <a:rPr sz="1100">
-                <a:solidFill>
-                  <a:srgbClr val="CCD6E0"/>
-                </a:solidFill>
-              </a:rPr>
-              <a:t>Capability  |  Sakana AI  |  AutoScience (DeepMind)  |  ETFT (AutoScientist)</a:t>
-            </a:r>
-          </a:p>
-          <a:p>
-            <a:pPr algn="l"/>
-          </a:p>
-          <a:p>
-            <a:pPr algn="l"/>
-            <a:r>
-              <a:rPr sz="1100">
-                <a:solidFill>
-                  <a:srgbClr val="CCD6E0"/>
-                </a:solidFill>
-              </a:rPr>
-              <a:t>Autonomous hypothesis generation  |  ✓  |  ✓  |  ✓</a:t>
-            </a:r>
-          </a:p>
-          <a:p>
-            <a:pPr algn="l"/>
-            <a:r>
-              <a:rPr sz="1100">
-                <a:solidFill>
-                  <a:srgbClr val="CCD6E0"/>
-                </a:solidFill>
-              </a:rPr>
-              <a:t>Knowledge cutoff bypass (live RAG)  |  ✗  |  Partial  |  ✓ Structural</a:t>
-            </a:r>
-          </a:p>
-          <a:p>
-            <a:pPr algn="l"/>
-            <a:r>
-              <a:rPr sz="1100">
-                <a:solidFill>
-                  <a:srgbClr val="CCD6E0"/>
-                </a:solidFill>
-              </a:rPr>
-              <a:t>Recursive negative data flywheel  |  ✗  |  ✗  |  ✓ Native</a:t>
-            </a:r>
-          </a:p>
-          <a:p>
-            <a:pPr algn="l"/>
-            <a:r>
-              <a:rPr sz="1100">
-                <a:solidFill>
-                  <a:srgbClr val="CCD6E0"/>
-                </a:solidFill>
-              </a:rPr>
-              <a:t>Probabilistic OOM triage (D_Perf)  |  ✗  |  ✗  |  ✓</a:t>
-            </a:r>
-          </a:p>
-          <a:p>
-            <a:pPr algn="l"/>
-            <a:r>
-              <a:rPr sz="1100">
-                <a:solidFill>
-                  <a:srgbClr val="CCD6E0"/>
-                </a:solidFill>
-              </a:rPr>
-              <a:t>Domain-agnostic (beyond DL code)  |  ✗  |  ✗  |  ✓ By design</a:t>
-            </a:r>
-          </a:p>
-          <a:p>
-            <a:pPr algn="l"/>
-            <a:r>
-              <a:rPr sz="1100">
-                <a:solidFill>
-                  <a:srgbClr val="CCD6E0"/>
-                </a:solidFill>
-              </a:rPr>
-              <a:t>GPU-Poor validated PoC  |  ✗  |  ✗  |  ✓ (April 2026)</a:t>
-            </a:r>
-          </a:p>
-          <a:p>
-            <a:pPr algn="l"/>
-            <a:r>
-              <a:rPr sz="1100">
-                <a:solidFill>
-                  <a:srgbClr val="CCD6E0"/>
-                </a:solidFill>
-              </a:rPr>
-              <a:t>Proven Pareto bottleneck oracle  |  ✗  |  ✗  |  ✓</a:t>
-            </a:r>
-          </a:p>
-          <a:p>
-            <a:pPr algn="l">
-              <a:spcAft>
-                <a:spcPts val="400"/>
-              </a:spcAft>
-            </a:pPr>
-            <a:r>
-              <a:rPr sz="1300">
+            <a:r>
+              <a:rPr sz="1600" b="1" i="0">
                 <a:solidFill>
                   <a:srgbClr val="FFFFFF"/>
                 </a:solidFill>
               </a:rPr>
-              <a:t/>
-            </a:r>
-          </a:p>
-          <a:p>
-            <a:pPr algn="l"/>
-            <a:r>
-              <a:rPr sz="1300">
-                <a:solidFill>
-                  <a:srgbClr val="FFFFFF"/>
-                </a:solidFill>
-              </a:rPr>
-              <a:t>Key differentiator:</a:t>
-            </a:r>
-          </a:p>
-          <a:p>
-            <a:pPr algn="l">
-              <a:spcAft>
-                <a:spcPts val="400"/>
-              </a:spcAft>
-            </a:pPr>
-            <a:r>
-              <a:rPr sz="1300">
-                <a:solidFill>
-                  <a:srgbClr val="FFFFFF"/>
-                </a:solidFill>
-              </a:rPr>
-              <a:t/>
-            </a:r>
-          </a:p>
-          <a:p>
-            <a:pPr algn="l"/>
-            <a:r>
-              <a:rPr sz="1300">
-                <a:solidFill>
-                  <a:srgbClr val="FFFFFF"/>
-                </a:solidFill>
-              </a:rPr>
-              <a:t>Sakana AI and AutoScience automate *search in hypothesis space*. ETFT automates the</a:t>
-            </a:r>
-          </a:p>
-          <a:p>
-            <a:pPr algn="l"/>
-            <a:r>
-              <a:rPr sz="1300">
-                <a:solidFill>
-                  <a:srgbClr val="FFFFFF"/>
-                </a:solidFill>
-              </a:rPr>
-              <a:t>learning of how to search — a second-order advantage that compounds with every</a:t>
-            </a:r>
-          </a:p>
-          <a:p>
-            <a:pPr algn="l"/>
-            <a:r>
-              <a:rPr sz="1300">
-                <a:solidFill>
-                  <a:srgbClr val="FFFFFF"/>
-                </a:solidFill>
-              </a:rPr>
-              <a:t>experiment run.</a:t>
-            </a:r>
-          </a:p>
-        </p:txBody>
-      </p:sp>
-      <p:sp>
-        <p:nvSpPr>
-          <p:cNvPr id="6" name="TextBox 5"/>
+              <a:t>The Open-Loop Architecture (Figure 2)</a:t>
+            </a:r>
+          </a:p>
+        </p:txBody>
+      </p:sp>
+      <p:sp>
+        <p:nvSpPr>
+          <p:cNvPr id="8" name="TextBox 7"/>
           <p:cNvSpPr txBox="1"/>
           <p:nvPr/>
         </p:nvSpPr>
         <p:spPr>
           <a:xfrm>
-            <a:off x="274320" y="6263640"/>
-            <a:ext cx="11612880" cy="274320"/>
+            <a:off x="274320" y="1440180"/>
+            <a:ext cx="8595359" cy="3394710"/>
           </a:xfrm>
           <a:prstGeom prst="rect">
             <a:avLst/>
@@ -6450,14 +6728,346 @@
           </a:bodyPr>
           <a:lstStyle/>
           <a:p>
-            <a:pPr algn="ctr"/>
-            <a:r>
-              <a:rPr sz="700" b="0">
-                <a:solidFill>
-                  <a:srgbClr val="CCD6E0"/>
-                </a:solidFill>
-              </a:rPr>
-              <a:t>ETFT (AutoScientist) · Lukas Benda · lukas.benda@boldpivot.cz · Confidential</a:t>
+            <a:r>
+              <a:rPr sz="1050">
+                <a:solidFill>
+                  <a:srgbClr val="1A1F2E"/>
+                </a:solidFill>
+              </a:rPr>
+              <a:t>Headline: A continuously self-improving R&amp;D pipeline — running 24/7.</a:t>
+            </a:r>
+          </a:p>
+          <a:p>
+            <a:r>
+              <a:rPr sz="1050">
+                <a:solidFill>
+                  <a:srgbClr val="1A1F2E"/>
+                </a:solidFill>
+              </a:rPr>
+              <a:t>Key visual: Reproduction of Figure 2 from ETFT whitepaper — the full Open-Loop</a:t>
+            </a:r>
+          </a:p>
+          <a:p>
+            <a:r>
+              <a:rPr sz="1050">
+                <a:solidFill>
+                  <a:srgbClr val="1A1F2E"/>
+                </a:solidFill>
+              </a:rPr>
+              <a:t>Empirical Ecosystem diagram with highlighted feedback loops.</a:t>
+            </a:r>
+          </a:p>
+          <a:p>
+            <a:r>
+              <a:rPr sz="1050">
+                <a:solidFill>
+                  <a:srgbClr val="1A1F2E"/>
+                </a:solidFill>
+              </a:rPr>
+              <a:t>`</a:t>
+            </a:r>
+          </a:p>
+          <a:p>
+            <a:r>
+              <a:rPr sz="1050">
+                <a:solidFill>
+                  <a:srgbClr val="1A1F2E"/>
+                </a:solidFill>
+              </a:rPr>
+              <a:t>Current SOTA (aₙ)</a:t>
+            </a:r>
+          </a:p>
+          <a:p>
+            <a:r>
+              <a:rPr sz="800">
+                <a:solidFill>
+                  <a:srgbClr val="C9D1D9"/>
+                </a:solidFill>
+                <a:latin typeface="Courier New"/>
+              </a:rPr>
+              <a:t>│</a:t>
+            </a:r>
+          </a:p>
+          <a:p>
+            <a:r>
+              <a:rPr sz="1050">
+                <a:solidFill>
+                  <a:srgbClr val="1A1F2E"/>
+                </a:solidFill>
+              </a:rPr>
+              <a:t>Retrospective 80/20 Delta Analysis</a:t>
+            </a:r>
+          </a:p>
+          <a:p>
+            <a:r>
+              <a:rPr sz="800">
+                <a:solidFill>
+                  <a:srgbClr val="C9D1D9"/>
+                </a:solidFill>
+                <a:latin typeface="Courier New"/>
+              </a:rPr>
+              <a:t>│</a:t>
+            </a:r>
+          </a:p>
+          <a:p>
+            <a:r>
+              <a:rPr sz="1050">
+                <a:solidFill>
+                  <a:srgbClr val="1A1F2E"/>
+                </a:solidFill>
+              </a:rPr>
+              <a:t>Formulate Research Questions</a:t>
+            </a:r>
+          </a:p>
+          <a:p>
+            <a:r>
+              <a:rPr sz="800">
+                <a:solidFill>
+                  <a:srgbClr val="C9D1D9"/>
+                </a:solidFill>
+                <a:latin typeface="Courier New"/>
+              </a:rPr>
+              <a:t>├──────────────────────────────┐</a:t>
+            </a:r>
+          </a:p>
+          <a:p>
+            <a:r>
+              <a:rPr sz="1050">
+                <a:solidFill>
+                  <a:srgbClr val="1A1F2E"/>
+                </a:solidFill>
+              </a:rPr>
+              <a:t>Literature Agents               Empirical Agents</a:t>
+            </a:r>
+          </a:p>
+          <a:p>
+            <a:r>
+              <a:rPr sz="1050">
+                <a:solidFill>
+                  <a:srgbClr val="1A1F2E"/>
+                </a:solidFill>
+              </a:rPr>
+              <a:t>(Agentic RAG)                   (Micro-Experiments)</a:t>
+            </a:r>
+          </a:p>
+          <a:p>
+            <a:r>
+              <a:rPr sz="1050">
+                <a:solidFill>
+                  <a:srgbClr val="1A1F2E"/>
+                </a:solidFill>
+              </a:rPr>
+              <a:t>Papers/Data ───────────────► Empirical Metrics</a:t>
+            </a:r>
+          </a:p>
+          <a:p>
+            <a:r>
+              <a:rPr sz="800">
+                <a:solidFill>
+                  <a:srgbClr val="C9D1D9"/>
+                </a:solidFill>
+                <a:latin typeface="Courier New"/>
+              </a:rPr>
+              <a:t>└──────────────────────────────┘</a:t>
+            </a:r>
+          </a:p>
+          <a:p>
+            <a:r>
+              <a:rPr sz="800">
+                <a:solidFill>
+                  <a:srgbClr val="C9D1D9"/>
+                </a:solidFill>
+                <a:latin typeface="Courier New"/>
+              </a:rPr>
+              <a:t>│</a:t>
+            </a:r>
+          </a:p>
+          <a:p>
+            <a:r>
+              <a:rPr sz="800">
+                <a:solidFill>
+                  <a:srgbClr val="C9D1D9"/>
+                </a:solidFill>
+                <a:latin typeface="Courier New"/>
+              </a:rPr>
+              <a:t>Augmented SOTA+1 Synthesis</a:t>
+            </a:r>
+          </a:p>
+          <a:p>
+            <a:r>
+              <a:rPr sz="800">
+                <a:solidFill>
+                  <a:srgbClr val="C9D1D9"/>
+                </a:solidFill>
+                <a:latin typeface="Courier New"/>
+              </a:rPr>
+              <a:t>│</a:t>
+            </a:r>
+          </a:p>
+          <a:p>
+            <a:r>
+              <a:rPr sz="800">
+                <a:solidFill>
+                  <a:srgbClr val="C9D1D9"/>
+                </a:solidFill>
+                <a:latin typeface="Courier New"/>
+              </a:rPr>
+              <a:t>Probabilistic Filter (D_Perf Triage)</a:t>
+            </a:r>
+          </a:p>
+          <a:p>
+            <a:r>
+              <a:rPr sz="800">
+                <a:solidFill>
+                  <a:srgbClr val="C9D1D9"/>
+                </a:solidFill>
+                <a:latin typeface="Courier New"/>
+              </a:rPr>
+              <a:t>├── Pass (Viable) → Physical GPU Deployment ✓</a:t>
+            </a:r>
+          </a:p>
+          <a:p>
+            <a:r>
+              <a:rPr sz="800">
+                <a:solidFill>
+                  <a:srgbClr val="C9D1D9"/>
+                </a:solidFill>
+                <a:latin typeface="Courier New"/>
+              </a:rPr>
+              <a:t>└── Fail (High-Value Error)</a:t>
+            </a:r>
+          </a:p>
+          <a:p>
+            <a:r>
+              <a:rPr sz="800">
+                <a:solidFill>
+                  <a:srgbClr val="C9D1D9"/>
+                </a:solidFill>
+                <a:latin typeface="Courier New"/>
+              </a:rPr>
+              <a:t>│</a:t>
+            </a:r>
+          </a:p>
+          <a:p>
+            <a:r>
+              <a:rPr sz="800">
+                <a:solidFill>
+                  <a:srgbClr val="C9D1D9"/>
+                </a:solidFill>
+                <a:latin typeface="Courier New"/>
+              </a:rPr>
+              <a:t>Organic Negative Data</a:t>
+            </a:r>
+          </a:p>
+          <a:p>
+            <a:r>
+              <a:rPr sz="800">
+                <a:solidFill>
+                  <a:srgbClr val="C9D1D9"/>
+                </a:solidFill>
+                <a:latin typeface="Courier New"/>
+              </a:rPr>
+              <a:t>└── In-Context RL Feedback → back to Empirical Agents</a:t>
+            </a:r>
+          </a:p>
+          <a:p>
+            <a:r>
+              <a:rPr sz="1050">
+                <a:solidFill>
+                  <a:srgbClr val="1A1F2E"/>
+                </a:solidFill>
+              </a:rPr>
+              <a:t>`</a:t>
+            </a:r>
+          </a:p>
+          <a:p>
+            <a:r>
+              <a:rPr sz="1050">
+                <a:solidFill>
+                  <a:srgbClr val="1A1F2E"/>
+                </a:solidFill>
+              </a:rPr>
+              <a:t>Body copy:</a:t>
+            </a:r>
+          </a:p>
+          <a:p>
+            <a:r>
+              <a:rPr sz="1050">
+                <a:solidFill>
+                  <a:srgbClr val="1A1F2E"/>
+                </a:solidFill>
+              </a:rPr>
+              <a:t>Once the 80/20 bottleneck is identified, two autonomous agent classes deploy in parallel:</a:t>
+            </a:r>
+          </a:p>
+          <a:p>
+            <a:r>
+              <a:rPr sz="1050">
+                <a:solidFill>
+                  <a:srgbClr val="1A1F2E"/>
+                </a:solidFill>
+              </a:rPr>
+              <a:t>1. Literature Agents (Agentic RAG): Scour arXiv and technical databases in real time —</a:t>
+            </a:r>
+          </a:p>
+          <a:p>
+            <a:r>
+              <a:rPr sz="1050">
+                <a:solidFill>
+                  <a:srgbClr val="1A1F2E"/>
+                </a:solidFill>
+              </a:rPr>
+              <a:t>retrieving knowledge published after the model's training cutoff. Parametric blindspot</a:t>
+            </a:r>
+          </a:p>
+          <a:p>
+            <a:r>
+              <a:rPr sz="1050">
+                <a:solidFill>
+                  <a:srgbClr val="1A1F2E"/>
+                </a:solidFill>
+              </a:rPr>
+              <a:t>eliminated.</a:t>
+            </a:r>
+          </a:p>
+          <a:p>
+            <a:r>
+              <a:rPr sz="1050">
+                <a:solidFill>
+                  <a:srgbClr val="1A1F2E"/>
+                </a:solidFill>
+              </a:rPr>
+              <a:t>2. Empirical Agents: Execute micro-experiments. Physical metrics flow back as RL reward</a:t>
+            </a:r>
+          </a:p>
+          <a:p>
+            <a:r>
+              <a:rPr sz="1050">
+                <a:solidFill>
+                  <a:srgbClr val="1A1F2E"/>
+                </a:solidFill>
+              </a:rPr>
+              <a:t>signals. Failed experiments are not discarded — they become the highest-quality</a:t>
+            </a:r>
+          </a:p>
+          <a:p>
+            <a:r>
+              <a:rPr sz="1050">
+                <a:solidFill>
+                  <a:srgbClr val="1A1F2E"/>
+                </a:solidFill>
+              </a:rPr>
+              <a:t>negative training examples the system can produce.</a:t>
+            </a:r>
+          </a:p>
+          <a:p>
+            <a:r>
+              <a:rPr sz="1050">
+                <a:solidFill>
+                  <a:srgbClr val="1A1F2E"/>
+                </a:solidFill>
+              </a:rPr>
+              <a:t>The loop is self-hardening. Every failure makes the next hypothesis smarter.</a:t>
             </a:r>
           </a:p>
         </p:txBody>
@@ -6473,14 +7083,6 @@
 <file path=ppt/slides/slide8.xml><?xml version="1.0" encoding="utf-8"?>
 <p:sld xmlns:a="http://schemas.openxmlformats.org/drawingml/2006/main" xmlns:p="http://schemas.openxmlformats.org/presentationml/2006/main" xmlns:r="http://schemas.openxmlformats.org/officeDocument/2006/relationships">
   <p:cSld>
-    <p:bg>
-      <p:bgPr>
-        <a:solidFill>
-          <a:srgbClr val="0D1B2A"/>
-        </a:solidFill>
-        <a:effectLst/>
-      </p:bgPr>
-    </p:bg>
     <p:spTree>
       <p:nvGrpSpPr>
         <p:cNvPr id="1" name=""/>
@@ -6497,13 +7099,13 @@
         <p:spPr>
           <a:xfrm>
             <a:off x="0" y="0"/>
-            <a:ext cx="12188952" cy="73152"/>
+            <a:ext cx="9144000" cy="5143500"/>
           </a:xfrm>
           <a:prstGeom prst="rect">
             <a:avLst/>
           </a:prstGeom>
           <a:solidFill>
-            <a:srgbClr val="00B4D8"/>
+            <a:srgbClr val="FFFFFF"/>
           </a:solidFill>
           <a:ln>
             <a:noFill/>
@@ -6533,14 +7135,100 @@
       </p:sp>
       <p:sp>
         <p:nvSpPr>
-          <p:cNvPr id="3" name="TextBox 2"/>
+          <p:cNvPr id="3" name="Rectangle 2"/>
+          <p:cNvSpPr/>
+          <p:nvPr/>
+        </p:nvSpPr>
+        <p:spPr>
+          <a:xfrm>
+            <a:off x="0" y="0"/>
+            <a:ext cx="9144000" cy="1131570"/>
+          </a:xfrm>
+          <a:prstGeom prst="rect">
+            <a:avLst/>
+          </a:prstGeom>
+          <a:solidFill>
+            <a:srgbClr val="0D1117"/>
+          </a:solidFill>
+          <a:ln>
+            <a:noFill/>
+          </a:ln>
+        </p:spPr>
+        <p:style>
+          <a:lnRef idx="1">
+            <a:schemeClr val="accent1"/>
+          </a:lnRef>
+          <a:fillRef idx="3">
+            <a:schemeClr val="accent1"/>
+          </a:fillRef>
+          <a:effectRef idx="2">
+            <a:schemeClr val="accent1"/>
+          </a:effectRef>
+          <a:fontRef idx="minor">
+            <a:schemeClr val="lt1"/>
+          </a:fontRef>
+        </p:style>
+        <p:txBody>
+          <a:bodyPr rtlCol="0" anchor="ctr"/>
+          <a:lstStyle/>
+          <a:p>
+            <a:pPr algn="ctr"/>
+          </a:p>
+        </p:txBody>
+      </p:sp>
+      <p:sp>
+        <p:nvSpPr>
+          <p:cNvPr id="4" name="Rectangle 3"/>
+          <p:cNvSpPr/>
+          <p:nvPr/>
+        </p:nvSpPr>
+        <p:spPr>
+          <a:xfrm>
+            <a:off x="0" y="1131570"/>
+            <a:ext cx="9144000" cy="41148"/>
+          </a:xfrm>
+          <a:prstGeom prst="rect">
+            <a:avLst/>
+          </a:prstGeom>
+          <a:solidFill>
+            <a:srgbClr val="3B6BFF"/>
+          </a:solidFill>
+          <a:ln>
+            <a:noFill/>
+          </a:ln>
+        </p:spPr>
+        <p:style>
+          <a:lnRef idx="1">
+            <a:schemeClr val="accent1"/>
+          </a:lnRef>
+          <a:fillRef idx="3">
+            <a:schemeClr val="accent1"/>
+          </a:fillRef>
+          <a:effectRef idx="2">
+            <a:schemeClr val="accent1"/>
+          </a:effectRef>
+          <a:fontRef idx="minor">
+            <a:schemeClr val="lt1"/>
+          </a:fontRef>
+        </p:style>
+        <p:txBody>
+          <a:bodyPr rtlCol="0" anchor="ctr"/>
+          <a:lstStyle/>
+          <a:p>
+            <a:pPr algn="ctr"/>
+          </a:p>
+        </p:txBody>
+      </p:sp>
+      <p:sp>
+        <p:nvSpPr>
+          <p:cNvPr id="5" name="TextBox 4"/>
           <p:cNvSpPr txBox="1"/>
           <p:nvPr/>
         </p:nvSpPr>
         <p:spPr>
           <a:xfrm>
-            <a:off x="274320" y="109728"/>
-            <a:ext cx="11612880" cy="457200"/>
+            <a:off x="274320" y="51435"/>
+            <a:ext cx="4572000" cy="411480"/>
           </a:xfrm>
           <a:prstGeom prst="rect">
             <a:avLst/>
@@ -6553,28 +7241,27 @@
           </a:bodyPr>
           <a:lstStyle/>
           <a:p>
-            <a:pPr algn="l"/>
-            <a:r>
-              <a:rPr sz="900" b="0">
-                <a:solidFill>
-                  <a:srgbClr val="00B4D8"/>
-                </a:solidFill>
-              </a:rPr>
-              <a:t>SLIDE 8 — GPU-POOR POC: PROOF IT WORKS NOW</a:t>
-            </a:r>
-          </a:p>
-        </p:txBody>
-      </p:sp>
-      <p:sp>
-        <p:nvSpPr>
-          <p:cNvPr id="4" name="TextBox 3"/>
+            <a:r>
+              <a:rPr sz="800" b="0" i="0">
+                <a:solidFill>
+                  <a:srgbClr val="3B6BFF"/>
+                </a:solidFill>
+              </a:rPr>
+              <a:t>ETFT · AutoScientist</a:t>
+            </a:r>
+          </a:p>
+        </p:txBody>
+      </p:sp>
+      <p:sp>
+        <p:nvSpPr>
+          <p:cNvPr id="6" name="TextBox 5"/>
           <p:cNvSpPr txBox="1"/>
           <p:nvPr/>
         </p:nvSpPr>
         <p:spPr>
           <a:xfrm>
-            <a:off x="274320" y="502920"/>
-            <a:ext cx="11612880" cy="777240"/>
+            <a:off x="6858000" y="51435"/>
+            <a:ext cx="2011680" cy="411480"/>
           </a:xfrm>
           <a:prstGeom prst="rect">
             <a:avLst/>
@@ -6587,28 +7274,28 @@
           </a:bodyPr>
           <a:lstStyle/>
           <a:p>
-            <a:pPr algn="l"/>
-            <a:r>
-              <a:rPr sz="2600" b="1">
-                <a:solidFill>
-                  <a:srgbClr val="FFFFFF"/>
-                </a:solidFill>
-              </a:rPr>
-              <a:t>SOTA+1 in TinyML — autonomously discovered in minutes, on a $1,500 GPU.</a:t>
-            </a:r>
-          </a:p>
-        </p:txBody>
-      </p:sp>
-      <p:sp>
-        <p:nvSpPr>
-          <p:cNvPr id="5" name="TextBox 4"/>
+            <a:pPr algn="r"/>
+            <a:r>
+              <a:rPr sz="800" b="0" i="0">
+                <a:solidFill>
+                  <a:srgbClr val="8A94A6"/>
+                </a:solidFill>
+              </a:rPr>
+              <a:t>07 / 10</a:t>
+            </a:r>
+          </a:p>
+        </p:txBody>
+      </p:sp>
+      <p:sp>
+        <p:nvSpPr>
+          <p:cNvPr id="7" name="TextBox 6"/>
           <p:cNvSpPr txBox="1"/>
           <p:nvPr/>
         </p:nvSpPr>
         <p:spPr>
           <a:xfrm>
-            <a:off x="274320" y="1325880"/>
-            <a:ext cx="11612880" cy="4526279"/>
+            <a:off x="274320" y="308609"/>
+            <a:ext cx="8595359" cy="771525"/>
           </a:xfrm>
           <a:prstGeom prst="rect">
             <a:avLst/>
@@ -6621,212 +7308,27 @@
           </a:bodyPr>
           <a:lstStyle/>
           <a:p>
-            <a:pPr algn="l"/>
-            <a:r>
-              <a:rPr sz="1100">
-                <a:solidFill>
-                  <a:srgbClr val="CCD6E0"/>
-                </a:solidFill>
-              </a:rPr>
-              <a:t>Metric  |  Human-designed SOTA (a₃)  |  ETFT SOTA+1 (a₄)</a:t>
-            </a:r>
-          </a:p>
-          <a:p>
-            <a:pPr algn="l"/>
-          </a:p>
-          <a:p>
-            <a:pPr algn="l"/>
-            <a:r>
-              <a:rPr sz="1100">
-                <a:solidFill>
-                  <a:srgbClr val="CCD6E0"/>
-                </a:solidFill>
-              </a:rPr>
-              <a:t>Accuracy  |  93.0%  |  94.2%</a:t>
-            </a:r>
-          </a:p>
-          <a:p>
-            <a:pPr algn="l"/>
-            <a:r>
-              <a:rPr sz="1100">
-                <a:solidFill>
-                  <a:srgbClr val="CCD6E0"/>
-                </a:solidFill>
-              </a:rPr>
-              <a:t>Peak RAM  |  18 KB  |  11 KB</a:t>
-            </a:r>
-          </a:p>
-          <a:p>
-            <a:pPr algn="l"/>
-            <a:r>
-              <a:rPr sz="1100">
-                <a:solidFill>
-                  <a:srgbClr val="CCD6E0"/>
-                </a:solidFill>
-              </a:rPr>
-              <a:t>Discovery method  |  Human researcher, months  |  Autonomous agent, minutes</a:t>
-            </a:r>
-          </a:p>
-          <a:p>
-            <a:pPr algn="l"/>
-            <a:r>
-              <a:rPr sz="1100">
-                <a:solidFill>
-                  <a:srgbClr val="CCD6E0"/>
-                </a:solidFill>
-              </a:rPr>
-              <a:t>Compute required  |  H100 cluster  |  Consumer RTX 4090</a:t>
-            </a:r>
-          </a:p>
-          <a:p>
-            <a:pPr algn="l">
-              <a:spcAft>
-                <a:spcPts val="400"/>
-              </a:spcAft>
-            </a:pPr>
-            <a:r>
-              <a:rPr sz="1300">
+            <a:r>
+              <a:rPr sz="1600" b="1" i="0">
                 <a:solidFill>
                   <a:srgbClr val="FFFFFF"/>
                 </a:solidFill>
               </a:rPr>
-              <a:t/>
-            </a:r>
-          </a:p>
-          <a:p>
-            <a:pPr algn="l">
-              <a:spcAft>
-                <a:spcPts val="400"/>
-              </a:spcAft>
-            </a:pPr>
-            <a:r>
-              <a:rPr sz="1300">
-                <a:solidFill>
-                  <a:srgbClr val="FFFFFF"/>
-                </a:solidFill>
-              </a:rPr>
-              <a:t/>
-            </a:r>
-          </a:p>
-          <a:p>
-            <a:pPr algn="l"/>
-            <a:r>
-              <a:rPr sz="1300">
-                <a:solidFill>
-                  <a:srgbClr val="FFFFFF"/>
-                </a:solidFill>
-              </a:rPr>
-              <a:t>The "GPU-Poor" PoC deliberately avoids large-scale compute to prove the *cognitive</a:t>
-            </a:r>
-          </a:p>
-          <a:p>
-            <a:pPr algn="l"/>
-            <a:r>
-              <a:rPr sz="1300">
-                <a:solidFill>
-                  <a:srgbClr val="FFFFFF"/>
-                </a:solidFill>
-              </a:rPr>
-              <a:t>architecture* works independently of hardware:</a:t>
-            </a:r>
-          </a:p>
-          <a:p>
-            <a:pPr algn="l">
-              <a:spcAft>
-                <a:spcPts val="400"/>
-              </a:spcAft>
-            </a:pPr>
-            <a:r>
-              <a:rPr sz="1300">
-                <a:solidFill>
-                  <a:srgbClr val="FFFFFF"/>
-                </a:solidFill>
-              </a:rPr>
-              <a:t/>
-            </a:r>
-          </a:p>
-          <a:p>
-            <a:pPr algn="l" lvl="1"/>
-            <a:r>
-              <a:rPr sz="1200">
-                <a:solidFill>
-                  <a:srgbClr val="CCD6E0"/>
-                </a:solidFill>
-              </a:rPr>
-              <a:t>• Evolutionary trajectory (MLP → MobileNetV2) injected into context</a:t>
-            </a:r>
-          </a:p>
-          <a:p>
-            <a:pPr algn="l" lvl="1"/>
-            <a:r>
-              <a:rPr sz="1200">
-                <a:solidFill>
-                  <a:srgbClr val="CCD6E0"/>
-                </a:solidFill>
-              </a:rPr>
-              <a:t>• Agent issued Pareto analysis, literature retrieval, and synthesis directives</a:t>
-            </a:r>
-          </a:p>
-          <a:p>
-            <a:pPr algn="l" lvl="1"/>
-            <a:r>
-              <a:rPr sz="1200">
-                <a:solidFill>
-                  <a:srgbClr val="CCD6E0"/>
-                </a:solidFill>
-              </a:rPr>
-              <a:t>• By iteration 3 the agent stabilised a 1D State Space Model (Mamba-style)</a:t>
-            </a:r>
-          </a:p>
-          <a:p>
-            <a:pPr algn="l"/>
-            <a:r>
-              <a:rPr sz="1300">
-                <a:solidFill>
-                  <a:srgbClr val="FFFFFF"/>
-                </a:solidFill>
-              </a:rPr>
-              <a:t>discovered from post-cutoff literature — surpassing every human-designed baseline</a:t>
-            </a:r>
-          </a:p>
-          <a:p>
-            <a:pPr algn="l">
-              <a:spcAft>
-                <a:spcPts val="400"/>
-              </a:spcAft>
-            </a:pPr>
-            <a:r>
-              <a:rPr sz="1300">
-                <a:solidFill>
-                  <a:srgbClr val="FFFFFF"/>
-                </a:solidFill>
-              </a:rPr>
-              <a:t/>
-            </a:r>
-          </a:p>
-          <a:p>
-            <a:pPr algn="l"/>
-            <a:r>
-              <a:rPr sz="1300">
-                <a:solidFill>
-                  <a:srgbClr val="FFFFFF"/>
-                </a:solidFill>
-              </a:rPr>
-              <a:t>The PoC is reproducible on a free Google Colab instance.</a:t>
-            </a:r>
-          </a:p>
-        </p:txBody>
-      </p:sp>
-      <p:sp>
-        <p:nvSpPr>
-          <p:cNvPr id="6" name="TextBox 5"/>
+              <a:t>Competitive Landscape</a:t>
+            </a:r>
+          </a:p>
+        </p:txBody>
+      </p:sp>
+      <p:sp>
+        <p:nvSpPr>
+          <p:cNvPr id="8" name="TextBox 7"/>
           <p:cNvSpPr txBox="1"/>
           <p:nvPr/>
         </p:nvSpPr>
         <p:spPr>
           <a:xfrm>
-            <a:off x="274320" y="6263640"/>
-            <a:ext cx="11612880" cy="274320"/>
+            <a:off x="274320" y="1440180"/>
+            <a:ext cx="8595359" cy="3394710"/>
           </a:xfrm>
           <a:prstGeom prst="rect">
             <a:avLst/>
@@ -6839,14 +7341,133 @@
           </a:bodyPr>
           <a:lstStyle/>
           <a:p>
-            <a:pPr algn="ctr"/>
-            <a:r>
-              <a:rPr sz="700" b="0">
-                <a:solidFill>
-                  <a:srgbClr val="CCD6E0"/>
-                </a:solidFill>
-              </a:rPr>
-              <a:t>ETFT (AutoScientist) · Lukas Benda · lukas.benda@boldpivot.cz · Confidential</a:t>
+            <a:r>
+              <a:rPr sz="1050">
+                <a:solidFill>
+                  <a:srgbClr val="1A1F2E"/>
+                </a:solidFill>
+              </a:rPr>
+              <a:t>Headline: ETFT vs. the field — a structural difference, not a feature difference.</a:t>
+            </a:r>
+          </a:p>
+          <a:p>
+            <a:r>
+              <a:rPr sz="900">
+                <a:solidFill>
+                  <a:srgbClr val="2D3748"/>
+                </a:solidFill>
+              </a:rPr>
+              <a:t>Capability  ·  Sakana AI  ·  AutoScience (DeepMind)  ·  ETFT (AutoScientist)</a:t>
+            </a:r>
+          </a:p>
+          <a:p>
+            <a:r>
+              <a:rPr sz="900">
+                <a:solidFill>
+                  <a:srgbClr val="2D3748"/>
+                </a:solidFill>
+              </a:rPr>
+              <a:t>Autonomous hypothesis generation  ·  ✓  ·  ✓  ·  ✓</a:t>
+            </a:r>
+          </a:p>
+          <a:p>
+            <a:r>
+              <a:rPr sz="900">
+                <a:solidFill>
+                  <a:srgbClr val="2D3748"/>
+                </a:solidFill>
+              </a:rPr>
+              <a:t>Knowledge cutoff bypass (live RAG)  ·  ✗  ·  Partial  ·  ✓ Structural</a:t>
+            </a:r>
+          </a:p>
+          <a:p>
+            <a:r>
+              <a:rPr sz="900">
+                <a:solidFill>
+                  <a:srgbClr val="2D3748"/>
+                </a:solidFill>
+              </a:rPr>
+              <a:t>Recursive negative data flywheel  ·  ✗  ·  ✗  ·  ✓ Native</a:t>
+            </a:r>
+          </a:p>
+          <a:p>
+            <a:r>
+              <a:rPr sz="900">
+                <a:solidFill>
+                  <a:srgbClr val="2D3748"/>
+                </a:solidFill>
+              </a:rPr>
+              <a:t>Probabilistic OOM triage (D_Perf)  ·  ✗  ·  ✗  ·  ✓</a:t>
+            </a:r>
+          </a:p>
+          <a:p>
+            <a:r>
+              <a:rPr sz="900">
+                <a:solidFill>
+                  <a:srgbClr val="2D3748"/>
+                </a:solidFill>
+              </a:rPr>
+              <a:t>Domain-agnostic (beyond DL code)  ·  ✗  ·  ✗  ·  ✓ By design</a:t>
+            </a:r>
+          </a:p>
+          <a:p>
+            <a:r>
+              <a:rPr sz="900">
+                <a:solidFill>
+                  <a:srgbClr val="2D3748"/>
+                </a:solidFill>
+              </a:rPr>
+              <a:t>GPU-Poor validated PoC  ·  ✗  ·  ✗  ·  ✓ (April 2026)</a:t>
+            </a:r>
+          </a:p>
+          <a:p>
+            <a:r>
+              <a:rPr sz="900">
+                <a:solidFill>
+                  <a:srgbClr val="2D3748"/>
+                </a:solidFill>
+              </a:rPr>
+              <a:t>Proven Pareto bottleneck oracle  ·  ✗  ·  ✗  ·  ✓</a:t>
+            </a:r>
+          </a:p>
+          <a:p>
+            <a:r>
+              <a:rPr sz="1050">
+                <a:solidFill>
+                  <a:srgbClr val="1A1F2E"/>
+                </a:solidFill>
+              </a:rPr>
+              <a:t>Key differentiator:</a:t>
+            </a:r>
+          </a:p>
+          <a:p>
+            <a:r>
+              <a:rPr sz="1050">
+                <a:solidFill>
+                  <a:srgbClr val="1A1F2E"/>
+                </a:solidFill>
+              </a:rPr>
+              <a:t>Sakana AI and AutoScience automate search in hypothesis space. ETFT automates the</a:t>
+            </a:r>
+          </a:p>
+          <a:p>
+            <a:r>
+              <a:rPr sz="1050">
+                <a:solidFill>
+                  <a:srgbClr val="1A1F2E"/>
+                </a:solidFill>
+              </a:rPr>
+              <a:t>learning of how to search — a second-order advantage that compounds with every</a:t>
+            </a:r>
+          </a:p>
+          <a:p>
+            <a:r>
+              <a:rPr sz="1050">
+                <a:solidFill>
+                  <a:srgbClr val="1A1F2E"/>
+                </a:solidFill>
+              </a:rPr>
+              <a:t>experiment run.</a:t>
             </a:r>
           </a:p>
         </p:txBody>
@@ -6862,14 +7483,6 @@
 <file path=ppt/slides/slide9.xml><?xml version="1.0" encoding="utf-8"?>
 <p:sld xmlns:a="http://schemas.openxmlformats.org/drawingml/2006/main" xmlns:p="http://schemas.openxmlformats.org/presentationml/2006/main" xmlns:r="http://schemas.openxmlformats.org/officeDocument/2006/relationships">
   <p:cSld>
-    <p:bg>
-      <p:bgPr>
-        <a:solidFill>
-          <a:srgbClr val="0D1B2A"/>
-        </a:solidFill>
-        <a:effectLst/>
-      </p:bgPr>
-    </p:bg>
     <p:spTree>
       <p:nvGrpSpPr>
         <p:cNvPr id="1" name=""/>
@@ -6886,13 +7499,13 @@
         <p:spPr>
           <a:xfrm>
             <a:off x="0" y="0"/>
-            <a:ext cx="12188952" cy="73152"/>
+            <a:ext cx="9144000" cy="5143500"/>
           </a:xfrm>
           <a:prstGeom prst="rect">
             <a:avLst/>
           </a:prstGeom>
           <a:solidFill>
-            <a:srgbClr val="00B4D8"/>
+            <a:srgbClr val="FFFFFF"/>
           </a:solidFill>
           <a:ln>
             <a:noFill/>
@@ -6922,14 +7535,100 @@
       </p:sp>
       <p:sp>
         <p:nvSpPr>
-          <p:cNvPr id="3" name="TextBox 2"/>
+          <p:cNvPr id="3" name="Rectangle 2"/>
+          <p:cNvSpPr/>
+          <p:nvPr/>
+        </p:nvSpPr>
+        <p:spPr>
+          <a:xfrm>
+            <a:off x="0" y="0"/>
+            <a:ext cx="9144000" cy="1131570"/>
+          </a:xfrm>
+          <a:prstGeom prst="rect">
+            <a:avLst/>
+          </a:prstGeom>
+          <a:solidFill>
+            <a:srgbClr val="0D1117"/>
+          </a:solidFill>
+          <a:ln>
+            <a:noFill/>
+          </a:ln>
+        </p:spPr>
+        <p:style>
+          <a:lnRef idx="1">
+            <a:schemeClr val="accent1"/>
+          </a:lnRef>
+          <a:fillRef idx="3">
+            <a:schemeClr val="accent1"/>
+          </a:fillRef>
+          <a:effectRef idx="2">
+            <a:schemeClr val="accent1"/>
+          </a:effectRef>
+          <a:fontRef idx="minor">
+            <a:schemeClr val="lt1"/>
+          </a:fontRef>
+        </p:style>
+        <p:txBody>
+          <a:bodyPr rtlCol="0" anchor="ctr"/>
+          <a:lstStyle/>
+          <a:p>
+            <a:pPr algn="ctr"/>
+          </a:p>
+        </p:txBody>
+      </p:sp>
+      <p:sp>
+        <p:nvSpPr>
+          <p:cNvPr id="4" name="Rectangle 3"/>
+          <p:cNvSpPr/>
+          <p:nvPr/>
+        </p:nvSpPr>
+        <p:spPr>
+          <a:xfrm>
+            <a:off x="0" y="1131570"/>
+            <a:ext cx="9144000" cy="41148"/>
+          </a:xfrm>
+          <a:prstGeom prst="rect">
+            <a:avLst/>
+          </a:prstGeom>
+          <a:solidFill>
+            <a:srgbClr val="3B6BFF"/>
+          </a:solidFill>
+          <a:ln>
+            <a:noFill/>
+          </a:ln>
+        </p:spPr>
+        <p:style>
+          <a:lnRef idx="1">
+            <a:schemeClr val="accent1"/>
+          </a:lnRef>
+          <a:fillRef idx="3">
+            <a:schemeClr val="accent1"/>
+          </a:fillRef>
+          <a:effectRef idx="2">
+            <a:schemeClr val="accent1"/>
+          </a:effectRef>
+          <a:fontRef idx="minor">
+            <a:schemeClr val="lt1"/>
+          </a:fontRef>
+        </p:style>
+        <p:txBody>
+          <a:bodyPr rtlCol="0" anchor="ctr"/>
+          <a:lstStyle/>
+          <a:p>
+            <a:pPr algn="ctr"/>
+          </a:p>
+        </p:txBody>
+      </p:sp>
+      <p:sp>
+        <p:nvSpPr>
+          <p:cNvPr id="5" name="TextBox 4"/>
           <p:cNvSpPr txBox="1"/>
           <p:nvPr/>
         </p:nvSpPr>
         <p:spPr>
           <a:xfrm>
-            <a:off x="274320" y="109728"/>
-            <a:ext cx="11612880" cy="457200"/>
+            <a:off x="274320" y="51435"/>
+            <a:ext cx="4572000" cy="411480"/>
           </a:xfrm>
           <a:prstGeom prst="rect">
             <a:avLst/>
@@ -6942,28 +7641,27 @@
           </a:bodyPr>
           <a:lstStyle/>
           <a:p>
-            <a:pPr algn="l"/>
-            <a:r>
-              <a:rPr sz="900" b="0">
-                <a:solidFill>
-                  <a:srgbClr val="00B4D8"/>
-                </a:solidFill>
-              </a:rPr>
-              <a:t>SLIDE 9 — FROM DEEP LEARNING TO GENERAL INNOVATION ACCELERATOR</a:t>
-            </a:r>
-          </a:p>
-        </p:txBody>
-      </p:sp>
-      <p:sp>
-        <p:nvSpPr>
-          <p:cNvPr id="4" name="TextBox 3"/>
+            <a:r>
+              <a:rPr sz="800" b="0" i="0">
+                <a:solidFill>
+                  <a:srgbClr val="3B6BFF"/>
+                </a:solidFill>
+              </a:rPr>
+              <a:t>ETFT · AutoScientist</a:t>
+            </a:r>
+          </a:p>
+        </p:txBody>
+      </p:sp>
+      <p:sp>
+        <p:nvSpPr>
+          <p:cNvPr id="6" name="TextBox 5"/>
           <p:cNvSpPr txBox="1"/>
           <p:nvPr/>
         </p:nvSpPr>
         <p:spPr>
           <a:xfrm>
-            <a:off x="274320" y="502920"/>
-            <a:ext cx="11612880" cy="777240"/>
+            <a:off x="6858000" y="51435"/>
+            <a:ext cx="2011680" cy="411480"/>
           </a:xfrm>
           <a:prstGeom prst="rect">
             <a:avLst/>
@@ -6976,28 +7674,28 @@
           </a:bodyPr>
           <a:lstStyle/>
           <a:p>
-            <a:pPr algn="l"/>
-            <a:r>
-              <a:rPr sz="2600" b="1">
-                <a:solidFill>
-                  <a:srgbClr val="FFFFFF"/>
-                </a:solidFill>
-              </a:rPr>
-              <a:t>The same engine that invents neural architectures can evolve anything.</a:t>
-            </a:r>
-          </a:p>
-        </p:txBody>
-      </p:sp>
-      <p:sp>
-        <p:nvSpPr>
-          <p:cNvPr id="5" name="TextBox 4"/>
+            <a:pPr algn="r"/>
+            <a:r>
+              <a:rPr sz="800" b="0" i="0">
+                <a:solidFill>
+                  <a:srgbClr val="8A94A6"/>
+                </a:solidFill>
+              </a:rPr>
+              <a:t>08 / 10</a:t>
+            </a:r>
+          </a:p>
+        </p:txBody>
+      </p:sp>
+      <p:sp>
+        <p:nvSpPr>
+          <p:cNvPr id="7" name="TextBox 6"/>
           <p:cNvSpPr txBox="1"/>
           <p:nvPr/>
         </p:nvSpPr>
         <p:spPr>
           <a:xfrm>
-            <a:off x="274320" y="1325880"/>
-            <a:ext cx="11612880" cy="4526279"/>
+            <a:off x="274320" y="308609"/>
+            <a:ext cx="8595359" cy="771525"/>
           </a:xfrm>
           <a:prstGeom prst="rect">
             <a:avLst/>
@@ -7010,198 +7708,27 @@
           </a:bodyPr>
           <a:lstStyle/>
           <a:p>
-            <a:pPr algn="l" lvl="1"/>
-            <a:r>
-              <a:rPr sz="1200">
-                <a:solidFill>
-                  <a:srgbClr val="CCD6E0"/>
-                </a:solidFill>
-              </a:rPr>
-              <a:t>• Tier 1 (base): Code &amp; algorithm optimisation (validated PoC)</a:t>
-            </a:r>
-          </a:p>
-          <a:p>
-            <a:pPr algn="l" lvl="1"/>
-            <a:r>
-              <a:rPr sz="1200">
-                <a:solidFill>
-                  <a:srgbClr val="CCD6E0"/>
-                </a:solidFill>
-              </a:rPr>
-              <a:t>• Tier 2 (middle): Scientific blueprints &amp; foundational papers (Second-Order Innovation)</a:t>
-            </a:r>
-          </a:p>
-          <a:p>
-            <a:pPr algn="l" lvl="1"/>
-            <a:r>
-              <a:rPr sz="1200">
-                <a:solidFill>
-                  <a:srgbClr val="CCD6E0"/>
-                </a:solidFill>
-              </a:rPr>
-              <a:t>• Tier 3 (apex): Organisational structures, societal systems (Meta-Evolution)</a:t>
-            </a:r>
-          </a:p>
-          <a:p>
-            <a:pPr algn="l">
-              <a:spcAft>
-                <a:spcPts val="400"/>
-              </a:spcAft>
-            </a:pPr>
-            <a:r>
-              <a:rPr sz="1300">
+            <a:r>
+              <a:rPr sz="1600" b="1" i="0">
                 <a:solidFill>
                   <a:srgbClr val="FFFFFF"/>
                 </a:solidFill>
               </a:rPr>
-              <a:t/>
-            </a:r>
-          </a:p>
-          <a:p>
-            <a:pPr algn="l">
-              <a:spcAft>
-                <a:spcPts val="400"/>
-              </a:spcAft>
-            </a:pPr>
-            <a:r>
-              <a:rPr sz="1300">
-                <a:solidFill>
-                  <a:srgbClr val="FFFFFF"/>
-                </a:solidFill>
-              </a:rPr>
-              <a:t/>
-            </a:r>
-          </a:p>
-          <a:p>
-            <a:pPr algn="l"/>
-            <a:r>
-              <a:rPr sz="1300">
-                <a:solidFill>
-                  <a:srgbClr val="FFFFFF"/>
-                </a:solidFill>
-              </a:rPr>
-              <a:t>An algorithm is any ordered sequence of instructions designed to solve a problem.</a:t>
-            </a:r>
-          </a:p>
-          <a:p>
-            <a:pPr algn="l"/>
-            <a:r>
-              <a:rPr sz="1300">
-                <a:solidFill>
-                  <a:srgbClr val="FFFFFF"/>
-                </a:solidFill>
-              </a:rPr>
-              <a:t>A pharmaceutical synthesis protocol is an algorithm. A clinical trial design is an algorithm.</a:t>
-            </a:r>
-          </a:p>
-          <a:p>
-            <a:pPr algn="l"/>
-            <a:r>
-              <a:rPr sz="1300">
-                <a:solidFill>
-                  <a:srgbClr val="FFFFFF"/>
-                </a:solidFill>
-              </a:rPr>
-              <a:t>A global supply chain is an algorithm. An organisation is a macro-algorithm.</a:t>
-            </a:r>
-          </a:p>
-          <a:p>
-            <a:pPr algn="l">
-              <a:spcAft>
-                <a:spcPts val="400"/>
-              </a:spcAft>
-            </a:pPr>
-            <a:r>
-              <a:rPr sz="1300">
-                <a:solidFill>
-                  <a:srgbClr val="FFFFFF"/>
-                </a:solidFill>
-              </a:rPr>
-              <a:t/>
-            </a:r>
-          </a:p>
-          <a:p>
-            <a:pPr algn="l"/>
-            <a:r>
-              <a:rPr sz="1300">
-                <a:solidFill>
-                  <a:srgbClr val="FFFFFF"/>
-                </a:solidFill>
-              </a:rPr>
-              <a:t>Once ETFT can map evolutionary trajectories in one domain, the framework transfers.</a:t>
-            </a:r>
-          </a:p>
-          <a:p>
-            <a:pPr algn="l"/>
-            <a:r>
-              <a:rPr sz="1300">
-                <a:solidFill>
-                  <a:srgbClr val="FFFFFF"/>
-                </a:solidFill>
-              </a:rPr>
-              <a:t>The General Innovation Accelerator does not compete with domain experts —</a:t>
-            </a:r>
-          </a:p>
-          <a:p>
-            <a:pPr algn="l"/>
-            <a:r>
-              <a:rPr sz="1300">
-                <a:solidFill>
-                  <a:srgbClr val="FFFFFF"/>
-                </a:solidFill>
-              </a:rPr>
-              <a:t>it gives them the autonomous research scientist they never had.</a:t>
-            </a:r>
-          </a:p>
-          <a:p>
-            <a:pPr algn="l">
-              <a:spcAft>
-                <a:spcPts val="400"/>
-              </a:spcAft>
-            </a:pPr>
-            <a:r>
-              <a:rPr sz="1300">
-                <a:solidFill>
-                  <a:srgbClr val="FFFFFF"/>
-                </a:solidFill>
-              </a:rPr>
-              <a:t/>
-            </a:r>
-          </a:p>
-          <a:p>
-            <a:pPr algn="l"/>
-            <a:r>
-              <a:rPr sz="1300">
-                <a:solidFill>
-                  <a:srgbClr val="FFFFFF"/>
-                </a:solidFill>
-              </a:rPr>
-              <a:t>Expanding the objective function to encode human wellbeing as the reward signal</a:t>
-            </a:r>
-          </a:p>
-          <a:p>
-            <a:pPr algn="l"/>
-            <a:r>
-              <a:rPr sz="1300">
-                <a:solidFill>
-                  <a:srgbClr val="FFFFFF"/>
-                </a:solidFill>
-              </a:rPr>
-              <a:t>opens targets no purely capital-efficiency model can reach.</a:t>
-            </a:r>
-          </a:p>
-        </p:txBody>
-      </p:sp>
-      <p:sp>
-        <p:nvSpPr>
-          <p:cNvPr id="6" name="TextBox 5"/>
+              <a:t>GPU-Poor PoC: Proof It Works Now</a:t>
+            </a:r>
+          </a:p>
+        </p:txBody>
+      </p:sp>
+      <p:sp>
+        <p:nvSpPr>
+          <p:cNvPr id="8" name="TextBox 7"/>
           <p:cNvSpPr txBox="1"/>
           <p:nvPr/>
         </p:nvSpPr>
         <p:spPr>
           <a:xfrm>
-            <a:off x="274320" y="6263640"/>
-            <a:ext cx="11612880" cy="274320"/>
+            <a:off x="274320" y="1440180"/>
+            <a:ext cx="8595359" cy="3394710"/>
           </a:xfrm>
           <a:prstGeom prst="rect">
             <a:avLst/>
@@ -7214,14 +7741,153 @@
           </a:bodyPr>
           <a:lstStyle/>
           <a:p>
-            <a:pPr algn="ctr"/>
-            <a:r>
-              <a:rPr sz="700" b="0">
-                <a:solidFill>
-                  <a:srgbClr val="CCD6E0"/>
-                </a:solidFill>
-              </a:rPr>
-              <a:t>ETFT (AutoScientist) · Lukas Benda · lukas.benda@boldpivot.cz · Confidential</a:t>
+            <a:r>
+              <a:rPr sz="1050">
+                <a:solidFill>
+                  <a:srgbClr val="1A1F2E"/>
+                </a:solidFill>
+              </a:rPr>
+              <a:t>Headline: SOTA+1 in TinyML — autonomously discovered in minutes, on a $1,500 GPU.</a:t>
+            </a:r>
+          </a:p>
+          <a:p>
+            <a:r>
+              <a:rPr sz="1050">
+                <a:solidFill>
+                  <a:srgbClr val="1A1F2E"/>
+                </a:solidFill>
+              </a:rPr>
+              <a:t>Key visual: Before/after bar chart.</a:t>
+            </a:r>
+          </a:p>
+          <a:p>
+            <a:r>
+              <a:rPr sz="900">
+                <a:solidFill>
+                  <a:srgbClr val="2D3748"/>
+                </a:solidFill>
+              </a:rPr>
+              <a:t>Metric  ·  Human-designed SOTA (a₃)  ·  ETFT SOTA+1 (a₄)</a:t>
+            </a:r>
+          </a:p>
+          <a:p>
+            <a:r>
+              <a:rPr sz="900">
+                <a:solidFill>
+                  <a:srgbClr val="2D3748"/>
+                </a:solidFill>
+              </a:rPr>
+              <a:t>Accuracy  ·  93.0%  ·  94.2%</a:t>
+            </a:r>
+          </a:p>
+          <a:p>
+            <a:r>
+              <a:rPr sz="900">
+                <a:solidFill>
+                  <a:srgbClr val="2D3748"/>
+                </a:solidFill>
+              </a:rPr>
+              <a:t>Peak RAM  ·  18 KB  ·  11 KB</a:t>
+            </a:r>
+          </a:p>
+          <a:p>
+            <a:r>
+              <a:rPr sz="900">
+                <a:solidFill>
+                  <a:srgbClr val="2D3748"/>
+                </a:solidFill>
+              </a:rPr>
+              <a:t>Discovery method  ·  Human researcher, months  ·  Autonomous agent, minutes</a:t>
+            </a:r>
+          </a:p>
+          <a:p>
+            <a:r>
+              <a:rPr sz="900">
+                <a:solidFill>
+                  <a:srgbClr val="2D3748"/>
+                </a:solidFill>
+              </a:rPr>
+              <a:t>Compute required  ·  H100 cluster  ·  Consumer RTX 4090</a:t>
+            </a:r>
+          </a:p>
+          <a:p>
+            <a:r>
+              <a:rPr sz="1050">
+                <a:solidFill>
+                  <a:srgbClr val="1A1F2E"/>
+                </a:solidFill>
+              </a:rPr>
+              <a:t>Body copy:</a:t>
+            </a:r>
+          </a:p>
+          <a:p>
+            <a:r>
+              <a:rPr sz="1050">
+                <a:solidFill>
+                  <a:srgbClr val="1A1F2E"/>
+                </a:solidFill>
+              </a:rPr>
+              <a:t>The "GPU-Poor" PoC deliberately avoids large-scale compute to prove the *cognitive</a:t>
+            </a:r>
+          </a:p>
+          <a:p>
+            <a:r>
+              <a:rPr sz="1050">
+                <a:solidFill>
+                  <a:srgbClr val="1A1F2E"/>
+                </a:solidFill>
+              </a:rPr>
+              <a:t>architecture* works independently of hardware:</a:t>
+            </a:r>
+          </a:p>
+          <a:p>
+            <a:r>
+              <a:rPr sz="1050">
+                <a:solidFill>
+                  <a:srgbClr val="1A1F2E"/>
+                </a:solidFill>
+              </a:rPr>
+              <a:t>  •  Evolutionary trajectory (MLP → MobileNetV2) injected into context</a:t>
+            </a:r>
+          </a:p>
+          <a:p>
+            <a:r>
+              <a:rPr sz="1050">
+                <a:solidFill>
+                  <a:srgbClr val="1A1F2E"/>
+                </a:solidFill>
+              </a:rPr>
+              <a:t>  •  Agent issued Pareto analysis, literature retrieval, and synthesis directives</a:t>
+            </a:r>
+          </a:p>
+          <a:p>
+            <a:r>
+              <a:rPr sz="1050">
+                <a:solidFill>
+                  <a:srgbClr val="1A1F2E"/>
+                </a:solidFill>
+              </a:rPr>
+              <a:t>  •  By iteration 3 the agent stabilised a 1D State Space Model (Mamba-style)</a:t>
+            </a:r>
+          </a:p>
+          <a:p>
+            <a:r>
+              <a:rPr sz="1050">
+                <a:solidFill>
+                  <a:srgbClr val="1A1F2E"/>
+                </a:solidFill>
+              </a:rPr>
+              <a:t>discovered from post-cutoff literature — surpassing every human-designed baseline</a:t>
+            </a:r>
+          </a:p>
+          <a:p>
+            <a:r>
+              <a:rPr sz="1050">
+                <a:solidFill>
+                  <a:srgbClr val="1A1F2E"/>
+                </a:solidFill>
+              </a:rPr>
+              <a:t>The PoC is reproducible on a free Google Colab instance.</a:t>
             </a:r>
           </a:p>
         </p:txBody>
